--- a/packaging-publishing/Slides/1_introduction.pptx
+++ b/packaging-publishing/Slides/1_introduction.pptx
@@ -5,27 +5,28 @@
     <p:sldMasterId id="2147483648" r:id="rId1"/>
   </p:sldMasterIdLst>
   <p:notesMasterIdLst>
-    <p:notesMasterId r:id="rId20"/>
+    <p:notesMasterId r:id="rId21"/>
   </p:notesMasterIdLst>
   <p:sldIdLst>
     <p:sldId id="332" r:id="rId2"/>
-    <p:sldId id="313" r:id="rId3"/>
-    <p:sldId id="314" r:id="rId4"/>
-    <p:sldId id="315" r:id="rId5"/>
-    <p:sldId id="316" r:id="rId6"/>
-    <p:sldId id="317" r:id="rId7"/>
-    <p:sldId id="318" r:id="rId8"/>
-    <p:sldId id="278" r:id="rId9"/>
-    <p:sldId id="286" r:id="rId10"/>
-    <p:sldId id="272" r:id="rId11"/>
-    <p:sldId id="287" r:id="rId12"/>
-    <p:sldId id="279" r:id="rId13"/>
-    <p:sldId id="311" r:id="rId14"/>
-    <p:sldId id="310" r:id="rId15"/>
-    <p:sldId id="281" r:id="rId16"/>
-    <p:sldId id="283" r:id="rId17"/>
-    <p:sldId id="331" r:id="rId18"/>
-    <p:sldId id="309" r:id="rId19"/>
+    <p:sldId id="333" r:id="rId3"/>
+    <p:sldId id="313" r:id="rId4"/>
+    <p:sldId id="314" r:id="rId5"/>
+    <p:sldId id="315" r:id="rId6"/>
+    <p:sldId id="316" r:id="rId7"/>
+    <p:sldId id="317" r:id="rId8"/>
+    <p:sldId id="318" r:id="rId9"/>
+    <p:sldId id="278" r:id="rId10"/>
+    <p:sldId id="286" r:id="rId11"/>
+    <p:sldId id="272" r:id="rId12"/>
+    <p:sldId id="287" r:id="rId13"/>
+    <p:sldId id="279" r:id="rId14"/>
+    <p:sldId id="311" r:id="rId15"/>
+    <p:sldId id="310" r:id="rId16"/>
+    <p:sldId id="281" r:id="rId17"/>
+    <p:sldId id="283" r:id="rId18"/>
+    <p:sldId id="331" r:id="rId19"/>
+    <p:sldId id="309" r:id="rId20"/>
   </p:sldIdLst>
   <p:sldSz cx="12192000" cy="6858000"/>
   <p:notesSz cx="6858000" cy="9144000"/>
@@ -132,6 +133,229 @@
 </p:presentation>
 </file>
 
+<file path=ppt/revisionInfo.xml><?xml version="1.0" encoding="utf-8"?>
+<p1510:revInfo xmlns:a="http://schemas.openxmlformats.org/drawingml/2006/main" xmlns:r="http://schemas.openxmlformats.org/officeDocument/2006/relationships" xmlns:p1510="http://schemas.microsoft.com/office/powerpoint/2015/10/main">
+  <p1510:revLst>
+    <p1510:client id="{2CFFC52A-BBB0-F141-B129-6B7D7C4A34BA}" v="160" dt="2026-03-10T09:43:27.016"/>
+  </p1510:revLst>
+</p1510:revInfo>
+</file>
+
+<file path=ppt/changesInfos/changesInfo1.xml><?xml version="1.0" encoding="utf-8"?>
+<pc:chgInfo xmlns:a="http://schemas.openxmlformats.org/drawingml/2006/main" xmlns:r="http://schemas.openxmlformats.org/officeDocument/2006/relationships" xmlns:ac="http://schemas.microsoft.com/office/drawing/2013/main/command" xmlns:pc="http://schemas.microsoft.com/office/powerpoint/2013/main/command">
+  <pc:docChgLst>
+    <pc:chgData name="Finley Griffin" userId="22b0b6c4-ce40-4dd6-a0c2-f0f65dd91442" providerId="ADAL" clId="{E340F9FE-63CF-5DC1-BB85-0501F5A6B451}"/>
+    <pc:docChg chg="undo custSel addSld modSld">
+      <pc:chgData name="Finley Griffin" userId="22b0b6c4-ce40-4dd6-a0c2-f0f65dd91442" providerId="ADAL" clId="{E340F9FE-63CF-5DC1-BB85-0501F5A6B451}" dt="2026-03-10T09:43:38.256" v="2594" actId="1076"/>
+      <pc:docMkLst>
+        <pc:docMk/>
+      </pc:docMkLst>
+      <pc:sldChg chg="modNotesTx">
+        <pc:chgData name="Finley Griffin" userId="22b0b6c4-ce40-4dd6-a0c2-f0f65dd91442" providerId="ADAL" clId="{E340F9FE-63CF-5DC1-BB85-0501F5A6B451}" dt="2026-03-05T13:29:58.809" v="1813" actId="20577"/>
+        <pc:sldMkLst>
+          <pc:docMk/>
+          <pc:sldMk cId="385288236" sldId="272"/>
+        </pc:sldMkLst>
+      </pc:sldChg>
+      <pc:sldChg chg="modNotesTx">
+        <pc:chgData name="Finley Griffin" userId="22b0b6c4-ce40-4dd6-a0c2-f0f65dd91442" providerId="ADAL" clId="{E340F9FE-63CF-5DC1-BB85-0501F5A6B451}" dt="2026-03-05T13:28:04.271" v="1647" actId="20577"/>
+        <pc:sldMkLst>
+          <pc:docMk/>
+          <pc:sldMk cId="1582315303" sldId="278"/>
+        </pc:sldMkLst>
+      </pc:sldChg>
+      <pc:sldChg chg="modNotesTx">
+        <pc:chgData name="Finley Griffin" userId="22b0b6c4-ce40-4dd6-a0c2-f0f65dd91442" providerId="ADAL" clId="{E340F9FE-63CF-5DC1-BB85-0501F5A6B451}" dt="2026-03-05T13:35:15.009" v="2048" actId="20577"/>
+        <pc:sldMkLst>
+          <pc:docMk/>
+          <pc:sldMk cId="2753955194" sldId="279"/>
+        </pc:sldMkLst>
+      </pc:sldChg>
+      <pc:sldChg chg="modNotesTx">
+        <pc:chgData name="Finley Griffin" userId="22b0b6c4-ce40-4dd6-a0c2-f0f65dd91442" providerId="ADAL" clId="{E340F9FE-63CF-5DC1-BB85-0501F5A6B451}" dt="2026-03-05T13:29:19.719" v="1804" actId="20577"/>
+        <pc:sldMkLst>
+          <pc:docMk/>
+          <pc:sldMk cId="1533927788" sldId="286"/>
+        </pc:sldMkLst>
+      </pc:sldChg>
+      <pc:sldChg chg="modNotesTx">
+        <pc:chgData name="Finley Griffin" userId="22b0b6c4-ce40-4dd6-a0c2-f0f65dd91442" providerId="ADAL" clId="{E340F9FE-63CF-5DC1-BB85-0501F5A6B451}" dt="2026-03-05T13:31:10.029" v="1930" actId="20577"/>
+        <pc:sldMkLst>
+          <pc:docMk/>
+          <pc:sldMk cId="241864250" sldId="287"/>
+        </pc:sldMkLst>
+      </pc:sldChg>
+      <pc:sldChg chg="modNotesTx">
+        <pc:chgData name="Finley Griffin" userId="22b0b6c4-ce40-4dd6-a0c2-f0f65dd91442" providerId="ADAL" clId="{E340F9FE-63CF-5DC1-BB85-0501F5A6B451}" dt="2026-03-05T13:45:44.961" v="2333" actId="20577"/>
+        <pc:sldMkLst>
+          <pc:docMk/>
+          <pc:sldMk cId="1363420478" sldId="309"/>
+        </pc:sldMkLst>
+      </pc:sldChg>
+      <pc:sldChg chg="modNotesTx">
+        <pc:chgData name="Finley Griffin" userId="22b0b6c4-ce40-4dd6-a0c2-f0f65dd91442" providerId="ADAL" clId="{E340F9FE-63CF-5DC1-BB85-0501F5A6B451}" dt="2026-03-05T13:42:00.060" v="2143" actId="20577"/>
+        <pc:sldMkLst>
+          <pc:docMk/>
+          <pc:sldMk cId="2766979242" sldId="310"/>
+        </pc:sldMkLst>
+      </pc:sldChg>
+      <pc:sldChg chg="modNotesTx">
+        <pc:chgData name="Finley Griffin" userId="22b0b6c4-ce40-4dd6-a0c2-f0f65dd91442" providerId="ADAL" clId="{E340F9FE-63CF-5DC1-BB85-0501F5A6B451}" dt="2026-03-05T13:15:21.723" v="1298" actId="20577"/>
+        <pc:sldMkLst>
+          <pc:docMk/>
+          <pc:sldMk cId="2117379087" sldId="313"/>
+        </pc:sldMkLst>
+      </pc:sldChg>
+      <pc:sldChg chg="modNotesTx">
+        <pc:chgData name="Finley Griffin" userId="22b0b6c4-ce40-4dd6-a0c2-f0f65dd91442" providerId="ADAL" clId="{E340F9FE-63CF-5DC1-BB85-0501F5A6B451}" dt="2026-03-05T13:17:48.104" v="1357" actId="20577"/>
+        <pc:sldMkLst>
+          <pc:docMk/>
+          <pc:sldMk cId="286825523" sldId="315"/>
+        </pc:sldMkLst>
+      </pc:sldChg>
+      <pc:sldChg chg="modNotesTx">
+        <pc:chgData name="Finley Griffin" userId="22b0b6c4-ce40-4dd6-a0c2-f0f65dd91442" providerId="ADAL" clId="{E340F9FE-63CF-5DC1-BB85-0501F5A6B451}" dt="2026-03-05T13:18:57.270" v="1370" actId="20577"/>
+        <pc:sldMkLst>
+          <pc:docMk/>
+          <pc:sldMk cId="2072624961" sldId="316"/>
+        </pc:sldMkLst>
+      </pc:sldChg>
+      <pc:sldChg chg="modNotesTx">
+        <pc:chgData name="Finley Griffin" userId="22b0b6c4-ce40-4dd6-a0c2-f0f65dd91442" providerId="ADAL" clId="{E340F9FE-63CF-5DC1-BB85-0501F5A6B451}" dt="2026-03-05T13:19:32.104" v="1385" actId="20577"/>
+        <pc:sldMkLst>
+          <pc:docMk/>
+          <pc:sldMk cId="3025584475" sldId="317"/>
+        </pc:sldMkLst>
+      </pc:sldChg>
+      <pc:sldChg chg="addSp delSp modSp mod delAnim modAnim modNotesTx">
+        <pc:chgData name="Finley Griffin" userId="22b0b6c4-ce40-4dd6-a0c2-f0f65dd91442" providerId="ADAL" clId="{E340F9FE-63CF-5DC1-BB85-0501F5A6B451}" dt="2026-03-05T13:23:55.472" v="1567" actId="1076"/>
+        <pc:sldMkLst>
+          <pc:docMk/>
+          <pc:sldMk cId="2813265152" sldId="318"/>
+        </pc:sldMkLst>
+        <pc:spChg chg="add mod">
+          <ac:chgData name="Finley Griffin" userId="22b0b6c4-ce40-4dd6-a0c2-f0f65dd91442" providerId="ADAL" clId="{E340F9FE-63CF-5DC1-BB85-0501F5A6B451}" dt="2026-03-05T13:23:41.233" v="1563" actId="207"/>
+          <ac:spMkLst>
+            <pc:docMk/>
+            <pc:sldMk cId="2813265152" sldId="318"/>
+            <ac:spMk id="2" creationId="{36A20216-E771-EF17-636C-FCBE561033CD}"/>
+          </ac:spMkLst>
+        </pc:spChg>
+        <pc:spChg chg="add mod">
+          <ac:chgData name="Finley Griffin" userId="22b0b6c4-ce40-4dd6-a0c2-f0f65dd91442" providerId="ADAL" clId="{E340F9FE-63CF-5DC1-BB85-0501F5A6B451}" dt="2026-03-05T13:23:41.233" v="1563" actId="207"/>
+          <ac:spMkLst>
+            <pc:docMk/>
+            <pc:sldMk cId="2813265152" sldId="318"/>
+            <ac:spMk id="3" creationId="{C5C1D25E-AACD-B681-621D-233775343983}"/>
+          </ac:spMkLst>
+        </pc:spChg>
+        <pc:spChg chg="add mod">
+          <ac:chgData name="Finley Griffin" userId="22b0b6c4-ce40-4dd6-a0c2-f0f65dd91442" providerId="ADAL" clId="{E340F9FE-63CF-5DC1-BB85-0501F5A6B451}" dt="2026-03-05T13:23:41.233" v="1563" actId="207"/>
+          <ac:spMkLst>
+            <pc:docMk/>
+            <pc:sldMk cId="2813265152" sldId="318"/>
+            <ac:spMk id="4" creationId="{10C984AC-17A8-1BF5-0F97-225AC2AB6004}"/>
+          </ac:spMkLst>
+        </pc:spChg>
+        <pc:spChg chg="add mod">
+          <ac:chgData name="Finley Griffin" userId="22b0b6c4-ce40-4dd6-a0c2-f0f65dd91442" providerId="ADAL" clId="{E340F9FE-63CF-5DC1-BB85-0501F5A6B451}" dt="2026-03-05T13:23:41.233" v="1563" actId="207"/>
+          <ac:spMkLst>
+            <pc:docMk/>
+            <pc:sldMk cId="2813265152" sldId="318"/>
+            <ac:spMk id="5" creationId="{126F894B-07A4-94E1-18FA-FD56BE421B24}"/>
+          </ac:spMkLst>
+        </pc:spChg>
+        <pc:spChg chg="add mod">
+          <ac:chgData name="Finley Griffin" userId="22b0b6c4-ce40-4dd6-a0c2-f0f65dd91442" providerId="ADAL" clId="{E340F9FE-63CF-5DC1-BB85-0501F5A6B451}" dt="2026-03-05T13:23:41.233" v="1563" actId="207"/>
+          <ac:spMkLst>
+            <pc:docMk/>
+            <pc:sldMk cId="2813265152" sldId="318"/>
+            <ac:spMk id="8" creationId="{CD1D8ADA-0FCB-F074-045D-636D497C9D7E}"/>
+          </ac:spMkLst>
+        </pc:spChg>
+        <pc:spChg chg="mod">
+          <ac:chgData name="Finley Griffin" userId="22b0b6c4-ce40-4dd6-a0c2-f0f65dd91442" providerId="ADAL" clId="{E340F9FE-63CF-5DC1-BB85-0501F5A6B451}" dt="2026-03-05T13:23:54.245" v="1565" actId="207"/>
+          <ac:spMkLst>
+            <pc:docMk/>
+            <pc:sldMk cId="2813265152" sldId="318"/>
+            <ac:spMk id="11" creationId="{ECDE3E77-F1D8-C29A-65C8-B8A37BE81D17}"/>
+          </ac:spMkLst>
+        </pc:spChg>
+        <pc:picChg chg="mod">
+          <ac:chgData name="Finley Griffin" userId="22b0b6c4-ce40-4dd6-a0c2-f0f65dd91442" providerId="ADAL" clId="{E340F9FE-63CF-5DC1-BB85-0501F5A6B451}" dt="2026-03-05T13:23:55.472" v="1567" actId="1076"/>
+          <ac:picMkLst>
+            <pc:docMk/>
+            <pc:sldMk cId="2813265152" sldId="318"/>
+            <ac:picMk id="6" creationId="{C8DF7C4A-A14B-5DE0-3513-1C8EE8EF4768}"/>
+          </ac:picMkLst>
+        </pc:picChg>
+      </pc:sldChg>
+      <pc:sldChg chg="modNotesTx">
+        <pc:chgData name="Finley Griffin" userId="22b0b6c4-ce40-4dd6-a0c2-f0f65dd91442" providerId="ADAL" clId="{E340F9FE-63CF-5DC1-BB85-0501F5A6B451}" dt="2026-03-05T13:43:01.278" v="2146" actId="20577"/>
+        <pc:sldMkLst>
+          <pc:docMk/>
+          <pc:sldMk cId="3396929114" sldId="331"/>
+        </pc:sldMkLst>
+      </pc:sldChg>
+      <pc:sldChg chg="modSp mod modNotesTx">
+        <pc:chgData name="Finley Griffin" userId="22b0b6c4-ce40-4dd6-a0c2-f0f65dd91442" providerId="ADAL" clId="{E340F9FE-63CF-5DC1-BB85-0501F5A6B451}" dt="2026-03-10T09:41:31.020" v="2364" actId="20577"/>
+        <pc:sldMkLst>
+          <pc:docMk/>
+          <pc:sldMk cId="3677417176" sldId="332"/>
+        </pc:sldMkLst>
+        <pc:spChg chg="mod">
+          <ac:chgData name="Finley Griffin" userId="22b0b6c4-ce40-4dd6-a0c2-f0f65dd91442" providerId="ADAL" clId="{E340F9FE-63CF-5DC1-BB85-0501F5A6B451}" dt="2026-03-10T09:41:31.020" v="2364" actId="20577"/>
+          <ac:spMkLst>
+            <pc:docMk/>
+            <pc:sldMk cId="3677417176" sldId="332"/>
+            <ac:spMk id="4" creationId="{00000000-0000-0000-0000-000000000000}"/>
+          </ac:spMkLst>
+        </pc:spChg>
+      </pc:sldChg>
+      <pc:sldChg chg="addSp delSp modSp new mod">
+        <pc:chgData name="Finley Griffin" userId="22b0b6c4-ce40-4dd6-a0c2-f0f65dd91442" providerId="ADAL" clId="{E340F9FE-63CF-5DC1-BB85-0501F5A6B451}" dt="2026-03-10T09:43:38.256" v="2594" actId="1076"/>
+        <pc:sldMkLst>
+          <pc:docMk/>
+          <pc:sldMk cId="4191210072" sldId="333"/>
+        </pc:sldMkLst>
+        <pc:spChg chg="mod">
+          <ac:chgData name="Finley Griffin" userId="22b0b6c4-ce40-4dd6-a0c2-f0f65dd91442" providerId="ADAL" clId="{E340F9FE-63CF-5DC1-BB85-0501F5A6B451}" dt="2026-03-10T09:42:05.501" v="2426" actId="20577"/>
+          <ac:spMkLst>
+            <pc:docMk/>
+            <pc:sldMk cId="4191210072" sldId="333"/>
+            <ac:spMk id="2" creationId="{E0420195-C79B-3B0F-D479-86340A2C12BB}"/>
+          </ac:spMkLst>
+        </pc:spChg>
+        <pc:spChg chg="mod">
+          <ac:chgData name="Finley Griffin" userId="22b0b6c4-ce40-4dd6-a0c2-f0f65dd91442" providerId="ADAL" clId="{E340F9FE-63CF-5DC1-BB85-0501F5A6B451}" dt="2026-03-10T09:43:10.417" v="2586" actId="20577"/>
+          <ac:spMkLst>
+            <pc:docMk/>
+            <pc:sldMk cId="4191210072" sldId="333"/>
+            <ac:spMk id="3" creationId="{3299C1E5-C214-D48B-72FD-890B98593842}"/>
+          </ac:spMkLst>
+        </pc:spChg>
+        <pc:spChg chg="del">
+          <ac:chgData name="Finley Griffin" userId="22b0b6c4-ce40-4dd6-a0c2-f0f65dd91442" providerId="ADAL" clId="{E340F9FE-63CF-5DC1-BB85-0501F5A6B451}" dt="2026-03-10T09:42:12.020" v="2444" actId="478"/>
+          <ac:spMkLst>
+            <pc:docMk/>
+            <pc:sldMk cId="4191210072" sldId="333"/>
+            <ac:spMk id="4" creationId="{436D8CB5-4A58-76D7-5890-A01B56518F1F}"/>
+          </ac:spMkLst>
+        </pc:spChg>
+        <pc:picChg chg="add mod">
+          <ac:chgData name="Finley Griffin" userId="22b0b6c4-ce40-4dd6-a0c2-f0f65dd91442" providerId="ADAL" clId="{E340F9FE-63CF-5DC1-BB85-0501F5A6B451}" dt="2026-03-10T09:43:38.256" v="2594" actId="1076"/>
+          <ac:picMkLst>
+            <pc:docMk/>
+            <pc:sldMk cId="4191210072" sldId="333"/>
+            <ac:picMk id="5" creationId="{87871792-B3FC-815F-FFEE-2E61E7225FE3}"/>
+          </ac:picMkLst>
+        </pc:picChg>
+      </pc:sldChg>
+    </pc:docChg>
+  </pc:docChgLst>
+</pc:chgInfo>
+</file>
+
 <file path=ppt/notesMasters/notesMaster1.xml><?xml version="1.0" encoding="utf-8"?>
 <p:notesMaster xmlns:a="http://schemas.openxmlformats.org/drawingml/2006/main" xmlns:r="http://schemas.openxmlformats.org/officeDocument/2006/relationships" xmlns:p="http://schemas.openxmlformats.org/presentationml/2006/main">
   <p:cSld>
@@ -214,7 +438,7 @@
           <a:p>
             <a:fld id="{71E2E790-179D-BA4F-AA34-44105FAF543E}" type="datetimeFigureOut">
               <a:rPr lang="en-US" smtClean="0"/>
-              <a:t>5/1/24</a:t>
+              <a:t>3/10/26</a:t>
             </a:fld>
             <a:endParaRPr lang="en-US"/>
           </a:p>
@@ -528,7 +752,7 @@
           <a:p>
             <a:r>
               <a:rPr lang="en-US" dirty="0"/>
-              <a:t>Just before we get started, I would just like to give a brief overview of the Accelerate program.</a:t>
+              <a:t>I'm Fin I'm an MLE and I will be running the workshop today. </a:t>
             </a:r>
           </a:p>
           <a:p>
@@ -537,7 +761,16 @@
           <a:p>
             <a:r>
               <a:rPr lang="en-US" dirty="0"/>
-              <a:t>Essentially, our driving goal is to help researchers use AI in their research. It says here that we pursue research at the interface of AI and Science, and the word science, evokes the typical STEM subjects, but actually it isn’t. We’re finding more and more that researchers from the Humanities want to utilize machine learning methods, and we’re having to reassess what we think of as traditional science.</a:t>
+              <a:t>Ryan and Radzim to offer technical support</a:t>
+            </a:r>
+          </a:p>
+          <a:p>
+            <a:endParaRPr lang="en-US" dirty="0"/>
+          </a:p>
+          <a:p>
+            <a:r>
+              <a:rPr lang="en-US" dirty="0"/>
+              <a:t>Will talk more about our group shortly</a:t>
             </a:r>
           </a:p>
         </p:txBody>
@@ -624,11 +857,8 @@
           <a:p>
             <a:r>
               <a:rPr lang="en-GB" dirty="0"/>
-              <a:t>The aim with the courses that we run is to provide material that people can work through in their own time, but also in the context of a full day workshop event, with instructors there to help. So because this is not 8 hours, it’s only 90 minutes, we can’t work through the entire thing, so instead we’ll just touch on a few things here and of course the material is available for you to work on if you like. Please note that this is the first time we’ve run this workshop, and it’s not until May, so 1. there is still time to sign up if you like, and 2. it’s not 100% finished yet, so there may still be some minor teething issues. If you are working through it, please do feel free to either open an issue, submit a PR, or just let me know. So in a short while, I’ll introduce the material, but for now:</a:t>
-            </a:r>
-          </a:p>
-          <a:p>
-            <a:endParaRPr lang="en-GB" dirty="0"/>
+              <a:t>We provide material that people can work through in their own time, but also in the context of a full day workshop event, with instructors there to help.</a:t>
+            </a:r>
           </a:p>
           <a:p>
             <a:endParaRPr lang="en-GB" dirty="0"/>
@@ -658,7 +888,7 @@
           <a:p>
             <a:fld id="{6184AF57-4BD4-7D48-A093-6530DDD8C062}" type="slidenum">
               <a:rPr lang="en-US" smtClean="0"/>
-              <a:t>10</a:t>
+              <a:t>11</a:t>
             </a:fld>
             <a:endParaRPr lang="en-US"/>
           </a:p>
@@ -832,7 +1062,40 @@
             </a:r>
             <a:r>
               <a:rPr lang="en-US" dirty="0"/>
-              <a:t>? PyCharm? Spyder? Any hipsters who are using Vim ironically or something? </a:t>
+              <a:t>? PyCharm? Cursor? Vim?</a:t>
+            </a:r>
+          </a:p>
+          <a:p>
+            <a:endParaRPr lang="en-US" dirty="0"/>
+          </a:p>
+          <a:p>
+            <a:r>
+              <a:rPr lang="en-US" dirty="0"/>
+              <a:t>We're </a:t>
+            </a:r>
+            <a:r>
+              <a:rPr lang="en-US" dirty="0" err="1"/>
+              <a:t>gonna</a:t>
+            </a:r>
+            <a:r>
+              <a:rPr lang="en-US" dirty="0"/>
+              <a:t> be using </a:t>
+            </a:r>
+            <a:r>
+              <a:rPr lang="en-US" dirty="0" err="1"/>
+              <a:t>VSCode</a:t>
+            </a:r>
+            <a:r>
+              <a:rPr lang="en-US" dirty="0"/>
+              <a:t> / </a:t>
+            </a:r>
+            <a:r>
+              <a:rPr lang="en-US" dirty="0" err="1"/>
+              <a:t>JupyterLab</a:t>
+            </a:r>
+            <a:r>
+              <a:rPr lang="en-US" dirty="0"/>
+              <a:t> today on our teaching platform</a:t>
             </a:r>
           </a:p>
         </p:txBody>
@@ -854,7 +1117,7 @@
           <a:p>
             <a:fld id="{405232F6-B76B-E748-9DF9-431B1E2F1F8C}" type="slidenum">
               <a:rPr lang="en-US" smtClean="0"/>
-              <a:t>11</a:t>
+              <a:t>12</a:t>
             </a:fld>
             <a:endParaRPr lang="en-US"/>
           </a:p>
@@ -928,7 +1191,7 @@
           <a:p>
             <a:r>
               <a:rPr lang="en-US" dirty="0"/>
-              <a:t>Something that we often gloss over and don’t think about are the ethical implications of what we’re doing with our software. And it’s easy to think that sometimes nobody is going to use it, or that it won’t be deployed in the real world. And we’re not just talking about direct consequences, such as: my software is going to be used in missile guidance systems. There are potential downstream effects of developing software, and deploying it either in real world environments, or to aid scientific discovery.</a:t>
+              <a:t>Here are the UNESCO guidelines on responsible use of AI, but they can just as easily apply to any software.</a:t>
             </a:r>
           </a:p>
           <a:p>
@@ -937,16 +1200,88 @@
           <a:p>
             <a:r>
               <a:rPr lang="en-US" dirty="0"/>
-              <a:t>Think about some recent software issues that have been in the news…poor software engineering practices literally destroys lives.</a:t>
+              <a:t>Recommend weapons of math destruction by Cathy O'Neil</a:t>
             </a:r>
           </a:p>
           <a:p>
             <a:endParaRPr lang="en-US" dirty="0"/>
           </a:p>
           <a:p>
+            <a:pPr marL="0" indent="0">
+              <a:buFontTx/>
+              <a:buNone/>
+            </a:pPr>
             <a:r>
               <a:rPr lang="en-US" dirty="0"/>
-              <a:t>These problems can come in a variety of forms:</a:t>
+              <a:t>How do we make software systems auditable and traceable?</a:t>
+            </a:r>
+          </a:p>
+          <a:p>
+            <a:pPr marL="0" indent="0">
+              <a:buFontTx/>
+              <a:buNone/>
+            </a:pPr>
+            <a:endParaRPr lang="en-US" dirty="0"/>
+          </a:p>
+          <a:p>
+            <a:pPr marL="0" indent="0">
+              <a:buFontTx/>
+              <a:buNone/>
+            </a:pPr>
+            <a:r>
+              <a:rPr lang="en-US" dirty="0"/>
+              <a:t>How can we monitor security vulnerabilities? </a:t>
+            </a:r>
+          </a:p>
+          <a:p>
+            <a:pPr marL="0" indent="0">
+              <a:buFontTx/>
+              <a:buNone/>
+            </a:pPr>
+            <a:endParaRPr lang="en-US" dirty="0"/>
+          </a:p>
+          <a:p>
+            <a:pPr marL="0" indent="0">
+              <a:buFontTx/>
+              <a:buNone/>
+            </a:pPr>
+            <a:r>
+              <a:rPr lang="en-US" dirty="0"/>
+              <a:t>How can we be transparent and make sure our systems are explainable and interpretable? </a:t>
+            </a:r>
+          </a:p>
+          <a:p>
+            <a:pPr marL="0" indent="0">
+              <a:buFontTx/>
+              <a:buNone/>
+            </a:pPr>
+            <a:endParaRPr lang="en-US" dirty="0"/>
+          </a:p>
+          <a:p>
+            <a:pPr marL="0" indent="0">
+              <a:buFontTx/>
+              <a:buNone/>
+            </a:pPr>
+            <a:r>
+              <a:rPr lang="en-US" dirty="0"/>
+              <a:t>How can we ensure privacy.</a:t>
+            </a:r>
+          </a:p>
+          <a:p>
+            <a:pPr marL="0" indent="0">
+              <a:buFontTx/>
+              <a:buNone/>
+            </a:pPr>
+            <a:endParaRPr lang="en-US" dirty="0"/>
+          </a:p>
+          <a:p>
+            <a:pPr marL="0" indent="0">
+              <a:buFontTx/>
+              <a:buNone/>
+            </a:pPr>
+            <a:r>
+              <a:rPr lang="en-US" dirty="0"/>
+              <a:t>Actually, the answers to some of these questions lies in proper software engineering practices.</a:t>
             </a:r>
           </a:p>
           <a:p>
@@ -956,7 +1291,7 @@
             </a:pPr>
             <a:r>
               <a:rPr lang="en-US" dirty="0"/>
-              <a:t>Bugs – bugs are just errors in the code. You think the code is doing one thing, when in actuality, it’s doing something completely different. Everything runs, and you get some coherent answers, but those answers are wrong.</a:t>
+              <a:t>We can make our code open source.</a:t>
             </a:r>
           </a:p>
           <a:p>
@@ -966,25 +1301,7 @@
             </a:pPr>
             <a:r>
               <a:rPr lang="en-US" dirty="0"/>
-              <a:t>Ethical issues – you’re using your code in an unethical way.</a:t>
-            </a:r>
-          </a:p>
-          <a:p>
-            <a:endParaRPr lang="en-US" dirty="0"/>
-          </a:p>
-          <a:p>
-            <a:r>
-              <a:rPr lang="en-US" dirty="0"/>
-              <a:t>Here are the UNESCO guidelines on responsible use of AI, but they can just as easily apply to any software.</a:t>
-            </a:r>
-          </a:p>
-          <a:p>
-            <a:endParaRPr lang="en-US" dirty="0"/>
-          </a:p>
-          <a:p>
-            <a:r>
-              <a:rPr lang="en-US" dirty="0"/>
-              <a:t>Sometimes you might see these guidelines and find it difficult to map them onto tangible actions that you can take. Some of them might be more obvious:</a:t>
+              <a:t>We can use version control, so all changes made by contributors can be tracked.</a:t>
             </a:r>
           </a:p>
           <a:p>
@@ -994,7 +1311,25 @@
             </a:pPr>
             <a:r>
               <a:rPr lang="en-US" dirty="0"/>
-              <a:t>Sustainability. Do you really need to use an A100 GPU?</a:t>
+              <a:t>We can keep up to date with vulnerabilities via </a:t>
+            </a:r>
+            <a:r>
+              <a:rPr lang="en-US" dirty="0" err="1"/>
+              <a:t>Github</a:t>
+            </a:r>
+            <a:r>
+              <a:rPr lang="en-US" dirty="0"/>
+              <a:t>.</a:t>
+            </a:r>
+          </a:p>
+          <a:p>
+            <a:pPr marL="171450" indent="-171450">
+              <a:buFontTx/>
+              <a:buChar char="-"/>
+            </a:pPr>
+            <a:r>
+              <a:rPr lang="en-US" dirty="0"/>
+              <a:t>We can be aware of any third-party software, and what they are doing..</a:t>
             </a:r>
           </a:p>
           <a:p>
@@ -1004,96 +1339,6 @@
             </a:pPr>
             <a:endParaRPr lang="en-US" dirty="0"/>
           </a:p>
-          <a:p>
-            <a:pPr marL="0" indent="0">
-              <a:buFontTx/>
-              <a:buNone/>
-            </a:pPr>
-            <a:r>
-              <a:rPr lang="en-US" dirty="0"/>
-              <a:t>But others may not be. How do we make software systems auditable and traceable? How can we monitor security vulnerabilities? How can we be transparent and make sure our systems are explainable and interpretable? How can we ensure privacy.</a:t>
-            </a:r>
-          </a:p>
-          <a:p>
-            <a:pPr marL="0" indent="0">
-              <a:buFontTx/>
-              <a:buNone/>
-            </a:pPr>
-            <a:endParaRPr lang="en-US" dirty="0"/>
-          </a:p>
-          <a:p>
-            <a:pPr marL="0" indent="0">
-              <a:buFontTx/>
-              <a:buNone/>
-            </a:pPr>
-            <a:r>
-              <a:rPr lang="en-US" dirty="0"/>
-              <a:t>Actually, the answers to some of these questions lies in proper software engineering practices.</a:t>
-            </a:r>
-          </a:p>
-          <a:p>
-            <a:pPr marL="171450" indent="-171450">
-              <a:buFontTx/>
-              <a:buChar char="-"/>
-            </a:pPr>
-            <a:r>
-              <a:rPr lang="en-US" dirty="0"/>
-              <a:t>We can make our code open source.</a:t>
-            </a:r>
-          </a:p>
-          <a:p>
-            <a:pPr marL="171450" indent="-171450">
-              <a:buFontTx/>
-              <a:buChar char="-"/>
-            </a:pPr>
-            <a:r>
-              <a:rPr lang="en-US" dirty="0"/>
-              <a:t>We can use version control, so all changes made by contributors can be tracked.</a:t>
-            </a:r>
-          </a:p>
-          <a:p>
-            <a:pPr marL="171450" indent="-171450">
-              <a:buFontTx/>
-              <a:buChar char="-"/>
-            </a:pPr>
-            <a:r>
-              <a:rPr lang="en-US" dirty="0"/>
-              <a:t>We can keep up to date with vulnerabilities via </a:t>
-            </a:r>
-            <a:r>
-              <a:rPr lang="en-US" dirty="0" err="1"/>
-              <a:t>Github</a:t>
-            </a:r>
-            <a:r>
-              <a:rPr lang="en-US" dirty="0"/>
-              <a:t>.</a:t>
-            </a:r>
-          </a:p>
-          <a:p>
-            <a:pPr marL="171450" indent="-171450">
-              <a:buFontTx/>
-              <a:buChar char="-"/>
-            </a:pPr>
-            <a:r>
-              <a:rPr lang="en-US" dirty="0"/>
-              <a:t>We can be aware of any third-party software, and what they are doing. An recent example is a number of quantized large language models were found to have malware or OS </a:t>
-            </a:r>
-            <a:r>
-              <a:rPr lang="en-US" dirty="0" err="1"/>
-              <a:t>llm</a:t>
-            </a:r>
-            <a:r>
-              <a:rPr lang="en-US" dirty="0"/>
-              <a:t> serving software platforms had phone-home software embedded in them, essentially a method to collect your information. Naughty.</a:t>
-            </a:r>
-          </a:p>
-          <a:p>
-            <a:pPr marL="171450" indent="-171450">
-              <a:buFontTx/>
-              <a:buChar char="-"/>
-            </a:pPr>
-            <a:endParaRPr lang="en-US" dirty="0"/>
-          </a:p>
         </p:txBody>
       </p:sp>
       <p:sp>
@@ -1113,7 +1358,7 @@
           <a:p>
             <a:fld id="{6184AF57-4BD4-7D48-A093-6530DDD8C062}" type="slidenum">
               <a:rPr lang="en-US" smtClean="0"/>
-              <a:t>12</a:t>
+              <a:t>13</a:t>
             </a:fld>
             <a:endParaRPr lang="en-US"/>
           </a:p>
@@ -1200,7 +1445,7 @@
           <a:p>
             <a:fld id="{6184AF57-4BD4-7D48-A093-6530DDD8C062}" type="slidenum">
               <a:rPr lang="en-US" smtClean="0"/>
-              <a:t>13</a:t>
+              <a:t>14</a:t>
             </a:fld>
             <a:endParaRPr lang="en-US"/>
           </a:p>
@@ -1265,8 +1510,12 @@
           <a:p>
             <a:r>
               <a:rPr lang="en-US" dirty="0"/>
-              <a:t>The previous slide talked about the long-term, large scope impacts of software, but what about for us on the individual and group level.</a:t>
-            </a:r>
+              <a:t>What about more short-term lower scale effects of good SWE</a:t>
+            </a:r>
+            <a:br>
+              <a:rPr lang="en-US" dirty="0"/>
+            </a:br>
+            <a:endParaRPr lang="en-US" dirty="0"/>
           </a:p>
           <a:p>
             <a:pPr marL="171450" indent="-171450">
@@ -1275,7 +1524,7 @@
             </a:pPr>
             <a:r>
               <a:rPr lang="en-US" dirty="0"/>
-              <a:t>Help to prevent errors. This is a big deal. I won’t ask anybody to put there hand up, but I wonder how many people in this room, have written a piece of code, and there is a part of it that they’re not quite sure how it’s working, but it does seem to be working. But how can you be sure that it’s working in the way you intend it to work?</a:t>
+              <a:t>I wonder how many people in this room, have written a piece of code, and there is a part of it that they’re not quite sure how it’s working, but it does seem to be working. But how can you be sure that it’s working in the way you intend it to work?</a:t>
             </a:r>
           </a:p>
           <a:p>
@@ -1283,10 +1532,7 @@
               <a:buFontTx/>
               <a:buChar char="-"/>
             </a:pPr>
-            <a:r>
-              <a:rPr lang="en-US" dirty="0"/>
-              <a:t>Lessens the chance of retractions.</a:t>
-            </a:r>
+            <a:endParaRPr lang="en-US" dirty="0"/>
           </a:p>
           <a:p>
             <a:pPr marL="171450" indent="-171450">
@@ -1295,8 +1541,32 @@
             </a:pPr>
             <a:r>
               <a:rPr lang="en-US" dirty="0"/>
+              <a:t>Lessens the chance of retractions.</a:t>
+            </a:r>
+          </a:p>
+          <a:p>
+            <a:pPr marL="171450" indent="-171450">
+              <a:buFontTx/>
+              <a:buChar char="-"/>
+            </a:pPr>
+            <a:endParaRPr lang="en-US" dirty="0"/>
+          </a:p>
+          <a:p>
+            <a:pPr marL="171450" indent="-171450">
+              <a:buFontTx/>
+              <a:buChar char="-"/>
+            </a:pPr>
+            <a:r>
+              <a:rPr lang="en-US" dirty="0"/>
               <a:t>It gives us integrity. Your life is so much easier if you trust your own work, if you know that you’ve tugged at every thread.</a:t>
             </a:r>
+          </a:p>
+          <a:p>
+            <a:pPr marL="171450" indent="-171450">
+              <a:buFontTx/>
+              <a:buChar char="-"/>
+            </a:pPr>
+            <a:endParaRPr lang="en-US" dirty="0"/>
           </a:p>
           <a:p>
             <a:pPr marL="171450" marR="0" lvl="0" indent="-171450" algn="l" defTabSz="914400" rtl="0" eaLnBrk="1" fontAlgn="auto" latinLnBrk="0" hangingPunct="1">
@@ -1319,29 +1589,6 @@
             <a:r>
               <a:rPr lang="en-US" dirty="0"/>
               <a:t>It allows others to reproduce and build on our work. This is another big deal. We should, given the same starting conditions, be able to reproduce the work of other scientists to within an acceptable degree of error. And in many case in computational work, that error should be essentially machine precision.</a:t>
-            </a:r>
-          </a:p>
-          <a:p>
-            <a:pPr marL="171450" marR="0" lvl="0" indent="-171450" algn="l" defTabSz="914400" rtl="0" eaLnBrk="1" fontAlgn="auto" latinLnBrk="0" hangingPunct="1">
-              <a:lnSpc>
-                <a:spcPct val="100000"/>
-              </a:lnSpc>
-              <a:spcBef>
-                <a:spcPts val="0"/>
-              </a:spcBef>
-              <a:spcAft>
-                <a:spcPts val="0"/>
-              </a:spcAft>
-              <a:buClrTx/>
-              <a:buSzTx/>
-              <a:buFontTx/>
-              <a:buChar char="-"/>
-              <a:tabLst/>
-              <a:defRPr/>
-            </a:pPr>
-            <a:r>
-              <a:rPr lang="en-US" dirty="0"/>
-              <a:t>It helps onboarding with new students. Again huge deal. How much of the initial PhD is spent deciphering the code written on stone tablets.</a:t>
             </a:r>
           </a:p>
           <a:p>
@@ -1382,7 +1629,10 @@
               <a:tabLst/>
               <a:defRPr/>
             </a:pPr>
-            <a:endParaRPr lang="en-US" dirty="0"/>
+            <a:r>
+              <a:rPr lang="en-US" dirty="0"/>
+              <a:t>It helps onboarding with new students. Again huge deal. How much of the initial PhD is spent deciphering the code written on stone tablets.</a:t>
+            </a:r>
           </a:p>
           <a:p>
             <a:pPr marL="171450" marR="0" lvl="0" indent="-171450" algn="l" defTabSz="914400" rtl="0" eaLnBrk="1" fontAlgn="auto" latinLnBrk="0" hangingPunct="1">
@@ -1402,6 +1652,46 @@
               <a:tabLst/>
               <a:defRPr/>
             </a:pPr>
+            <a:endParaRPr lang="en-US" dirty="0"/>
+          </a:p>
+          <a:p>
+            <a:pPr marL="171450" marR="0" lvl="0" indent="-171450" algn="l" defTabSz="914400" rtl="0" eaLnBrk="1" fontAlgn="auto" latinLnBrk="0" hangingPunct="1">
+              <a:lnSpc>
+                <a:spcPct val="100000"/>
+              </a:lnSpc>
+              <a:spcBef>
+                <a:spcPts val="0"/>
+              </a:spcBef>
+              <a:spcAft>
+                <a:spcPts val="0"/>
+              </a:spcAft>
+              <a:buClrTx/>
+              <a:buSzTx/>
+              <a:buFontTx/>
+              <a:buChar char="-"/>
+              <a:tabLst/>
+              <a:defRPr/>
+            </a:pPr>
+            <a:endParaRPr lang="en-US" dirty="0"/>
+          </a:p>
+          <a:p>
+            <a:pPr marL="171450" marR="0" lvl="0" indent="-171450" algn="l" defTabSz="914400" rtl="0" eaLnBrk="1" fontAlgn="auto" latinLnBrk="0" hangingPunct="1">
+              <a:lnSpc>
+                <a:spcPct val="100000"/>
+              </a:lnSpc>
+              <a:spcBef>
+                <a:spcPts val="0"/>
+              </a:spcBef>
+              <a:spcAft>
+                <a:spcPts val="0"/>
+              </a:spcAft>
+              <a:buClrTx/>
+              <a:buSzTx/>
+              <a:buFontTx/>
+              <a:buChar char="-"/>
+              <a:tabLst/>
+              <a:defRPr/>
+            </a:pPr>
             <a:r>
               <a:rPr lang="en-US" dirty="0"/>
               <a:t>All comes from the end goal : publishing</a:t>
@@ -1426,7 +1716,7 @@
           <a:p>
             <a:fld id="{6184AF57-4BD4-7D48-A093-6530DDD8C062}" type="slidenum">
               <a:rPr lang="en-US" smtClean="0"/>
-              <a:t>14</a:t>
+              <a:t>15</a:t>
             </a:fld>
             <a:endParaRPr lang="en-US"/>
           </a:p>
@@ -1522,7 +1812,7 @@
           <a:p>
             <a:fld id="{201484FD-10DA-4547-A01E-D86EDBCF772B}" type="slidenum">
               <a:rPr lang="en-US" smtClean="0"/>
-              <a:t>15</a:t>
+              <a:t>16</a:t>
             </a:fld>
             <a:endParaRPr lang="en-US"/>
           </a:p>
@@ -1606,7 +1896,7 @@
           <a:p>
             <a:fld id="{201484FD-10DA-4547-A01E-D86EDBCF772B}" type="slidenum">
               <a:rPr lang="en-US" smtClean="0"/>
-              <a:t>16</a:t>
+              <a:t>17</a:t>
             </a:fld>
             <a:endParaRPr lang="en-US"/>
           </a:p>
@@ -1671,15 +1961,6 @@
           <a:p>
             <a:r>
               <a:rPr lang="en-US" dirty="0"/>
-              <a:t>And that brings us back to the workshop. So like I said at the start, we are running a full day workshop on publishing where we basically guide you through the process of taking your code and achieving four main objectives:</a:t>
-            </a:r>
-          </a:p>
-          <a:p>
-            <a:endParaRPr lang="en-US" dirty="0"/>
-          </a:p>
-          <a:p>
-            <a:r>
-              <a:rPr lang="en-US" dirty="0"/>
               <a:t>Firstly, building a basic user interface.</a:t>
             </a:r>
           </a:p>
@@ -1729,7 +2010,7 @@
           <a:p>
             <a:fld id="{405232F6-B76B-E748-9DF9-431B1E2F1F8C}" type="slidenum">
               <a:rPr lang="en-US" smtClean="0"/>
-              <a:t>17</a:t>
+              <a:t>18</a:t>
             </a:fld>
             <a:endParaRPr lang="en-US"/>
           </a:p>
@@ -1803,16 +2084,19 @@
           <a:p>
             <a:r>
               <a:rPr lang="en-US" dirty="0"/>
-              <a:t>The model and code is very simple, because the focus isn’t on the software, it’s focused on the process. So we introduce a toy model from Scikit-learn: the Wisconsin Breast cancer dataset. It’s trivial to achieve high accuracy. We do some typical exploratory data analysis</a:t>
+              <a:t>Focus isn't on software just the process </a:t>
             </a:r>
           </a:p>
           <a:p>
             <a:endParaRPr lang="en-US" dirty="0"/>
           </a:p>
           <a:p>
+            <a:endParaRPr lang="en-US" dirty="0"/>
+          </a:p>
+          <a:p>
             <a:r>
               <a:rPr lang="en-US" dirty="0"/>
-              <a:t>GITHUB PAGE -&gt; NOTEBOOK -&gt; SHOW EXTRACTED CLASS -&gt; SHOW FINAL -&gt; INTO CODESPACES -&gt; ACTIVATE -&gt; INSTALL -&gt; UI -&gt; CLI -&gt; WEBSITE</a:t>
+              <a:t>the Wisconsin Breast cancer dataset. It’s trivial to achieve high accuracy. We do some typical exploratory data analysis</a:t>
             </a:r>
           </a:p>
           <a:p>
@@ -1821,16 +2105,15 @@
           <a:p>
             <a:r>
               <a:rPr lang="en-US" dirty="0"/>
-              <a:t>Here is the main GitHub page, that is publicly available. And if you want to work through this material, you can just go to the basic code branch here.</a:t>
-            </a:r>
-          </a:p>
-          <a:p>
-            <a:endParaRPr lang="en-US" dirty="0"/>
-          </a:p>
-          <a:p>
+              <a:t>Explain </a:t>
+            </a:r>
+            <a:r>
+              <a:rPr lang="en-US" dirty="0" err="1"/>
+              <a:t>jupyter</a:t>
+            </a:r>
             <a:r>
               <a:rPr lang="en-US" dirty="0"/>
-              <a:t>The notebook represents the starting point for many data science and machine learning projects – a jumbled mass of code. This notebook is actually fairly well organized, but when using notebooks, you are in danger of not being aware of which code is “live” and which is not. The code itself is relatively simple for anyone familiar with basic machine learning models, it consists of some visualization, then a pipeline of standardizing, dimensionality reduction, and then logistic regression. For anyone not familiar with ML, don’t worry about.</a:t>
+              <a:t> notebook starting point vs. python scripts</a:t>
             </a:r>
           </a:p>
           <a:p>
@@ -1856,41 +2139,7 @@
           <a:p>
             <a:r>
               <a:rPr lang="en-US" dirty="0"/>
-              <a:t>One of the first steps in creating these packages is knowing how to extract functions and classes out of your notebook environments. So that’s what we do here, we create just a single class that does everything for us. Again the focus isn’t really on the software itself, it’s more what comes after, because the hope is that you can take all the other crap, and deposit your own code in it’s place, with perhaps minimal faffing around.</a:t>
-            </a:r>
-          </a:p>
-          <a:p>
-            <a:endParaRPr lang="en-US" dirty="0"/>
-          </a:p>
-          <a:p>
-            <a:r>
-              <a:rPr lang="en-US" dirty="0"/>
-              <a:t>And then in the actual workshop itself we use GitHub </a:t>
-            </a:r>
-            <a:r>
-              <a:rPr lang="en-US" dirty="0" err="1"/>
-              <a:t>Codespaces</a:t>
-            </a:r>
-            <a:r>
-              <a:rPr lang="en-US" dirty="0"/>
-              <a:t>, which we’re trialing as a teaching environment. One of the biggest difficulties is that people have different operating systems, and it can be a pain to deal with windows. And so </a:t>
-            </a:r>
-            <a:r>
-              <a:rPr lang="en-US" dirty="0" err="1"/>
-              <a:t>Codespaces</a:t>
-            </a:r>
-            <a:r>
-              <a:rPr lang="en-US" dirty="0"/>
-              <a:t> eliminates that variable.</a:t>
-            </a:r>
-          </a:p>
-          <a:p>
-            <a:endParaRPr lang="en-US" dirty="0"/>
-          </a:p>
-          <a:p>
-            <a:r>
-              <a:rPr lang="en-US" dirty="0"/>
-              <a:t>Obviously, this course material is designed for an 8 hour day, and not 90 minutes, but we don’t just want people to be able to attend the events, we want people to actually be able to use stuff, and work through in their own time. So to that end,</a:t>
+              <a:t>And then in the actual workshop itself we use our teaching platform.</a:t>
             </a:r>
           </a:p>
           <a:p>
@@ -1962,7 +2211,7 @@
           <a:p>
             <a:fld id="{FE27E4C1-A6EC-8946-BBCD-755D8945F25F}" type="slidenum">
               <a:rPr lang="en-US" smtClean="0"/>
-              <a:t>18</a:t>
+              <a:t>19</a:t>
             </a:fld>
             <a:endParaRPr lang="en-US"/>
           </a:p>
@@ -2027,32 +2276,77 @@
           <a:p>
             <a:r>
               <a:rPr lang="en-US" dirty="0"/>
-              <a:t>Hi everyone, my name is Ryan, I work for the Accelerate Programme for Scientific Discovery, over in the computer lab, but I’ll talk more about myself and what we do shortly. I didn’t know how exciting I could make a talk on packaging and publishing python code! But hopefully, over the course of this workshop I can convince you that some of these things are worth paying attention to.</a:t>
+              <a:t>We're going to be talking about packaging and publishing python code! </a:t>
             </a:r>
           </a:p>
           <a:p>
             <a:endParaRPr lang="en-US" dirty="0"/>
           </a:p>
           <a:p>
+            <a:endParaRPr lang="en-US" dirty="0"/>
+          </a:p>
+          <a:p>
             <a:r>
               <a:rPr lang="en-US" dirty="0"/>
-              <a:t>Something that we see regularly is Python. It is ubiquitous in research. Python is essentially the </a:t>
+              <a:t>In doing so we will be covering things along the way that make this process as streamlined as possible - software best practices.</a:t>
+            </a:r>
+          </a:p>
+          <a:p>
+            <a:endParaRPr lang="en-US" dirty="0"/>
+          </a:p>
+          <a:p>
+            <a:r>
+              <a:rPr lang="en-US" dirty="0"/>
+              <a:t>Hopefully, over the course of this workshop I can convince you that some of these things are worth paying attention to.</a:t>
+            </a:r>
+          </a:p>
+          <a:p>
+            <a:endParaRPr lang="en-US" dirty="0"/>
+          </a:p>
+          <a:p>
+            <a:r>
+              <a:rPr lang="en-US" dirty="0"/>
+              <a:t>Something that we see regularly is Python. </a:t>
+            </a:r>
+          </a:p>
+          <a:p>
+            <a:endParaRPr lang="en-US" dirty="0"/>
+          </a:p>
+          <a:p>
+            <a:r>
+              <a:rPr lang="en-US" dirty="0"/>
+              <a:t>It is ubiquitous in research. </a:t>
+            </a:r>
+          </a:p>
+          <a:p>
+            <a:endParaRPr lang="en-US" dirty="0"/>
+          </a:p>
+          <a:p>
+            <a:r>
+              <a:rPr lang="en-US" dirty="0"/>
+              <a:t>Reasons: adoption in ML and simplicity, but also statistical / scientific computing packages like </a:t>
             </a:r>
             <a:r>
               <a:rPr lang="en-US" dirty="0" err="1"/>
-              <a:t>linga</a:t>
+              <a:t>numpy</a:t>
             </a:r>
             <a:r>
               <a:rPr lang="en-US" dirty="0"/>
-              <a:t> franca for many areas of scientific research. This in part is due to its adoption in Machine Learning and Deep Learning, and also because really, it’s a pretty easy language to learn. When you compare it to some of the standard languages like C, or heaven forbid </a:t>
+              <a:t> or </a:t>
             </a:r>
             <a:r>
               <a:rPr lang="en-US" dirty="0" err="1"/>
-              <a:t>fortran</a:t>
-            </a:r>
+              <a:t>simpy</a:t>
+            </a:r>
+            <a:endParaRPr lang="en-US" dirty="0"/>
+          </a:p>
+          <a:p>
+            <a:endParaRPr lang="en-US" dirty="0"/>
+          </a:p>
+          <a:p>
             <a:r>
               <a:rPr lang="en-US" dirty="0"/>
-              <a:t>, or even some of the new languages like Rust and Go, Python is pretty simple – it’s basically the closest you can get to just speaking in natural language and having logic come out. In 2022, the Python Software Foundation ran a survey on packaging – so this is the process of turning your code into a distributable package that other people can use easily with the same tools. And the results really speak for themselves:</a:t>
+              <a:t>Python Software Foundation ran a survey on packaging – so this is the process of turning your code into a distributable package that other people can use easily with the same tools. And the results really speak for themselves:</a:t>
             </a:r>
           </a:p>
         </p:txBody>
@@ -2074,7 +2368,7 @@
           <a:p>
             <a:fld id="{405232F6-B76B-E748-9DF9-431B1E2F1F8C}" type="slidenum">
               <a:rPr lang="en-US" smtClean="0"/>
-              <a:t>2</a:t>
+              <a:t>3</a:t>
             </a:fld>
             <a:endParaRPr lang="en-US"/>
           </a:p>
@@ -2161,7 +2455,7 @@
           <a:p>
             <a:fld id="{405232F6-B76B-E748-9DF9-431B1E2F1F8C}" type="slidenum">
               <a:rPr lang="en-US" smtClean="0"/>
-              <a:t>3</a:t>
+              <a:t>4</a:t>
             </a:fld>
             <a:endParaRPr lang="en-US"/>
           </a:p>
@@ -2263,26 +2557,7 @@
               <a:buFontTx/>
               <a:buChar char="-"/>
             </a:pPr>
-            <a:r>
-              <a:rPr lang="en-US" dirty="0"/>
-              <a:t>Then further down the list of recognizability, we have wheels and </a:t>
-            </a:r>
-            <a:r>
-              <a:rPr lang="en-US" dirty="0" err="1"/>
-              <a:t>PyPI</a:t>
-            </a:r>
-            <a:r>
-              <a:rPr lang="en-US" dirty="0"/>
-              <a:t>. You always see that notification in the terminal of building wheels, and then </a:t>
-            </a:r>
-            <a:r>
-              <a:rPr lang="en-US" dirty="0" err="1"/>
-              <a:t>PyPI</a:t>
-            </a:r>
-            <a:r>
-              <a:rPr lang="en-US" dirty="0"/>
-              <a:t> is the main repository where these wheels are housed for pip.</a:t>
-            </a:r>
+            <a:endParaRPr lang="en-US" dirty="0"/>
           </a:p>
           <a:p>
             <a:pPr marL="171450" indent="-171450">
@@ -2291,83 +2566,23 @@
             </a:pPr>
             <a:r>
               <a:rPr lang="en-US" dirty="0"/>
-              <a:t>If you don’t use </a:t>
+              <a:t>Then further down the list of recognizability, we have wheels and </a:t>
             </a:r>
             <a:r>
               <a:rPr lang="en-US" dirty="0" err="1"/>
-              <a:t>conda</a:t>
+              <a:t>PyPI</a:t>
             </a:r>
             <a:r>
               <a:rPr lang="en-US" dirty="0"/>
-              <a:t>, then you probably use </a:t>
+              <a:t>. You always see that notification in the terminal of building wheels, and then </a:t>
             </a:r>
             <a:r>
               <a:rPr lang="en-US" dirty="0" err="1"/>
-              <a:t>venv</a:t>
+              <a:t>PyPI</a:t>
             </a:r>
             <a:r>
               <a:rPr lang="en-US" dirty="0"/>
-              <a:t> – this comes standard with python, very capable virtual environment tool.</a:t>
-            </a:r>
-          </a:p>
-          <a:p>
-            <a:pPr marL="171450" indent="-171450">
-              <a:buFontTx/>
-              <a:buChar char="-"/>
-            </a:pPr>
-            <a:r>
-              <a:rPr lang="en-US" dirty="0"/>
-              <a:t>Then we move into perhaps less well-known tools like </a:t>
-            </a:r>
-            <a:r>
-              <a:rPr lang="en-US" dirty="0" err="1"/>
-              <a:t>pipx</a:t>
-            </a:r>
-            <a:r>
-              <a:rPr lang="en-US" dirty="0"/>
-              <a:t>, </a:t>
-            </a:r>
-            <a:r>
-              <a:rPr lang="en-US" dirty="0" err="1"/>
-              <a:t>setuptools</a:t>
-            </a:r>
-            <a:r>
-              <a:rPr lang="en-US" dirty="0"/>
-              <a:t>, twine, build, poetry. You may have used them, you may have only heard of them.</a:t>
-            </a:r>
-          </a:p>
-          <a:p>
-            <a:pPr marL="171450" indent="-171450">
-              <a:buFontTx/>
-              <a:buChar char="-"/>
-            </a:pPr>
-            <a:r>
-              <a:rPr lang="en-US" dirty="0"/>
-              <a:t>And then there are some I’ve just genuinely never heard of like </a:t>
-            </a:r>
-            <a:r>
-              <a:rPr lang="en-US" dirty="0" err="1"/>
-              <a:t>enscons</a:t>
-            </a:r>
-            <a:r>
-              <a:rPr lang="en-US" dirty="0"/>
-              <a:t>, </a:t>
-            </a:r>
-            <a:r>
-              <a:rPr lang="en-US" dirty="0" err="1"/>
-              <a:t>pex</a:t>
-            </a:r>
-            <a:r>
-              <a:rPr lang="en-US" dirty="0"/>
-              <a:t>, and </a:t>
-            </a:r>
-            <a:r>
-              <a:rPr lang="en-US" dirty="0" err="1"/>
-              <a:t>maturin</a:t>
-            </a:r>
-            <a:r>
-              <a:rPr lang="en-US" dirty="0"/>
-              <a:t> – I have no idea what they are for. Anybody ever used these?</a:t>
+              <a:t> is the main repository where these wheels are housed for pip.</a:t>
             </a:r>
           </a:p>
           <a:p>
@@ -2377,6 +2592,63 @@
             </a:pPr>
             <a:endParaRPr lang="en-US" dirty="0"/>
           </a:p>
+          <a:p>
+            <a:pPr marL="171450" indent="-171450">
+              <a:buFontTx/>
+              <a:buChar char="-"/>
+            </a:pPr>
+            <a:endParaRPr lang="en-US" dirty="0"/>
+          </a:p>
+          <a:p>
+            <a:pPr marL="171450" indent="-171450">
+              <a:buFontTx/>
+              <a:buChar char="-"/>
+            </a:pPr>
+            <a:r>
+              <a:rPr lang="en-US" dirty="0"/>
+              <a:t>If you don’t use </a:t>
+            </a:r>
+            <a:r>
+              <a:rPr lang="en-US" dirty="0" err="1"/>
+              <a:t>conda</a:t>
+            </a:r>
+            <a:r>
+              <a:rPr lang="en-US" dirty="0"/>
+              <a:t>, then you probably use </a:t>
+            </a:r>
+            <a:r>
+              <a:rPr lang="en-US" dirty="0" err="1"/>
+              <a:t>venv</a:t>
+            </a:r>
+            <a:r>
+              <a:rPr lang="en-US" dirty="0"/>
+              <a:t> – this comes standard with python, very capable virtual environment tool.</a:t>
+            </a:r>
+          </a:p>
+          <a:p>
+            <a:pPr marL="171450" indent="-171450">
+              <a:buFontTx/>
+              <a:buChar char="-"/>
+            </a:pPr>
+            <a:endParaRPr lang="en-US" dirty="0"/>
+          </a:p>
+          <a:p>
+            <a:pPr marL="171450" indent="-171450">
+              <a:buFontTx/>
+              <a:buChar char="-"/>
+            </a:pPr>
+            <a:endParaRPr lang="en-US" dirty="0"/>
+          </a:p>
+          <a:p>
+            <a:pPr marL="171450" indent="-171450">
+              <a:buFontTx/>
+              <a:buChar char="-"/>
+            </a:pPr>
+            <a:r>
+              <a:rPr lang="en-US" dirty="0"/>
+              <a:t>There are also some lesser known ones</a:t>
+            </a:r>
+          </a:p>
         </p:txBody>
       </p:sp>
       <p:sp>
@@ -2396,7 +2668,7 @@
           <a:p>
             <a:fld id="{405232F6-B76B-E748-9DF9-431B1E2F1F8C}" type="slidenum">
               <a:rPr lang="en-US" smtClean="0"/>
-              <a:t>4</a:t>
+              <a:t>5</a:t>
             </a:fld>
             <a:endParaRPr lang="en-US"/>
           </a:p>
@@ -2461,7 +2733,7 @@
           <a:p>
             <a:r>
               <a:rPr lang="en-US" dirty="0"/>
-              <a:t>The next damning piece of evidence is this slide.</a:t>
+              <a:t>Python packaging “Just works”. I am actually quite surprised that 43% of people agreed or strongly agreed with this. But still, 38% don’t.</a:t>
             </a:r>
           </a:p>
           <a:p>
@@ -2470,14 +2742,14 @@
           <a:p>
             <a:r>
               <a:rPr lang="en-US" dirty="0"/>
-              <a:t>Python packaging “Just works”. I am actually quite surprised that 43% of people agreed or strongly agreed with this. But still, 38% don’t.</a:t>
-            </a:r>
-          </a:p>
-          <a:p>
-            <a:r>
-              <a:rPr lang="en-US" dirty="0"/>
-              <a:t>Python packaging is too complex – 50% agree, and 26% do not agree, with the rest abstaining, cowards</a:t>
-            </a:r>
+              <a:t>Python packaging is too complex – 50% agree, and 26% do not agree</a:t>
+            </a:r>
+          </a:p>
+          <a:p>
+            <a:endParaRPr lang="en-US" dirty="0"/>
+          </a:p>
+          <a:p>
+            <a:endParaRPr lang="en-US" dirty="0"/>
           </a:p>
           <a:p>
             <a:r>
@@ -2504,7 +2776,7 @@
           <a:p>
             <a:fld id="{405232F6-B76B-E748-9DF9-431B1E2F1F8C}" type="slidenum">
               <a:rPr lang="en-US" smtClean="0"/>
-              <a:t>5</a:t>
+              <a:t>6</a:t>
             </a:fld>
             <a:endParaRPr lang="en-US"/>
           </a:p>
@@ -2586,7 +2858,7 @@
             </a:pPr>
             <a:r>
               <a:rPr lang="en-US" dirty="0"/>
-              <a:t>An overwhelming amount of people would like to have an “official” workflow. Of course. All of those different tools we had. Compare this to other languages: For modern languages like Go and Rust, you have all of this tooling integrated into the rest of the toolchain. You don’t need a bunch of 3rd party tools.</a:t>
+              <a:t>An overwhelming amount of people would like to have an “official” workflow. Of course. All of those different tools we had.</a:t>
             </a:r>
           </a:p>
           <a:p>
@@ -2629,7 +2901,7 @@
             </a:pPr>
             <a:r>
               <a:rPr lang="en-US" dirty="0"/>
-              <a:t>But also importantly, packaging is improving with time. And in this session, we’re actually going to talk about some of the current methods and techniques to help you with packaging software.</a:t>
+              <a:t>For modern languages like Go and Rust, you have all of this tooling integrated into the rest of the toolchain. You don’t need a bunch of 3rd party tools.</a:t>
             </a:r>
           </a:p>
           <a:p>
@@ -2653,7 +2925,27 @@
             <a:endParaRPr lang="en-US" dirty="0"/>
           </a:p>
           <a:p>
-            <a:endParaRPr lang="en-US" dirty="0"/>
+            <a:pPr marL="0" marR="0" lvl="0" indent="0" algn="l" defTabSz="914400" rtl="0" eaLnBrk="1" fontAlgn="auto" latinLnBrk="0" hangingPunct="1">
+              <a:lnSpc>
+                <a:spcPct val="100000"/>
+              </a:lnSpc>
+              <a:spcBef>
+                <a:spcPts val="0"/>
+              </a:spcBef>
+              <a:spcAft>
+                <a:spcPts val="0"/>
+              </a:spcAft>
+              <a:buClrTx/>
+              <a:buSzTx/>
+              <a:buFontTx/>
+              <a:buNone/>
+              <a:tabLst/>
+              <a:defRPr/>
+            </a:pPr>
+            <a:r>
+              <a:rPr lang="en-US" dirty="0"/>
+              <a:t>But also importantly, packaging is improving with time. And in this session, we’re actually going to talk about some of the current methods and techniques to help you with packaging software.</a:t>
+            </a:r>
           </a:p>
         </p:txBody>
       </p:sp>
@@ -2674,7 +2966,7 @@
           <a:p>
             <a:fld id="{405232F6-B76B-E748-9DF9-431B1E2F1F8C}" type="slidenum">
               <a:rPr lang="en-US" smtClean="0"/>
-              <a:t>6</a:t>
+              <a:t>7</a:t>
             </a:fld>
             <a:endParaRPr lang="en-US"/>
           </a:p>
@@ -2739,7 +3031,16 @@
           <a:p>
             <a:r>
               <a:rPr lang="en-US" dirty="0"/>
-              <a:t>And that’s where we come back to this image, which is Dall-E, of course – every time I see a nice image now, I just assume, oh that must be AI generated. Trying to piece together the mess of tools out there can be a pretty daunting process, and time is precious. The process of taking your untitled_notebook_17.ipynb, and navigating this hellscape to produce something decent can stressful, and the first few times, you usually make some mistakes and you just leave them, oh it’s OK, whatever. So here we stand, with our intrepid cat, ready to brave this vast landscape together. And many of the techniques that we talk about also apply to deploying production-level software. There this idea, that now you’ve developed the model you need to deploy it to production. What the hell does that even mean? Develop the model, deploy the model – it’s like that meme of how to draw an owl: you draw the two circles, and then you just draw the rest of the owl: develop the model, deploy the model.</a:t>
+              <a:t>The process of taking your untitled_notebook_17.ipynb, and navigating this hellscape to produce something decent can stressful, and the first few times, you usually make some mistakes and you just leave them, oh it’s OK, whatever. So here we stand, with our intrepid cat, ready to brave this vast landscape together. </a:t>
+            </a:r>
+          </a:p>
+          <a:p>
+            <a:endParaRPr lang="en-US" dirty="0"/>
+          </a:p>
+          <a:p>
+            <a:r>
+              <a:rPr lang="en-US" dirty="0"/>
+              <a:t>And many of the techniques that we talk about also apply to deploying production-level software. There this idea, that now you’ve developed the model you need to deploy it to production. What the hell does that even mean? Develop the model, deploy the model.</a:t>
             </a:r>
           </a:p>
         </p:txBody>
@@ -2761,7 +3062,7 @@
           <a:p>
             <a:fld id="{405232F6-B76B-E748-9DF9-431B1E2F1F8C}" type="slidenum">
               <a:rPr lang="en-US" smtClean="0"/>
-              <a:t>7</a:t>
+              <a:t>8</a:t>
             </a:fld>
             <a:endParaRPr lang="en-US"/>
           </a:p>
@@ -2824,6 +3125,9 @@
           <a:bodyPr/>
           <a:lstStyle/>
           <a:p>
+            <a:endParaRPr lang="en-US" dirty="0"/>
+          </a:p>
+          <a:p>
             <a:r>
               <a:rPr lang="en-US" dirty="0"/>
               <a:t>Just before we get started, I would just like to give a brief overview of the Accelerate program.</a:t>
@@ -2835,7 +3139,69 @@
           <a:p>
             <a:r>
               <a:rPr lang="en-US" dirty="0"/>
-              <a:t>Essentially, our driving goal is to help researchers use AI in their research. It says here that we pursue research at the interface of AI and Science, and the word science, evokes the typical STEM subjects, but actually it isn’t. We’re finding more and more that researchers from the Humanities want to utilize machine learning methods, and we’re having to reassess what we think of as traditional science.</a:t>
+              <a:t>We are a group composed of researchers, machine learning engineers and </a:t>
+            </a:r>
+            <a:r>
+              <a:rPr lang="en-US" dirty="0" err="1"/>
+              <a:t>programme</a:t>
+            </a:r>
+            <a:r>
+              <a:rPr lang="en-US" dirty="0"/>
+              <a:t> / event staff.</a:t>
+            </a:r>
+          </a:p>
+          <a:p>
+            <a:endParaRPr lang="en-US" dirty="0"/>
+          </a:p>
+          <a:p>
+            <a:r>
+              <a:rPr lang="en-US" dirty="0"/>
+              <a:t>Our overarching goal is to support the adoption of AI in research at the university. </a:t>
+            </a:r>
+          </a:p>
+          <a:p>
+            <a:endParaRPr lang="en-US" dirty="0"/>
+          </a:p>
+          <a:p>
+            <a:r>
+              <a:rPr lang="en-US" dirty="0"/>
+              <a:t>We do this through activities such as</a:t>
+            </a:r>
+          </a:p>
+          <a:p>
+            <a:endParaRPr lang="en-US" dirty="0"/>
+          </a:p>
+          <a:p>
+            <a:r>
+              <a:rPr lang="en-US" dirty="0"/>
+              <a:t>Workshops (see in a second), AI Clinic, sections of university-wide workshops / events that are supported by us</a:t>
+            </a:r>
+          </a:p>
+          <a:p>
+            <a:endParaRPr lang="en-US" dirty="0"/>
+          </a:p>
+          <a:p>
+            <a:r>
+              <a:rPr lang="en-US" dirty="0"/>
+              <a:t>But also longer-term involvement on research projects in a research engineering capacity.</a:t>
+            </a:r>
+          </a:p>
+          <a:p>
+            <a:endParaRPr lang="en-US" dirty="0"/>
+          </a:p>
+          <a:p>
+            <a:r>
+              <a:rPr lang="en-US" dirty="0"/>
+              <a:t>Not just intersection of AI and Science!</a:t>
+            </a:r>
+          </a:p>
+          <a:p>
+            <a:endParaRPr lang="en-US" dirty="0"/>
+          </a:p>
+          <a:p>
+            <a:r>
+              <a:rPr lang="en-US" dirty="0"/>
+              <a:t>We’re finding more and more that researchers from the Humanities want to utilize machine learning methods, and we’re having to reassess what we think of as traditional science.</a:t>
             </a:r>
           </a:p>
         </p:txBody>
@@ -2857,7 +3223,7 @@
           <a:p>
             <a:fld id="{6184AF57-4BD4-7D48-A093-6530DDD8C062}" type="slidenum">
               <a:rPr lang="en-US" smtClean="0"/>
-              <a:t>8</a:t>
+              <a:t>9</a:t>
             </a:fld>
             <a:endParaRPr lang="en-US"/>
           </a:p>
@@ -2931,25 +3297,7 @@
           <a:p>
             <a:r>
               <a:rPr lang="en-US" dirty="0"/>
-              <a:t>Just a brief about us:</a:t>
-            </a:r>
-          </a:p>
-          <a:p>
-            <a:endParaRPr lang="en-US" dirty="0"/>
-          </a:p>
-          <a:p>
-            <a:r>
-              <a:rPr lang="en-US" dirty="0"/>
-              <a:t>I come from a Physics background, where I worked in condensed matter, thin films, and nano and atomic scale devices, and using novel devices to do machine learning. So I approached machine learning from the direction of a researcher with some coding knowledge, but then machine learning and software engineering gradually took over my life. And I’ve been down this path, tried to navigate it, had a look to see what others are doing, and what works, what’s easy, what’s not.</a:t>
-            </a:r>
-          </a:p>
-          <a:p>
-            <a:endParaRPr lang="en-US" dirty="0"/>
-          </a:p>
-          <a:p>
-            <a:r>
-              <a:rPr lang="en-US" dirty="0"/>
-              <a:t>We run a couple of workshops at the moment: An introduction to data pipelines for machine learning, and introduction to large language models, an intro to generative AI with diffusion models, and now a packaging and publishing workshop</a:t>
+              <a:t>We run a couple of workshops at the moment: an introduction to large language models, a hands on LLMs, an intro to generative AI with diffusion models, docker, a packaging and publishing workshop, and now a new agents 4 science workshop</a:t>
             </a:r>
           </a:p>
         </p:txBody>
@@ -2971,7 +3319,7 @@
           <a:p>
             <a:fld id="{6184AF57-4BD4-7D48-A093-6530DDD8C062}" type="slidenum">
               <a:rPr lang="en-US" smtClean="0"/>
-              <a:t>9</a:t>
+              <a:t>10</a:t>
             </a:fld>
             <a:endParaRPr lang="en-US"/>
           </a:p>
@@ -3139,7 +3487,7 @@
           <a:p>
             <a:fld id="{03A7FFF3-97E5-DB4D-8BDB-E891BF64B3D1}" type="datetimeFigureOut">
               <a:rPr lang="en-US" smtClean="0"/>
-              <a:t>5/1/24</a:t>
+              <a:t>3/10/26</a:t>
             </a:fld>
             <a:endParaRPr lang="en-US"/>
           </a:p>
@@ -3339,7 +3687,7 @@
           <a:p>
             <a:fld id="{03A7FFF3-97E5-DB4D-8BDB-E891BF64B3D1}" type="datetimeFigureOut">
               <a:rPr lang="en-US" smtClean="0"/>
-              <a:t>5/1/24</a:t>
+              <a:t>3/10/26</a:t>
             </a:fld>
             <a:endParaRPr lang="en-US"/>
           </a:p>
@@ -3549,7 +3897,7 @@
           <a:p>
             <a:fld id="{03A7FFF3-97E5-DB4D-8BDB-E891BF64B3D1}" type="datetimeFigureOut">
               <a:rPr lang="en-US" smtClean="0"/>
-              <a:t>5/1/24</a:t>
+              <a:t>3/10/26</a:t>
             </a:fld>
             <a:endParaRPr lang="en-US"/>
           </a:p>
@@ -4472,7 +4820,7 @@
           <a:p>
             <a:fld id="{03A7FFF3-97E5-DB4D-8BDB-E891BF64B3D1}" type="datetimeFigureOut">
               <a:rPr lang="en-US" smtClean="0"/>
-              <a:t>5/1/24</a:t>
+              <a:t>3/10/26</a:t>
             </a:fld>
             <a:endParaRPr lang="en-US"/>
           </a:p>
@@ -4748,7 +5096,7 @@
           <a:p>
             <a:fld id="{03A7FFF3-97E5-DB4D-8BDB-E891BF64B3D1}" type="datetimeFigureOut">
               <a:rPr lang="en-US" smtClean="0"/>
-              <a:t>5/1/24</a:t>
+              <a:t>3/10/26</a:t>
             </a:fld>
             <a:endParaRPr lang="en-US"/>
           </a:p>
@@ -5016,7 +5364,7 @@
           <a:p>
             <a:fld id="{03A7FFF3-97E5-DB4D-8BDB-E891BF64B3D1}" type="datetimeFigureOut">
               <a:rPr lang="en-US" smtClean="0"/>
-              <a:t>5/1/24</a:t>
+              <a:t>3/10/26</a:t>
             </a:fld>
             <a:endParaRPr lang="en-US"/>
           </a:p>
@@ -5431,7 +5779,7 @@
           <a:p>
             <a:fld id="{03A7FFF3-97E5-DB4D-8BDB-E891BF64B3D1}" type="datetimeFigureOut">
               <a:rPr lang="en-US" smtClean="0"/>
-              <a:t>5/1/24</a:t>
+              <a:t>3/10/26</a:t>
             </a:fld>
             <a:endParaRPr lang="en-US"/>
           </a:p>
@@ -5573,7 +5921,7 @@
           <a:p>
             <a:fld id="{03A7FFF3-97E5-DB4D-8BDB-E891BF64B3D1}" type="datetimeFigureOut">
               <a:rPr lang="en-US" smtClean="0"/>
-              <a:t>5/1/24</a:t>
+              <a:t>3/10/26</a:t>
             </a:fld>
             <a:endParaRPr lang="en-US"/>
           </a:p>
@@ -5686,7 +6034,7 @@
           <a:p>
             <a:fld id="{03A7FFF3-97E5-DB4D-8BDB-E891BF64B3D1}" type="datetimeFigureOut">
               <a:rPr lang="en-US" smtClean="0"/>
-              <a:t>5/1/24</a:t>
+              <a:t>3/10/26</a:t>
             </a:fld>
             <a:endParaRPr lang="en-US"/>
           </a:p>
@@ -5999,7 +6347,7 @@
           <a:p>
             <a:fld id="{03A7FFF3-97E5-DB4D-8BDB-E891BF64B3D1}" type="datetimeFigureOut">
               <a:rPr lang="en-US" smtClean="0"/>
-              <a:t>5/1/24</a:t>
+              <a:t>3/10/26</a:t>
             </a:fld>
             <a:endParaRPr lang="en-US"/>
           </a:p>
@@ -6288,7 +6636,7 @@
           <a:p>
             <a:fld id="{03A7FFF3-97E5-DB4D-8BDB-E891BF64B3D1}" type="datetimeFigureOut">
               <a:rPr lang="en-US" smtClean="0"/>
-              <a:t>5/1/24</a:t>
+              <a:t>3/10/26</a:t>
             </a:fld>
             <a:endParaRPr lang="en-US"/>
           </a:p>
@@ -6531,7 +6879,7 @@
           <a:p>
             <a:fld id="{03A7FFF3-97E5-DB4D-8BDB-E891BF64B3D1}" type="datetimeFigureOut">
               <a:rPr lang="en-US" smtClean="0"/>
-              <a:t>5/1/24</a:t>
+              <a:t>3/10/26</a:t>
             </a:fld>
             <a:endParaRPr lang="en-US"/>
           </a:p>
@@ -7092,7 +7440,6 @@
               </a:rPr>
               <a:t>You might need to set up 2FA via an authentication app.</a:t>
             </a:r>
-            <a:endParaRPr lang="en-US" i="1" dirty="0"/>
           </a:p>
         </p:txBody>
       </p:sp>
@@ -7145,6 +7492,167 @@
           <a:p>
             <a:r>
               <a:rPr lang="en-US" b="1" dirty="0"/>
+              <a:t>Accelerate Science Programme</a:t>
+            </a:r>
+          </a:p>
+        </p:txBody>
+      </p:sp>
+      <p:sp>
+        <p:nvSpPr>
+          <p:cNvPr id="3" name="Text Placeholder 2"/>
+          <p:cNvSpPr>
+            <a:spLocks noGrp="1"/>
+          </p:cNvSpPr>
+          <p:nvPr>
+            <p:ph type="body" sz="quarter" idx="11"/>
+          </p:nvPr>
+        </p:nvSpPr>
+        <p:spPr/>
+        <p:txBody>
+          <a:bodyPr vert="horz" lIns="121920" tIns="60960" rIns="121920" bIns="60960" rtlCol="0" anchor="t">
+            <a:normAutofit/>
+          </a:bodyPr>
+          <a:lstStyle/>
+          <a:p>
+            <a:r>
+              <a:rPr lang="en-US" dirty="0"/>
+              <a:t>Workshop Goals</a:t>
+            </a:r>
+          </a:p>
+        </p:txBody>
+      </p:sp>
+      <p:sp>
+        <p:nvSpPr>
+          <p:cNvPr id="4" name="Text Placeholder 3"/>
+          <p:cNvSpPr>
+            <a:spLocks noGrp="1"/>
+          </p:cNvSpPr>
+          <p:nvPr>
+            <p:ph type="body" sz="quarter" idx="12"/>
+          </p:nvPr>
+        </p:nvSpPr>
+        <p:spPr/>
+        <p:txBody>
+          <a:bodyPr vert="horz" lIns="121920" tIns="60960" rIns="121920" bIns="60960" rtlCol="0" anchor="t">
+            <a:normAutofit/>
+          </a:bodyPr>
+          <a:lstStyle/>
+          <a:p>
+            <a:pPr marL="0" indent="0">
+              <a:buNone/>
+            </a:pPr>
+            <a:r>
+              <a:rPr lang="en-US" dirty="0"/>
+              <a:t>We want to:</a:t>
+            </a:r>
+          </a:p>
+          <a:p>
+            <a:r>
+              <a:rPr lang="en-US" dirty="0"/>
+              <a:t>Support</a:t>
+            </a:r>
+            <a:r>
+              <a:rPr lang="en-US" dirty="0">
+                <a:solidFill>
+                  <a:srgbClr val="404040"/>
+                </a:solidFill>
+              </a:rPr>
+              <a:t> researchers across the university to use software in their work when required.</a:t>
+            </a:r>
+          </a:p>
+          <a:p>
+            <a:r>
+              <a:rPr lang="en-US" dirty="0">
+                <a:solidFill>
+                  <a:srgbClr val="404040"/>
+                </a:solidFill>
+              </a:rPr>
+              <a:t>Make best practices a core part of research</a:t>
+            </a:r>
+            <a:endParaRPr lang="en-US" dirty="0"/>
+          </a:p>
+          <a:p>
+            <a:r>
+              <a:rPr lang="en-US" dirty="0"/>
+              <a:t>Better understand the challenges that researchers face.</a:t>
+            </a:r>
+          </a:p>
+          <a:p>
+            <a:r>
+              <a:rPr lang="en-US" dirty="0"/>
+              <a:t>Identify what training courses or software resources we might want the Accelerate Science Programme to create.</a:t>
+            </a:r>
+          </a:p>
+          <a:p>
+            <a:pPr lvl="1"/>
+            <a:r>
+              <a:rPr lang="en-US" dirty="0">
+                <a:solidFill>
+                  <a:srgbClr val="404040"/>
+                </a:solidFill>
+                <a:latin typeface="Aptos" panose="020B0004020202020204" pitchFamily="34" charset="0"/>
+                <a:cs typeface="Helvetica"/>
+              </a:rPr>
+              <a:t>Including shared code</a:t>
+            </a:r>
+          </a:p>
+          <a:p>
+            <a:r>
+              <a:rPr lang="en-US" dirty="0"/>
+              <a:t>Start to build a community of like-minded researchers across the university.</a:t>
+            </a:r>
+          </a:p>
+        </p:txBody>
+      </p:sp>
+    </p:spTree>
+    <p:extLst>
+      <p:ext uri="{BB962C8B-B14F-4D97-AF65-F5344CB8AC3E}">
+        <p14:creationId xmlns:p14="http://schemas.microsoft.com/office/powerpoint/2010/main" val="1533927788"/>
+      </p:ext>
+    </p:extLst>
+  </p:cSld>
+  <p:clrMapOvr>
+    <a:masterClrMapping/>
+  </p:clrMapOvr>
+</p:sld>
+</file>
+
+<file path=ppt/slides/slide11.xml><?xml version="1.0" encoding="utf-8"?>
+<p:sld xmlns:a="http://schemas.openxmlformats.org/drawingml/2006/main" xmlns:r="http://schemas.openxmlformats.org/officeDocument/2006/relationships" xmlns:p="http://schemas.openxmlformats.org/presentationml/2006/main">
+  <p:cSld>
+    <p:spTree>
+      <p:nvGrpSpPr>
+        <p:cNvPr id="1" name=""/>
+        <p:cNvGrpSpPr/>
+        <p:nvPr/>
+      </p:nvGrpSpPr>
+      <p:grpSpPr>
+        <a:xfrm>
+          <a:off x="0" y="0"/>
+          <a:ext cx="0" cy="0"/>
+          <a:chOff x="0" y="0"/>
+          <a:chExt cx="0" cy="0"/>
+        </a:xfrm>
+      </p:grpSpPr>
+      <p:sp>
+        <p:nvSpPr>
+          <p:cNvPr id="2" name="Text Placeholder 1"/>
+          <p:cNvSpPr>
+            <a:spLocks noGrp="1"/>
+          </p:cNvSpPr>
+          <p:nvPr>
+            <p:ph type="body" sz="quarter" idx="10"/>
+          </p:nvPr>
+        </p:nvSpPr>
+        <p:spPr/>
+        <p:txBody>
+          <a:bodyPr vert="horz" lIns="121920" tIns="60960" rIns="121920" bIns="60960" rtlCol="0" anchor="t">
+            <a:normAutofit/>
+          </a:bodyPr>
+          <a:lstStyle/>
+          <a:p>
+            <a:r>
+              <a:rPr lang="en-US" b="1" dirty="0"/>
               <a:t>Packaging and Publishing Python Software for Research</a:t>
             </a:r>
           </a:p>
@@ -7268,7 +7776,7 @@
 </p:sld>
 </file>
 
-<file path=ppt/slides/slide11.xml><?xml version="1.0" encoding="utf-8"?>
+<file path=ppt/slides/slide12.xml><?xml version="1.0" encoding="utf-8"?>
 <p:sld xmlns:a="http://schemas.openxmlformats.org/drawingml/2006/main" xmlns:r="http://schemas.openxmlformats.org/officeDocument/2006/relationships" xmlns:p="http://schemas.openxmlformats.org/presentationml/2006/main">
   <p:cSld>
     <p:spTree>
@@ -7334,7 +7842,7 @@
 </p:sld>
 </file>
 
-<file path=ppt/slides/slide12.xml><?xml version="1.0" encoding="utf-8"?>
+<file path=ppt/slides/slide13.xml><?xml version="1.0" encoding="utf-8"?>
 <p:sld xmlns:a="http://schemas.openxmlformats.org/drawingml/2006/main" xmlns:r="http://schemas.openxmlformats.org/officeDocument/2006/relationships" xmlns:p="http://schemas.openxmlformats.org/presentationml/2006/main">
   <p:cSld>
     <p:spTree>
@@ -8550,7 +9058,7 @@
 </p:sld>
 </file>
 
-<file path=ppt/slides/slide13.xml><?xml version="1.0" encoding="utf-8"?>
+<file path=ppt/slides/slide14.xml><?xml version="1.0" encoding="utf-8"?>
 <p:sld xmlns:a="http://schemas.openxmlformats.org/drawingml/2006/main" xmlns:r="http://schemas.openxmlformats.org/officeDocument/2006/relationships" xmlns:p="http://schemas.openxmlformats.org/presentationml/2006/main">
   <p:cSld>
     <p:spTree>
@@ -9567,7 +10075,7 @@
 </p:sld>
 </file>
 
-<file path=ppt/slides/slide14.xml><?xml version="1.0" encoding="utf-8"?>
+<file path=ppt/slides/slide15.xml><?xml version="1.0" encoding="utf-8"?>
 <p:sld xmlns:a="http://schemas.openxmlformats.org/drawingml/2006/main" xmlns:r="http://schemas.openxmlformats.org/officeDocument/2006/relationships" xmlns:p="http://schemas.openxmlformats.org/presentationml/2006/main">
   <p:cSld>
     <p:spTree>
@@ -10216,180 +10724,6 @@
 </p:sld>
 </file>
 
-<file path=ppt/slides/slide15.xml><?xml version="1.0" encoding="utf-8"?>
-<p:sld xmlns:a="http://schemas.openxmlformats.org/drawingml/2006/main" xmlns:r="http://schemas.openxmlformats.org/officeDocument/2006/relationships" xmlns:p="http://schemas.openxmlformats.org/presentationml/2006/main">
-  <p:cSld>
-    <p:spTree>
-      <p:nvGrpSpPr>
-        <p:cNvPr id="1" name=""/>
-        <p:cNvGrpSpPr/>
-        <p:nvPr/>
-      </p:nvGrpSpPr>
-      <p:grpSpPr>
-        <a:xfrm>
-          <a:off x="0" y="0"/>
-          <a:ext cx="0" cy="0"/>
-          <a:chOff x="0" y="0"/>
-          <a:chExt cx="0" cy="0"/>
-        </a:xfrm>
-      </p:grpSpPr>
-      <p:sp>
-        <p:nvSpPr>
-          <p:cNvPr id="2" name="Text Placeholder 1"/>
-          <p:cNvSpPr>
-            <a:spLocks noGrp="1"/>
-          </p:cNvSpPr>
-          <p:nvPr>
-            <p:ph type="body" sz="quarter" idx="10"/>
-          </p:nvPr>
-        </p:nvSpPr>
-        <p:spPr/>
-        <p:txBody>
-          <a:bodyPr>
-            <a:normAutofit/>
-          </a:bodyPr>
-          <a:lstStyle/>
-          <a:p>
-            <a:r>
-              <a:rPr lang="en-US" dirty="0"/>
-              <a:t>What does it mean to “publish” software</a:t>
-            </a:r>
-          </a:p>
-          <a:p>
-            <a:endParaRPr lang="en-US" dirty="0"/>
-          </a:p>
-          <a:p>
-            <a:endParaRPr lang="en-US" dirty="0"/>
-          </a:p>
-        </p:txBody>
-      </p:sp>
-      <p:sp>
-        <p:nvSpPr>
-          <p:cNvPr id="3" name="TextBox 2">
-            <a:extLst>
-              <a:ext uri="{FF2B5EF4-FFF2-40B4-BE49-F238E27FC236}">
-                <a16:creationId xmlns:a16="http://schemas.microsoft.com/office/drawing/2014/main" id="{647DFCC2-FF60-925D-7D59-79058319894C}"/>
-              </a:ext>
-            </a:extLst>
-          </p:cNvPr>
-          <p:cNvSpPr txBox="1"/>
-          <p:nvPr/>
-        </p:nvSpPr>
-        <p:spPr>
-          <a:xfrm>
-            <a:off x="503659" y="1378381"/>
-            <a:ext cx="11176000" cy="3477875"/>
-          </a:xfrm>
-          <a:prstGeom prst="rect">
-            <a:avLst/>
-          </a:prstGeom>
-          <a:noFill/>
-        </p:spPr>
-        <p:txBody>
-          <a:bodyPr wrap="square" rtlCol="0">
-            <a:spAutoFit/>
-          </a:bodyPr>
-          <a:lstStyle/>
-          <a:p>
-            <a:pPr marL="342900" indent="-342900">
-              <a:buFont typeface="Arial" panose="020B0604020202020204" pitchFamily="34" charset="0"/>
-              <a:buChar char="•"/>
-            </a:pPr>
-            <a:r>
-              <a:rPr lang="en-GB" sz="2000" dirty="0">
-                <a:effectLst/>
-              </a:rPr>
-              <a:t>Most researchers assume publishing means making your code repository public on platforms like </a:t>
-            </a:r>
-            <a:r>
-              <a:rPr lang="en-GB" sz="2000" dirty="0"/>
-              <a:t>G</a:t>
-            </a:r>
-            <a:r>
-              <a:rPr lang="en-GB" sz="2000" dirty="0">
-                <a:effectLst/>
-              </a:rPr>
-              <a:t>itHub</a:t>
-            </a:r>
-            <a:r>
-              <a:rPr lang="en-GB" sz="2000" dirty="0"/>
-              <a:t>.</a:t>
-            </a:r>
-          </a:p>
-          <a:p>
-            <a:pPr marL="342900" indent="-342900">
-              <a:buFont typeface="Arial" panose="020B0604020202020204" pitchFamily="34" charset="0"/>
-              <a:buChar char="•"/>
-            </a:pPr>
-            <a:endParaRPr lang="en-GB" sz="2000" dirty="0">
-              <a:effectLst/>
-            </a:endParaRPr>
-          </a:p>
-          <a:p>
-            <a:pPr marL="342900" indent="-342900">
-              <a:buFont typeface="Arial" panose="020B0604020202020204" pitchFamily="34" charset="0"/>
-              <a:buChar char="•"/>
-            </a:pPr>
-            <a:r>
-              <a:rPr lang="en-GB" sz="2000" dirty="0">
-                <a:effectLst/>
-              </a:rPr>
-              <a:t>This is certainly one of the most common forms of publishing software, and allows you to cover most of the benefits of publishing that we stated.</a:t>
-            </a:r>
-          </a:p>
-          <a:p>
-            <a:pPr marL="342900" indent="-342900">
-              <a:buFont typeface="Arial" panose="020B0604020202020204" pitchFamily="34" charset="0"/>
-              <a:buChar char="•"/>
-            </a:pPr>
-            <a:endParaRPr lang="en-GB" sz="2000" dirty="0"/>
-          </a:p>
-          <a:p>
-            <a:pPr marL="342900" indent="-342900">
-              <a:buFont typeface="Arial" panose="020B0604020202020204" pitchFamily="34" charset="0"/>
-              <a:buChar char="•"/>
-            </a:pPr>
-            <a:r>
-              <a:rPr lang="en-GB" sz="2000" dirty="0">
-                <a:effectLst/>
-              </a:rPr>
-              <a:t>However, there are more sophisticated forms of publishing that can provide you with a much better chance of obtaining those advantages.</a:t>
-            </a:r>
-          </a:p>
-          <a:p>
-            <a:pPr marL="342900" indent="-342900">
-              <a:buFont typeface="Arial" panose="020B0604020202020204" pitchFamily="34" charset="0"/>
-              <a:buChar char="•"/>
-            </a:pPr>
-            <a:endParaRPr lang="en-GB" sz="2000" dirty="0"/>
-          </a:p>
-          <a:p>
-            <a:pPr marL="342900" indent="-342900">
-              <a:buFont typeface="Arial" panose="020B0604020202020204" pitchFamily="34" charset="0"/>
-              <a:buChar char="•"/>
-            </a:pPr>
-            <a:r>
-              <a:rPr lang="en-GB" sz="2000" dirty="0">
-                <a:effectLst/>
-              </a:rPr>
-              <a:t>To clarify this point, I like to think of publishing as a hierarchy of publishing levels, each extra level provides you with a better chance of increasing the exposure and impact of your software. </a:t>
-            </a:r>
-          </a:p>
-        </p:txBody>
-      </p:sp>
-    </p:spTree>
-    <p:extLst>
-      <p:ext uri="{BB962C8B-B14F-4D97-AF65-F5344CB8AC3E}">
-        <p14:creationId xmlns:p14="http://schemas.microsoft.com/office/powerpoint/2010/main" val="3588409178"/>
-      </p:ext>
-    </p:extLst>
-  </p:cSld>
-  <p:clrMapOvr>
-    <a:masterClrMapping/>
-  </p:clrMapOvr>
-</p:sld>
-</file>
-
 <file path=ppt/slides/slide16.xml><?xml version="1.0" encoding="utf-8"?>
 <p:sld xmlns:a="http://schemas.openxmlformats.org/drawingml/2006/main" xmlns:r="http://schemas.openxmlformats.org/officeDocument/2006/relationships" xmlns:p="http://schemas.openxmlformats.org/presentationml/2006/main">
   <p:cSld>
@@ -10426,7 +10760,7 @@
           <a:p>
             <a:r>
               <a:rPr lang="en-US" dirty="0"/>
-              <a:t>Publishing hierarchy</a:t>
+              <a:t>What does it mean to “publish” software</a:t>
             </a:r>
           </a:p>
           <a:p>
@@ -10451,8 +10785,8 @@
         </p:nvSpPr>
         <p:spPr>
           <a:xfrm>
-            <a:off x="503659" y="1109440"/>
-            <a:ext cx="11176000" cy="5016758"/>
+            <a:off x="503659" y="1378381"/>
+            <a:ext cx="11176000" cy="3477875"/>
           </a:xfrm>
           <a:prstGeom prst="rect">
             <a:avLst/>
@@ -10470,19 +10804,45 @@
               <a:buChar char="•"/>
             </a:pPr>
             <a:r>
-              <a:rPr lang="en-GB" sz="2000" b="1" dirty="0">
-                <a:solidFill>
-                  <a:srgbClr val="0070C0"/>
-                </a:solidFill>
-                <a:effectLst/>
-              </a:rPr>
-              <a:t>Level 0</a:t>
-            </a:r>
-            <a:r>
               <a:rPr lang="en-GB" sz="2000" dirty="0">
                 <a:effectLst/>
               </a:rPr>
-              <a:t>: Barely doing anything. Email your source code to your colleagues/collaborators with explanations of how to run it.</a:t>
+              <a:t>Most researchers assume publishing means making your code repository public on platforms like </a:t>
+            </a:r>
+            <a:r>
+              <a:rPr lang="en-GB" sz="2000" dirty="0"/>
+              <a:t>G</a:t>
+            </a:r>
+            <a:r>
+              <a:rPr lang="en-GB" sz="2000" dirty="0">
+                <a:effectLst/>
+              </a:rPr>
+              <a:t>itHub</a:t>
+            </a:r>
+            <a:r>
+              <a:rPr lang="en-GB" sz="2000" dirty="0"/>
+              <a:t>.</a:t>
+            </a:r>
+          </a:p>
+          <a:p>
+            <a:pPr marL="342900" indent="-342900">
+              <a:buFont typeface="Arial" panose="020B0604020202020204" pitchFamily="34" charset="0"/>
+              <a:buChar char="•"/>
+            </a:pPr>
+            <a:endParaRPr lang="en-GB" sz="2000" dirty="0">
+              <a:effectLst/>
+            </a:endParaRPr>
+          </a:p>
+          <a:p>
+            <a:pPr marL="342900" indent="-342900">
+              <a:buFont typeface="Arial" panose="020B0604020202020204" pitchFamily="34" charset="0"/>
+              <a:buChar char="•"/>
+            </a:pPr>
+            <a:r>
+              <a:rPr lang="en-GB" sz="2000" dirty="0">
+                <a:effectLst/>
+              </a:rPr>
+              <a:t>This is certainly one of the most common forms of publishing software, and allows you to cover most of the benefits of publishing that we stated.</a:t>
             </a:r>
           </a:p>
           <a:p>
@@ -10498,39 +10858,10 @@
               <a:buChar char="•"/>
             </a:pPr>
             <a:r>
-              <a:rPr lang="en-GB" sz="2000" b="1" dirty="0">
-                <a:solidFill>
-                  <a:srgbClr val="0070C0"/>
-                </a:solidFill>
-                <a:effectLst/>
-              </a:rPr>
-              <a:t>Level 1</a:t>
-            </a:r>
-            <a:r>
               <a:rPr lang="en-GB" sz="2000" dirty="0">
                 <a:effectLst/>
               </a:rPr>
-              <a:t>: Maintain your source code publicly on GitHub under </a:t>
-            </a:r>
-            <a:r>
-              <a:rPr lang="en-GB" sz="2000" dirty="0"/>
-              <a:t>some </a:t>
-            </a:r>
-            <a:r>
-              <a:rPr lang="en-GB" sz="2000" dirty="0">
-                <a:effectLst/>
-              </a:rPr>
-              <a:t>licence. This is an important level as it now means others can fork, modify, and extend your work. However, one limitation is that most potential users of your pipeline might not be interested in your code, they just want to use your </a:t>
-            </a:r>
-            <a:r>
-              <a:rPr lang="en-GB" sz="2000" dirty="0"/>
-              <a:t>software</a:t>
-            </a:r>
-            <a:r>
-              <a:rPr lang="en-GB" sz="2000" dirty="0">
-                <a:effectLst/>
-              </a:rPr>
-              <a:t> rather than extend it.</a:t>
+              <a:t>However, there are more sophisticated forms of publishing that can provide you with a much better chance of obtaining those advantages.</a:t>
             </a:r>
           </a:p>
           <a:p>
@@ -10546,126 +10877,18 @@
               <a:buChar char="•"/>
             </a:pPr>
             <a:r>
-              <a:rPr lang="en-GB" sz="2000" b="1" dirty="0">
-                <a:solidFill>
-                  <a:srgbClr val="0070C0"/>
-                </a:solidFill>
+              <a:rPr lang="en-GB" sz="2000" dirty="0">
+                <a:effectLst/>
               </a:rPr>
-              <a:t>Level 2</a:t>
-            </a:r>
-            <a:r>
-              <a:rPr lang="en-GB" sz="2000" dirty="0"/>
-              <a:t>: Publish to build repository like </a:t>
-            </a:r>
-            <a:r>
-              <a:rPr lang="en-GB" sz="2000" dirty="0" err="1"/>
-              <a:t>PyPI</a:t>
-            </a:r>
-            <a:r>
-              <a:rPr lang="en-GB" sz="2000" dirty="0"/>
-              <a:t> or </a:t>
-            </a:r>
-            <a:r>
-              <a:rPr lang="en-GB" sz="2000" dirty="0" err="1"/>
-              <a:t>Conda</a:t>
-            </a:r>
-            <a:r>
-              <a:rPr lang="en-GB" sz="2000" dirty="0"/>
-              <a:t> Forge.</a:t>
-            </a:r>
-          </a:p>
-          <a:p>
-            <a:pPr marL="342900" indent="-342900">
-              <a:buFont typeface="Arial" panose="020B0604020202020204" pitchFamily="34" charset="0"/>
-              <a:buChar char="•"/>
-            </a:pPr>
-            <a:endParaRPr lang="en-GB" sz="2000" dirty="0"/>
-          </a:p>
-          <a:p>
-            <a:pPr marL="342900" indent="-342900">
-              <a:buFont typeface="Arial" panose="020B0604020202020204" pitchFamily="34" charset="0"/>
-              <a:buChar char="•"/>
-            </a:pPr>
-            <a:r>
-              <a:rPr lang="en-GB" sz="2000" b="1" dirty="0">
-                <a:solidFill>
-                  <a:srgbClr val="0070C0"/>
-                </a:solidFill>
-              </a:rPr>
-              <a:t>Level 3</a:t>
-            </a:r>
-            <a:r>
-              <a:rPr lang="en-GB" sz="2000" dirty="0"/>
-              <a:t>: Publish documentation with something like Read the Docs or </a:t>
-            </a:r>
-            <a:r>
-              <a:rPr lang="en-GB" sz="2000" dirty="0" err="1"/>
-              <a:t>MkDocs</a:t>
-            </a:r>
-            <a:r>
-              <a:rPr lang="en-GB" sz="2000" dirty="0"/>
-              <a:t>.</a:t>
-            </a:r>
-          </a:p>
-          <a:p>
-            <a:pPr marL="342900" indent="-342900">
-              <a:buFont typeface="Arial" panose="020B0604020202020204" pitchFamily="34" charset="0"/>
-              <a:buChar char="•"/>
-            </a:pPr>
-            <a:endParaRPr lang="en-GB" sz="2000" dirty="0"/>
-          </a:p>
-          <a:p>
-            <a:pPr marL="342900" indent="-342900">
-              <a:buFont typeface="Arial" panose="020B0604020202020204" pitchFamily="34" charset="0"/>
-              <a:buChar char="•"/>
-            </a:pPr>
-            <a:r>
-              <a:rPr lang="en-GB" sz="2000" b="1" dirty="0">
-                <a:solidFill>
-                  <a:srgbClr val="0070C0"/>
-                </a:solidFill>
-              </a:rPr>
-              <a:t>Level 4</a:t>
-            </a:r>
-            <a:r>
-              <a:rPr lang="en-GB" sz="2000" dirty="0"/>
-              <a:t>: Automate all of the above!</a:t>
-            </a:r>
-          </a:p>
-          <a:p>
-            <a:pPr marL="342900" indent="-342900">
-              <a:buFont typeface="Arial" panose="020B0604020202020204" pitchFamily="34" charset="0"/>
-              <a:buChar char="•"/>
-            </a:pPr>
-            <a:endParaRPr lang="en-GB" sz="2000" dirty="0"/>
-          </a:p>
-          <a:p>
-            <a:pPr marL="342900" indent="-342900">
-              <a:buFont typeface="Arial" panose="020B0604020202020204" pitchFamily="34" charset="0"/>
-              <a:buChar char="•"/>
-            </a:pPr>
-            <a:r>
-              <a:rPr lang="en-GB" sz="2000" b="1" dirty="0">
-                <a:solidFill>
-                  <a:srgbClr val="0070C0"/>
-                </a:solidFill>
-              </a:rPr>
-              <a:t>Level 5</a:t>
-            </a:r>
-            <a:r>
-              <a:rPr lang="en-GB" sz="2000" dirty="0"/>
-              <a:t>: All of the above, and publish your pipeline or software in a software-specific journal like the Journal for Open Source Software (JOSS).</a:t>
-            </a:r>
-            <a:endParaRPr lang="en-GB" sz="2000" dirty="0">
-              <a:effectLst/>
-            </a:endParaRPr>
+              <a:t>To clarify this point, I like to think of publishing as a hierarchy of publishing levels, each extra level provides you with a better chance of increasing the exposure and impact of your software. </a:t>
+            </a:r>
           </a:p>
         </p:txBody>
       </p:sp>
     </p:spTree>
     <p:extLst>
       <p:ext uri="{BB962C8B-B14F-4D97-AF65-F5344CB8AC3E}">
-        <p14:creationId xmlns:p14="http://schemas.microsoft.com/office/powerpoint/2010/main" val="263237196"/>
+        <p14:creationId xmlns:p14="http://schemas.microsoft.com/office/powerpoint/2010/main" val="3588409178"/>
       </p:ext>
     </p:extLst>
   </p:cSld>
@@ -10694,6 +10917,291 @@
       </p:grpSpPr>
       <p:sp>
         <p:nvSpPr>
+          <p:cNvPr id="2" name="Text Placeholder 1"/>
+          <p:cNvSpPr>
+            <a:spLocks noGrp="1"/>
+          </p:cNvSpPr>
+          <p:nvPr>
+            <p:ph type="body" sz="quarter" idx="10"/>
+          </p:nvPr>
+        </p:nvSpPr>
+        <p:spPr/>
+        <p:txBody>
+          <a:bodyPr>
+            <a:normAutofit/>
+          </a:bodyPr>
+          <a:lstStyle/>
+          <a:p>
+            <a:r>
+              <a:rPr lang="en-US" dirty="0"/>
+              <a:t>Publishing hierarchy</a:t>
+            </a:r>
+          </a:p>
+          <a:p>
+            <a:endParaRPr lang="en-US" dirty="0"/>
+          </a:p>
+          <a:p>
+            <a:endParaRPr lang="en-US" dirty="0"/>
+          </a:p>
+        </p:txBody>
+      </p:sp>
+      <p:sp>
+        <p:nvSpPr>
+          <p:cNvPr id="3" name="TextBox 2">
+            <a:extLst>
+              <a:ext uri="{FF2B5EF4-FFF2-40B4-BE49-F238E27FC236}">
+                <a16:creationId xmlns:a16="http://schemas.microsoft.com/office/drawing/2014/main" id="{647DFCC2-FF60-925D-7D59-79058319894C}"/>
+              </a:ext>
+            </a:extLst>
+          </p:cNvPr>
+          <p:cNvSpPr txBox="1"/>
+          <p:nvPr/>
+        </p:nvSpPr>
+        <p:spPr>
+          <a:xfrm>
+            <a:off x="503659" y="1109440"/>
+            <a:ext cx="11176000" cy="5016758"/>
+          </a:xfrm>
+          <a:prstGeom prst="rect">
+            <a:avLst/>
+          </a:prstGeom>
+          <a:noFill/>
+        </p:spPr>
+        <p:txBody>
+          <a:bodyPr wrap="square" rtlCol="0">
+            <a:spAutoFit/>
+          </a:bodyPr>
+          <a:lstStyle/>
+          <a:p>
+            <a:pPr marL="342900" indent="-342900">
+              <a:buFont typeface="Arial" panose="020B0604020202020204" pitchFamily="34" charset="0"/>
+              <a:buChar char="•"/>
+            </a:pPr>
+            <a:r>
+              <a:rPr lang="en-GB" sz="2000" b="1" dirty="0">
+                <a:solidFill>
+                  <a:srgbClr val="0070C0"/>
+                </a:solidFill>
+                <a:effectLst/>
+              </a:rPr>
+              <a:t>Level 0</a:t>
+            </a:r>
+            <a:r>
+              <a:rPr lang="en-GB" sz="2000" dirty="0">
+                <a:effectLst/>
+              </a:rPr>
+              <a:t>: Barely doing anything. Email your source code to your colleagues/collaborators with explanations of how to run it.</a:t>
+            </a:r>
+          </a:p>
+          <a:p>
+            <a:pPr marL="342900" indent="-342900">
+              <a:buFont typeface="Arial" panose="020B0604020202020204" pitchFamily="34" charset="0"/>
+              <a:buChar char="•"/>
+            </a:pPr>
+            <a:endParaRPr lang="en-GB" sz="2000" dirty="0"/>
+          </a:p>
+          <a:p>
+            <a:pPr marL="342900" indent="-342900">
+              <a:buFont typeface="Arial" panose="020B0604020202020204" pitchFamily="34" charset="0"/>
+              <a:buChar char="•"/>
+            </a:pPr>
+            <a:r>
+              <a:rPr lang="en-GB" sz="2000" b="1" dirty="0">
+                <a:solidFill>
+                  <a:srgbClr val="0070C0"/>
+                </a:solidFill>
+                <a:effectLst/>
+              </a:rPr>
+              <a:t>Level 1</a:t>
+            </a:r>
+            <a:r>
+              <a:rPr lang="en-GB" sz="2000" dirty="0">
+                <a:effectLst/>
+              </a:rPr>
+              <a:t>: Maintain your source code publicly on GitHub under </a:t>
+            </a:r>
+            <a:r>
+              <a:rPr lang="en-GB" sz="2000" dirty="0"/>
+              <a:t>some </a:t>
+            </a:r>
+            <a:r>
+              <a:rPr lang="en-GB" sz="2000" dirty="0">
+                <a:effectLst/>
+              </a:rPr>
+              <a:t>licence. This is an important level as it now means others can fork, modify, and extend your work. However, one limitation is that most potential users of your pipeline might not be interested in your code, they just want to use your </a:t>
+            </a:r>
+            <a:r>
+              <a:rPr lang="en-GB" sz="2000" dirty="0"/>
+              <a:t>software</a:t>
+            </a:r>
+            <a:r>
+              <a:rPr lang="en-GB" sz="2000" dirty="0">
+                <a:effectLst/>
+              </a:rPr>
+              <a:t> rather than extend it.</a:t>
+            </a:r>
+          </a:p>
+          <a:p>
+            <a:pPr marL="342900" indent="-342900">
+              <a:buFont typeface="Arial" panose="020B0604020202020204" pitchFamily="34" charset="0"/>
+              <a:buChar char="•"/>
+            </a:pPr>
+            <a:endParaRPr lang="en-GB" sz="2000" dirty="0"/>
+          </a:p>
+          <a:p>
+            <a:pPr marL="342900" indent="-342900">
+              <a:buFont typeface="Arial" panose="020B0604020202020204" pitchFamily="34" charset="0"/>
+              <a:buChar char="•"/>
+            </a:pPr>
+            <a:r>
+              <a:rPr lang="en-GB" sz="2000" b="1" dirty="0">
+                <a:solidFill>
+                  <a:srgbClr val="0070C0"/>
+                </a:solidFill>
+              </a:rPr>
+              <a:t>Level 2</a:t>
+            </a:r>
+            <a:r>
+              <a:rPr lang="en-GB" sz="2000" dirty="0"/>
+              <a:t>: Publish to build repository like </a:t>
+            </a:r>
+            <a:r>
+              <a:rPr lang="en-GB" sz="2000" dirty="0" err="1"/>
+              <a:t>PyPI</a:t>
+            </a:r>
+            <a:r>
+              <a:rPr lang="en-GB" sz="2000" dirty="0"/>
+              <a:t> or </a:t>
+            </a:r>
+            <a:r>
+              <a:rPr lang="en-GB" sz="2000" dirty="0" err="1"/>
+              <a:t>Conda</a:t>
+            </a:r>
+            <a:r>
+              <a:rPr lang="en-GB" sz="2000" dirty="0"/>
+              <a:t> Forge.</a:t>
+            </a:r>
+          </a:p>
+          <a:p>
+            <a:pPr marL="342900" indent="-342900">
+              <a:buFont typeface="Arial" panose="020B0604020202020204" pitchFamily="34" charset="0"/>
+              <a:buChar char="•"/>
+            </a:pPr>
+            <a:endParaRPr lang="en-GB" sz="2000" dirty="0"/>
+          </a:p>
+          <a:p>
+            <a:pPr marL="342900" indent="-342900">
+              <a:buFont typeface="Arial" panose="020B0604020202020204" pitchFamily="34" charset="0"/>
+              <a:buChar char="•"/>
+            </a:pPr>
+            <a:r>
+              <a:rPr lang="en-GB" sz="2000" b="1" dirty="0">
+                <a:solidFill>
+                  <a:srgbClr val="0070C0"/>
+                </a:solidFill>
+              </a:rPr>
+              <a:t>Level 3</a:t>
+            </a:r>
+            <a:r>
+              <a:rPr lang="en-GB" sz="2000" dirty="0"/>
+              <a:t>: Publish documentation with something like Read the Docs or </a:t>
+            </a:r>
+            <a:r>
+              <a:rPr lang="en-GB" sz="2000" dirty="0" err="1"/>
+              <a:t>MkDocs</a:t>
+            </a:r>
+            <a:r>
+              <a:rPr lang="en-GB" sz="2000" dirty="0"/>
+              <a:t>.</a:t>
+            </a:r>
+          </a:p>
+          <a:p>
+            <a:pPr marL="342900" indent="-342900">
+              <a:buFont typeface="Arial" panose="020B0604020202020204" pitchFamily="34" charset="0"/>
+              <a:buChar char="•"/>
+            </a:pPr>
+            <a:endParaRPr lang="en-GB" sz="2000" dirty="0"/>
+          </a:p>
+          <a:p>
+            <a:pPr marL="342900" indent="-342900">
+              <a:buFont typeface="Arial" panose="020B0604020202020204" pitchFamily="34" charset="0"/>
+              <a:buChar char="•"/>
+            </a:pPr>
+            <a:r>
+              <a:rPr lang="en-GB" sz="2000" b="1" dirty="0">
+                <a:solidFill>
+                  <a:srgbClr val="0070C0"/>
+                </a:solidFill>
+              </a:rPr>
+              <a:t>Level 4</a:t>
+            </a:r>
+            <a:r>
+              <a:rPr lang="en-GB" sz="2000" dirty="0"/>
+              <a:t>: Automate all of the above!</a:t>
+            </a:r>
+          </a:p>
+          <a:p>
+            <a:pPr marL="342900" indent="-342900">
+              <a:buFont typeface="Arial" panose="020B0604020202020204" pitchFamily="34" charset="0"/>
+              <a:buChar char="•"/>
+            </a:pPr>
+            <a:endParaRPr lang="en-GB" sz="2000" dirty="0"/>
+          </a:p>
+          <a:p>
+            <a:pPr marL="342900" indent="-342900">
+              <a:buFont typeface="Arial" panose="020B0604020202020204" pitchFamily="34" charset="0"/>
+              <a:buChar char="•"/>
+            </a:pPr>
+            <a:r>
+              <a:rPr lang="en-GB" sz="2000" b="1" dirty="0">
+                <a:solidFill>
+                  <a:srgbClr val="0070C0"/>
+                </a:solidFill>
+              </a:rPr>
+              <a:t>Level 5</a:t>
+            </a:r>
+            <a:r>
+              <a:rPr lang="en-GB" sz="2000" dirty="0"/>
+              <a:t>: All of the above, and publish your pipeline or software in a software-specific journal like the Journal for Open Source Software (JOSS).</a:t>
+            </a:r>
+            <a:endParaRPr lang="en-GB" sz="2000" dirty="0">
+              <a:effectLst/>
+            </a:endParaRPr>
+          </a:p>
+        </p:txBody>
+      </p:sp>
+    </p:spTree>
+    <p:extLst>
+      <p:ext uri="{BB962C8B-B14F-4D97-AF65-F5344CB8AC3E}">
+        <p14:creationId xmlns:p14="http://schemas.microsoft.com/office/powerpoint/2010/main" val="263237196"/>
+      </p:ext>
+    </p:extLst>
+  </p:cSld>
+  <p:clrMapOvr>
+    <a:masterClrMapping/>
+  </p:clrMapOvr>
+</p:sld>
+</file>
+
+<file path=ppt/slides/slide18.xml><?xml version="1.0" encoding="utf-8"?>
+<p:sld xmlns:a="http://schemas.openxmlformats.org/drawingml/2006/main" xmlns:r="http://schemas.openxmlformats.org/officeDocument/2006/relationships" xmlns:p="http://schemas.openxmlformats.org/presentationml/2006/main">
+  <p:cSld>
+    <p:spTree>
+      <p:nvGrpSpPr>
+        <p:cNvPr id="1" name=""/>
+        <p:cNvGrpSpPr/>
+        <p:nvPr/>
+      </p:nvGrpSpPr>
+      <p:grpSpPr>
+        <a:xfrm>
+          <a:off x="0" y="0"/>
+          <a:ext cx="0" cy="0"/>
+          <a:chOff x="0" y="0"/>
+          <a:chExt cx="0" cy="0"/>
+        </a:xfrm>
+      </p:grpSpPr>
+      <p:sp>
+        <p:nvSpPr>
           <p:cNvPr id="2" name="Text Placeholder 1">
             <a:extLst>
               <a:ext uri="{FF2B5EF4-FFF2-40B4-BE49-F238E27FC236}">
@@ -10853,7 +11361,7 @@
 </p:sld>
 </file>
 
-<file path=ppt/slides/slide18.xml><?xml version="1.0" encoding="utf-8"?>
+<file path=ppt/slides/slide19.xml><?xml version="1.0" encoding="utf-8"?>
 <p:sld xmlns:a="http://schemas.openxmlformats.org/drawingml/2006/main" xmlns:r="http://schemas.openxmlformats.org/officeDocument/2006/relationships" xmlns:p="http://schemas.openxmlformats.org/presentationml/2006/main">
   <p:cSld>
     <p:spTree>
@@ -11152,6 +11660,153 @@
 </file>
 
 <file path=ppt/slides/slide2.xml><?xml version="1.0" encoding="utf-8"?>
+<p:sld xmlns:a="http://schemas.openxmlformats.org/drawingml/2006/main" xmlns:r="http://schemas.openxmlformats.org/officeDocument/2006/relationships" xmlns:p="http://schemas.openxmlformats.org/presentationml/2006/main">
+  <p:cSld>
+    <p:spTree>
+      <p:nvGrpSpPr>
+        <p:cNvPr id="1" name=""/>
+        <p:cNvGrpSpPr/>
+        <p:nvPr/>
+      </p:nvGrpSpPr>
+      <p:grpSpPr>
+        <a:xfrm>
+          <a:off x="0" y="0"/>
+          <a:ext cx="0" cy="0"/>
+          <a:chOff x="0" y="0"/>
+          <a:chExt cx="0" cy="0"/>
+        </a:xfrm>
+      </p:grpSpPr>
+      <p:sp>
+        <p:nvSpPr>
+          <p:cNvPr id="2" name="Text Placeholder 1">
+            <a:extLst>
+              <a:ext uri="{FF2B5EF4-FFF2-40B4-BE49-F238E27FC236}">
+                <a16:creationId xmlns:a16="http://schemas.microsoft.com/office/drawing/2014/main" id="{E0420195-C79B-3B0F-D479-86340A2C12BB}"/>
+              </a:ext>
+            </a:extLst>
+          </p:cNvPr>
+          <p:cNvSpPr>
+            <a:spLocks noGrp="1"/>
+          </p:cNvSpPr>
+          <p:nvPr>
+            <p:ph type="body" sz="quarter" idx="10"/>
+          </p:nvPr>
+        </p:nvSpPr>
+        <p:spPr/>
+        <p:txBody>
+          <a:bodyPr/>
+          <a:lstStyle/>
+          <a:p>
+            <a:r>
+              <a:rPr lang="en-US" dirty="0"/>
+              <a:t>Documentation</a:t>
+            </a:r>
+          </a:p>
+        </p:txBody>
+      </p:sp>
+      <p:sp>
+        <p:nvSpPr>
+          <p:cNvPr id="3" name="Text Placeholder 2">
+            <a:extLst>
+              <a:ext uri="{FF2B5EF4-FFF2-40B4-BE49-F238E27FC236}">
+                <a16:creationId xmlns:a16="http://schemas.microsoft.com/office/drawing/2014/main" id="{3299C1E5-C214-D48B-72FD-890B98593842}"/>
+              </a:ext>
+            </a:extLst>
+          </p:cNvPr>
+          <p:cNvSpPr>
+            <a:spLocks noGrp="1"/>
+          </p:cNvSpPr>
+          <p:nvPr>
+            <p:ph type="body" sz="quarter" idx="11"/>
+          </p:nvPr>
+        </p:nvSpPr>
+        <p:spPr>
+          <a:xfrm>
+            <a:off x="503659" y="1146008"/>
+            <a:ext cx="11176000" cy="5618859"/>
+          </a:xfrm>
+        </p:spPr>
+        <p:txBody>
+          <a:bodyPr>
+            <a:normAutofit/>
+          </a:bodyPr>
+          <a:lstStyle/>
+          <a:p>
+            <a:r>
+              <a:rPr lang="en-US" dirty="0"/>
+              <a:t>Documentation for hands-on exercises available at:</a:t>
+            </a:r>
+          </a:p>
+          <a:p>
+            <a:endParaRPr lang="en-US" dirty="0"/>
+          </a:p>
+          <a:p>
+            <a:r>
+              <a:rPr lang="en-US" b="1" u="sng" dirty="0" err="1">
+                <a:solidFill>
+                  <a:srgbClr val="235DE3"/>
+                </a:solidFill>
+              </a:rPr>
+              <a:t>docs.science.ai.cam.ac.uk</a:t>
+            </a:r>
+            <a:r>
+              <a:rPr lang="en-US" b="1" u="sng" dirty="0">
+                <a:solidFill>
+                  <a:srgbClr val="235DE3"/>
+                </a:solidFill>
+              </a:rPr>
+              <a:t>/packaging-publishing</a:t>
+            </a:r>
+          </a:p>
+          <a:p>
+            <a:endParaRPr lang="en-US" dirty="0"/>
+          </a:p>
+        </p:txBody>
+      </p:sp>
+      <p:pic>
+        <p:nvPicPr>
+          <p:cNvPr id="5" name="Picture 4">
+            <a:extLst>
+              <a:ext uri="{FF2B5EF4-FFF2-40B4-BE49-F238E27FC236}">
+                <a16:creationId xmlns:a16="http://schemas.microsoft.com/office/drawing/2014/main" id="{87871792-B3FC-815F-FFEE-2E61E7225FE3}"/>
+              </a:ext>
+            </a:extLst>
+          </p:cNvPr>
+          <p:cNvPicPr>
+            <a:picLocks noChangeAspect="1"/>
+          </p:cNvPicPr>
+          <p:nvPr/>
+        </p:nvPicPr>
+        <p:blipFill>
+          <a:blip r:embed="rId2"/>
+          <a:stretch>
+            <a:fillRect/>
+          </a:stretch>
+        </p:blipFill>
+        <p:spPr>
+          <a:xfrm>
+            <a:off x="3310466" y="2725864"/>
+            <a:ext cx="5096934" cy="3430628"/>
+          </a:xfrm>
+          <a:prstGeom prst="rect">
+            <a:avLst/>
+          </a:prstGeom>
+        </p:spPr>
+      </p:pic>
+    </p:spTree>
+    <p:extLst>
+      <p:ext uri="{BB962C8B-B14F-4D97-AF65-F5344CB8AC3E}">
+        <p14:creationId xmlns:p14="http://schemas.microsoft.com/office/powerpoint/2010/main" val="4191210072"/>
+      </p:ext>
+    </p:extLst>
+  </p:cSld>
+  <p:clrMapOvr>
+    <a:masterClrMapping/>
+  </p:clrMapOvr>
+</p:sld>
+</file>
+
+<file path=ppt/slides/slide3.xml><?xml version="1.0" encoding="utf-8"?>
 <p:sld xmlns:a="http://schemas.openxmlformats.org/drawingml/2006/main" xmlns:r="http://schemas.openxmlformats.org/officeDocument/2006/relationships" xmlns:p="http://schemas.openxmlformats.org/presentationml/2006/main">
   <p:cSld>
     <p:spTree>
@@ -11422,7 +12077,7 @@
 </p:sld>
 </file>
 
-<file path=ppt/slides/slide3.xml><?xml version="1.0" encoding="utf-8"?>
+<file path=ppt/slides/slide4.xml><?xml version="1.0" encoding="utf-8"?>
 <p:sld xmlns:a="http://schemas.openxmlformats.org/drawingml/2006/main" xmlns:r="http://schemas.openxmlformats.org/officeDocument/2006/relationships" xmlns:p="http://schemas.openxmlformats.org/presentationml/2006/main">
   <p:cSld>
     <p:spTree>
@@ -11557,7 +12212,7 @@
 </p:sld>
 </file>
 
-<file path=ppt/slides/slide4.xml><?xml version="1.0" encoding="utf-8"?>
+<file path=ppt/slides/slide5.xml><?xml version="1.0" encoding="utf-8"?>
 <p:sld xmlns:a="http://schemas.openxmlformats.org/drawingml/2006/main" xmlns:r="http://schemas.openxmlformats.org/officeDocument/2006/relationships" xmlns:p="http://schemas.openxmlformats.org/presentationml/2006/main">
   <p:cSld>
     <p:spTree>
@@ -11692,7 +12347,7 @@
 </p:sld>
 </file>
 
-<file path=ppt/slides/slide5.xml><?xml version="1.0" encoding="utf-8"?>
+<file path=ppt/slides/slide6.xml><?xml version="1.0" encoding="utf-8"?>
 <p:sld xmlns:a="http://schemas.openxmlformats.org/drawingml/2006/main" xmlns:r="http://schemas.openxmlformats.org/officeDocument/2006/relationships" xmlns:p="http://schemas.openxmlformats.org/presentationml/2006/main">
   <p:cSld>
     <p:spTree>
@@ -11827,7 +12482,7 @@
 </p:sld>
 </file>
 
-<file path=ppt/slides/slide6.xml><?xml version="1.0" encoding="utf-8"?>
+<file path=ppt/slides/slide7.xml><?xml version="1.0" encoding="utf-8"?>
 <p:sld xmlns:a="http://schemas.openxmlformats.org/drawingml/2006/main" xmlns:r="http://schemas.openxmlformats.org/officeDocument/2006/relationships" xmlns:p="http://schemas.openxmlformats.org/presentationml/2006/main">
   <p:cSld>
     <p:spTree>
@@ -11962,7 +12617,7 @@
 </p:sld>
 </file>
 
-<file path=ppt/slides/slide7.xml><?xml version="1.0" encoding="utf-8"?>
+<file path=ppt/slides/slide8.xml><?xml version="1.0" encoding="utf-8"?>
 <p:sld xmlns:a="http://schemas.openxmlformats.org/drawingml/2006/main" xmlns:r="http://schemas.openxmlformats.org/officeDocument/2006/relationships" xmlns:p="http://schemas.openxmlformats.org/presentationml/2006/main">
   <p:cSld>
     <p:spTree>
@@ -12067,7 +12722,137 @@
         </p:nvSpPr>
         <p:spPr>
           <a:xfrm>
-            <a:off x="3971069" y="1842438"/>
+            <a:off x="3717069" y="1601552"/>
+            <a:ext cx="3986604" cy="523220"/>
+          </a:xfrm>
+          <a:prstGeom prst="rect">
+            <a:avLst/>
+          </a:prstGeom>
+          <a:noFill/>
+        </p:spPr>
+        <p:txBody>
+          <a:bodyPr wrap="square" rtlCol="0">
+            <a:spAutoFit/>
+          </a:bodyPr>
+          <a:lstStyle/>
+          <a:p>
+            <a:r>
+              <a:rPr lang="en-US" sz="2800" b="1" dirty="0">
+                <a:ln>
+                  <a:solidFill>
+                    <a:schemeClr val="tx1"/>
+                  </a:solidFill>
+                </a:ln>
+                <a:solidFill>
+                  <a:schemeClr val="accent6">
+                    <a:lumMod val="40000"/>
+                    <a:lumOff val="60000"/>
+                  </a:schemeClr>
+                </a:solidFill>
+              </a:rPr>
+              <a:t>pip install </a:t>
+            </a:r>
+            <a:r>
+              <a:rPr lang="en-US" sz="2800" b="1" dirty="0" err="1">
+                <a:ln>
+                  <a:solidFill>
+                    <a:schemeClr val="tx1"/>
+                  </a:solidFill>
+                </a:ln>
+                <a:solidFill>
+                  <a:schemeClr val="accent6">
+                    <a:lumMod val="40000"/>
+                    <a:lumOff val="60000"/>
+                  </a:schemeClr>
+                </a:solidFill>
+              </a:rPr>
+              <a:t>nobel_prize</a:t>
+            </a:r>
+            <a:endParaRPr lang="en-US" sz="2800" b="1" dirty="0">
+              <a:ln>
+                <a:solidFill>
+                  <a:schemeClr val="tx1"/>
+                </a:solidFill>
+              </a:ln>
+              <a:solidFill>
+                <a:schemeClr val="accent6">
+                  <a:lumMod val="40000"/>
+                  <a:lumOff val="60000"/>
+                </a:schemeClr>
+              </a:solidFill>
+            </a:endParaRPr>
+          </a:p>
+        </p:txBody>
+      </p:sp>
+      <p:sp>
+        <p:nvSpPr>
+          <p:cNvPr id="2" name="TextBox 1">
+            <a:extLst>
+              <a:ext uri="{FF2B5EF4-FFF2-40B4-BE49-F238E27FC236}">
+                <a16:creationId xmlns:a16="http://schemas.microsoft.com/office/drawing/2014/main" id="{36A20216-E771-EF17-636C-FCBE561033CD}"/>
+              </a:ext>
+            </a:extLst>
+          </p:cNvPr>
+          <p:cNvSpPr txBox="1"/>
+          <p:nvPr/>
+        </p:nvSpPr>
+        <p:spPr>
+          <a:xfrm>
+            <a:off x="2942865" y="2621372"/>
+            <a:ext cx="3986604" cy="523220"/>
+          </a:xfrm>
+          <a:prstGeom prst="rect">
+            <a:avLst/>
+          </a:prstGeom>
+          <a:noFill/>
+        </p:spPr>
+        <p:txBody>
+          <a:bodyPr wrap="square" rtlCol="0">
+            <a:spAutoFit/>
+          </a:bodyPr>
+          <a:lstStyle/>
+          <a:p>
+            <a:r>
+              <a:rPr lang="en-US" sz="2800" b="1" dirty="0" err="1">
+                <a:ln>
+                  <a:solidFill>
+                    <a:schemeClr val="tx1"/>
+                  </a:solidFill>
+                </a:ln>
+                <a:solidFill>
+                  <a:schemeClr val="bg1"/>
+                </a:solidFill>
+              </a:rPr>
+              <a:t>uv</a:t>
+            </a:r>
+            <a:endParaRPr lang="en-US" sz="2800" b="1" dirty="0">
+              <a:ln>
+                <a:solidFill>
+                  <a:schemeClr val="tx1"/>
+                </a:solidFill>
+              </a:ln>
+              <a:solidFill>
+                <a:schemeClr val="bg1"/>
+              </a:solidFill>
+            </a:endParaRPr>
+          </a:p>
+        </p:txBody>
+      </p:sp>
+      <p:sp>
+        <p:nvSpPr>
+          <p:cNvPr id="3" name="TextBox 2">
+            <a:extLst>
+              <a:ext uri="{FF2B5EF4-FFF2-40B4-BE49-F238E27FC236}">
+                <a16:creationId xmlns:a16="http://schemas.microsoft.com/office/drawing/2014/main" id="{C5C1D25E-AACD-B681-621D-233775343983}"/>
+              </a:ext>
+            </a:extLst>
+          </p:cNvPr>
+          <p:cNvSpPr txBox="1"/>
+          <p:nvPr/>
+        </p:nvSpPr>
+        <p:spPr>
+          <a:xfrm>
+            <a:off x="8409359" y="3922652"/>
             <a:ext cx="3986604" cy="523220"/>
           </a:xfrm>
           <a:prstGeom prst="rect">
@@ -12092,10 +12877,41 @@
                   <a:schemeClr val="bg1"/>
                 </a:solidFill>
               </a:rPr>
-              <a:t>pip install </a:t>
-            </a:r>
-            <a:r>
-              <a:rPr lang="en-US" sz="2800" b="1" dirty="0" err="1">
+              <a:t>pre-commit</a:t>
+            </a:r>
+          </a:p>
+        </p:txBody>
+      </p:sp>
+      <p:sp>
+        <p:nvSpPr>
+          <p:cNvPr id="4" name="TextBox 3">
+            <a:extLst>
+              <a:ext uri="{FF2B5EF4-FFF2-40B4-BE49-F238E27FC236}">
+                <a16:creationId xmlns:a16="http://schemas.microsoft.com/office/drawing/2014/main" id="{10C984AC-17A8-1BF5-0F97-225AC2AB6004}"/>
+              </a:ext>
+            </a:extLst>
+          </p:cNvPr>
+          <p:cNvSpPr txBox="1"/>
+          <p:nvPr/>
+        </p:nvSpPr>
+        <p:spPr>
+          <a:xfrm>
+            <a:off x="1789340" y="4230733"/>
+            <a:ext cx="3986604" cy="523220"/>
+          </a:xfrm>
+          <a:prstGeom prst="rect">
+            <a:avLst/>
+          </a:prstGeom>
+          <a:noFill/>
+        </p:spPr>
+        <p:txBody>
+          <a:bodyPr wrap="square" rtlCol="0">
+            <a:spAutoFit/>
+          </a:bodyPr>
+          <a:lstStyle/>
+          <a:p>
+            <a:r>
+              <a:rPr lang="en-US" sz="2800" b="1" dirty="0">
                 <a:ln>
                   <a:solidFill>
                     <a:schemeClr val="tx1"/>
@@ -12105,51 +12921,99 @@
                   <a:schemeClr val="bg1"/>
                 </a:solidFill>
               </a:rPr>
-              <a:t>nobel_prize</a:t>
-            </a:r>
-            <a:endParaRPr lang="en-US" sz="2800" b="1" dirty="0">
-              <a:ln>
-                <a:solidFill>
-                  <a:schemeClr val="tx1"/>
-                </a:solidFill>
-              </a:ln>
-              <a:solidFill>
-                <a:schemeClr val="bg1"/>
-              </a:solidFill>
-            </a:endParaRPr>
-          </a:p>
-        </p:txBody>
-      </p:sp>
-      <p:pic>
-        <p:nvPicPr>
-          <p:cNvPr id="12" name="Picture 11" descr="A drawing of an owl on a branch&#10;&#10;Description automatically generated">
+              <a:t>testing</a:t>
+            </a:r>
+          </a:p>
+        </p:txBody>
+      </p:sp>
+      <p:sp>
+        <p:nvSpPr>
+          <p:cNvPr id="5" name="TextBox 4">
             <a:extLst>
               <a:ext uri="{FF2B5EF4-FFF2-40B4-BE49-F238E27FC236}">
-                <a16:creationId xmlns:a16="http://schemas.microsoft.com/office/drawing/2014/main" id="{548B7495-1017-49A1-0117-7EC6A1061DD3}"/>
+                <a16:creationId xmlns:a16="http://schemas.microsoft.com/office/drawing/2014/main" id="{126F894B-07A4-94E1-18FA-FD56BE421B24}"/>
               </a:ext>
             </a:extLst>
           </p:cNvPr>
-          <p:cNvPicPr>
-            <a:picLocks noChangeAspect="1"/>
-          </p:cNvPicPr>
+          <p:cNvSpPr txBox="1"/>
           <p:nvPr/>
-        </p:nvPicPr>
-        <p:blipFill>
-          <a:blip r:embed="rId4"/>
-          <a:stretch>
-            <a:fillRect/>
-          </a:stretch>
-        </p:blipFill>
+        </p:nvSpPr>
         <p:spPr>
           <a:xfrm>
-            <a:off x="3456276" y="1282000"/>
-            <a:ext cx="5016189" cy="4293997"/>
+            <a:off x="6312322" y="2775413"/>
+            <a:ext cx="3986604" cy="523220"/>
           </a:xfrm>
           <a:prstGeom prst="rect">
             <a:avLst/>
           </a:prstGeom>
+          <a:noFill/>
         </p:spPr>
-      </p:pic>
+        <p:txBody>
+          <a:bodyPr wrap="square" rtlCol="0">
+            <a:spAutoFit/>
+          </a:bodyPr>
+          <a:lstStyle/>
+          <a:p>
+            <a:r>
+              <a:rPr lang="en-US" sz="2800" b="1" dirty="0">
+                <a:ln>
+                  <a:solidFill>
+                    <a:schemeClr val="tx1"/>
+                  </a:solidFill>
+                </a:ln>
+                <a:solidFill>
+                  <a:schemeClr val="bg1"/>
+                </a:solidFill>
+              </a:rPr>
+              <a:t>docstrings</a:t>
+            </a:r>
+          </a:p>
+        </p:txBody>
+      </p:sp>
+      <p:sp>
+        <p:nvSpPr>
+          <p:cNvPr id="8" name="TextBox 7">
+            <a:extLst>
+              <a:ext uri="{FF2B5EF4-FFF2-40B4-BE49-F238E27FC236}">
+                <a16:creationId xmlns:a16="http://schemas.microsoft.com/office/drawing/2014/main" id="{CD1D8ADA-0FCB-F074-045D-636D497C9D7E}"/>
+              </a:ext>
+            </a:extLst>
+          </p:cNvPr>
+          <p:cNvSpPr txBox="1"/>
+          <p:nvPr/>
+        </p:nvSpPr>
+        <p:spPr>
+          <a:xfrm>
+            <a:off x="3380542" y="3426052"/>
+            <a:ext cx="3986604" cy="523220"/>
+          </a:xfrm>
+          <a:prstGeom prst="rect">
+            <a:avLst/>
+          </a:prstGeom>
+          <a:noFill/>
+        </p:spPr>
+        <p:txBody>
+          <a:bodyPr wrap="square" rtlCol="0">
+            <a:spAutoFit/>
+          </a:bodyPr>
+          <a:lstStyle/>
+          <a:p>
+            <a:r>
+              <a:rPr lang="en-US" sz="2800" b="1" dirty="0">
+                <a:ln>
+                  <a:solidFill>
+                    <a:schemeClr val="tx1"/>
+                  </a:solidFill>
+                </a:ln>
+                <a:solidFill>
+                  <a:schemeClr val="bg1"/>
+                </a:solidFill>
+              </a:rPr>
+              <a:t>typing</a:t>
+            </a:r>
+          </a:p>
+        </p:txBody>
+      </p:sp>
     </p:spTree>
     <p:extLst>
       <p:ext uri="{BB962C8B-B14F-4D97-AF65-F5344CB8AC3E}">
@@ -12271,7 +13135,7 @@
                             </p:stCondLst>
                             <p:childTnLst>
                               <p:par>
-                                <p:cTn id="13" presetID="1" presetClass="entr" presetSubtype="0" fill="hold" nodeType="clickEffect">
+                                <p:cTn id="13" presetID="1" presetClass="entr" presetSubtype="0" fill="hold" grpId="0" nodeType="clickEffect">
                                   <p:stCondLst>
                                     <p:cond delay="0"/>
                                   </p:stCondLst>
@@ -12284,7 +13148,187 @@
                                           </p:stCondLst>
                                         </p:cTn>
                                         <p:tgtEl>
-                                          <p:spTgt spid="12"/>
+                                          <p:spTgt spid="2"/>
+                                        </p:tgtEl>
+                                        <p:attrNameLst>
+                                          <p:attrName>style.visibility</p:attrName>
+                                        </p:attrNameLst>
+                                      </p:cBhvr>
+                                      <p:to>
+                                        <p:strVal val="visible"/>
+                                      </p:to>
+                                    </p:set>
+                                  </p:childTnLst>
+                                </p:cTn>
+                              </p:par>
+                            </p:childTnLst>
+                          </p:cTn>
+                        </p:par>
+                      </p:childTnLst>
+                    </p:cTn>
+                  </p:par>
+                  <p:par>
+                    <p:cTn id="15" fill="hold">
+                      <p:stCondLst>
+                        <p:cond delay="indefinite"/>
+                      </p:stCondLst>
+                      <p:childTnLst>
+                        <p:par>
+                          <p:cTn id="16" fill="hold">
+                            <p:stCondLst>
+                              <p:cond delay="0"/>
+                            </p:stCondLst>
+                            <p:childTnLst>
+                              <p:par>
+                                <p:cTn id="17" presetID="1" presetClass="entr" presetSubtype="0" fill="hold" grpId="0" nodeType="clickEffect">
+                                  <p:stCondLst>
+                                    <p:cond delay="0"/>
+                                  </p:stCondLst>
+                                  <p:childTnLst>
+                                    <p:set>
+                                      <p:cBhvr>
+                                        <p:cTn id="18" dur="1" fill="hold">
+                                          <p:stCondLst>
+                                            <p:cond delay="0"/>
+                                          </p:stCondLst>
+                                        </p:cTn>
+                                        <p:tgtEl>
+                                          <p:spTgt spid="3"/>
+                                        </p:tgtEl>
+                                        <p:attrNameLst>
+                                          <p:attrName>style.visibility</p:attrName>
+                                        </p:attrNameLst>
+                                      </p:cBhvr>
+                                      <p:to>
+                                        <p:strVal val="visible"/>
+                                      </p:to>
+                                    </p:set>
+                                  </p:childTnLst>
+                                </p:cTn>
+                              </p:par>
+                            </p:childTnLst>
+                          </p:cTn>
+                        </p:par>
+                      </p:childTnLst>
+                    </p:cTn>
+                  </p:par>
+                  <p:par>
+                    <p:cTn id="19" fill="hold">
+                      <p:stCondLst>
+                        <p:cond delay="indefinite"/>
+                      </p:stCondLst>
+                      <p:childTnLst>
+                        <p:par>
+                          <p:cTn id="20" fill="hold">
+                            <p:stCondLst>
+                              <p:cond delay="0"/>
+                            </p:stCondLst>
+                            <p:childTnLst>
+                              <p:par>
+                                <p:cTn id="21" presetID="1" presetClass="entr" presetSubtype="0" fill="hold" grpId="0" nodeType="clickEffect">
+                                  <p:stCondLst>
+                                    <p:cond delay="0"/>
+                                  </p:stCondLst>
+                                  <p:childTnLst>
+                                    <p:set>
+                                      <p:cBhvr>
+                                        <p:cTn id="22" dur="1" fill="hold">
+                                          <p:stCondLst>
+                                            <p:cond delay="0"/>
+                                          </p:stCondLst>
+                                        </p:cTn>
+                                        <p:tgtEl>
+                                          <p:spTgt spid="4"/>
+                                        </p:tgtEl>
+                                        <p:attrNameLst>
+                                          <p:attrName>style.visibility</p:attrName>
+                                        </p:attrNameLst>
+                                      </p:cBhvr>
+                                      <p:to>
+                                        <p:strVal val="visible"/>
+                                      </p:to>
+                                    </p:set>
+                                  </p:childTnLst>
+                                </p:cTn>
+                              </p:par>
+                            </p:childTnLst>
+                          </p:cTn>
+                        </p:par>
+                      </p:childTnLst>
+                    </p:cTn>
+                  </p:par>
+                  <p:par>
+                    <p:cTn id="23" fill="hold">
+                      <p:stCondLst>
+                        <p:cond delay="indefinite"/>
+                      </p:stCondLst>
+                      <p:childTnLst>
+                        <p:par>
+                          <p:cTn id="24" fill="hold">
+                            <p:stCondLst>
+                              <p:cond delay="0"/>
+                            </p:stCondLst>
+                            <p:childTnLst>
+                              <p:par>
+                                <p:cTn id="25" presetID="1" presetClass="entr" presetSubtype="0" fill="hold" grpId="0" nodeType="clickEffect">
+                                  <p:stCondLst>
+                                    <p:cond delay="0"/>
+                                  </p:stCondLst>
+                                  <p:childTnLst>
+                                    <p:set>
+                                      <p:cBhvr>
+                                        <p:cTn id="26" dur="1" fill="hold">
+                                          <p:stCondLst>
+                                            <p:cond delay="0"/>
+                                          </p:stCondLst>
+                                        </p:cTn>
+                                        <p:tgtEl>
+                                          <p:spTgt spid="5"/>
+                                        </p:tgtEl>
+                                        <p:attrNameLst>
+                                          <p:attrName>style.visibility</p:attrName>
+                                        </p:attrNameLst>
+                                      </p:cBhvr>
+                                      <p:to>
+                                        <p:strVal val="visible"/>
+                                      </p:to>
+                                    </p:set>
+                                  </p:childTnLst>
+                                </p:cTn>
+                              </p:par>
+                            </p:childTnLst>
+                          </p:cTn>
+                        </p:par>
+                      </p:childTnLst>
+                    </p:cTn>
+                  </p:par>
+                  <p:par>
+                    <p:cTn id="27" fill="hold">
+                      <p:stCondLst>
+                        <p:cond delay="indefinite"/>
+                      </p:stCondLst>
+                      <p:childTnLst>
+                        <p:par>
+                          <p:cTn id="28" fill="hold">
+                            <p:stCondLst>
+                              <p:cond delay="0"/>
+                            </p:stCondLst>
+                            <p:childTnLst>
+                              <p:par>
+                                <p:cTn id="29" presetID="1" presetClass="entr" presetSubtype="0" fill="hold" grpId="0" nodeType="clickEffect">
+                                  <p:stCondLst>
+                                    <p:cond delay="0"/>
+                                  </p:stCondLst>
+                                  <p:childTnLst>
+                                    <p:set>
+                                      <p:cBhvr>
+                                        <p:cTn id="30" dur="1" fill="hold">
+                                          <p:stCondLst>
+                                            <p:cond delay="0"/>
+                                          </p:stCondLst>
+                                        </p:cTn>
+                                        <p:tgtEl>
+                                          <p:spTgt spid="8"/>
                                         </p:tgtEl>
                                         <p:attrNameLst>
                                           <p:attrName>style.visibility</p:attrName>
@@ -12327,94 +13371,13 @@
     <p:bldLst>
       <p:bldP spid="10" grpId="0"/>
       <p:bldP spid="11" grpId="0"/>
+      <p:bldP spid="2" grpId="0"/>
+      <p:bldP spid="3" grpId="0"/>
+      <p:bldP spid="4" grpId="0"/>
+      <p:bldP spid="5" grpId="0"/>
+      <p:bldP spid="8" grpId="0"/>
     </p:bldLst>
   </p:timing>
-</p:sld>
-</file>
-
-<file path=ppt/slides/slide8.xml><?xml version="1.0" encoding="utf-8"?>
-<p:sld xmlns:a="http://schemas.openxmlformats.org/drawingml/2006/main" xmlns:r="http://schemas.openxmlformats.org/officeDocument/2006/relationships" xmlns:p="http://schemas.openxmlformats.org/presentationml/2006/main">
-  <p:cSld>
-    <p:spTree>
-      <p:nvGrpSpPr>
-        <p:cNvPr id="1" name=""/>
-        <p:cNvGrpSpPr/>
-        <p:nvPr/>
-      </p:nvGrpSpPr>
-      <p:grpSpPr>
-        <a:xfrm>
-          <a:off x="0" y="0"/>
-          <a:ext cx="0" cy="0"/>
-          <a:chOff x="0" y="0"/>
-          <a:chExt cx="0" cy="0"/>
-        </a:xfrm>
-      </p:grpSpPr>
-      <p:sp>
-        <p:nvSpPr>
-          <p:cNvPr id="2" name="Text Placeholder 1"/>
-          <p:cNvSpPr>
-            <a:spLocks noGrp="1"/>
-          </p:cNvSpPr>
-          <p:nvPr>
-            <p:ph type="body" sz="quarter" idx="10"/>
-          </p:nvPr>
-        </p:nvSpPr>
-        <p:spPr/>
-        <p:txBody>
-          <a:bodyPr vert="horz" lIns="121920" tIns="60960" rIns="121920" bIns="60960" rtlCol="0" anchor="t">
-            <a:normAutofit/>
-          </a:bodyPr>
-          <a:lstStyle/>
-          <a:p>
-            <a:r>
-              <a:rPr lang="en-US" b="1" dirty="0"/>
-              <a:t>Accelerate Science Programme</a:t>
-            </a:r>
-          </a:p>
-        </p:txBody>
-      </p:sp>
-      <p:sp>
-        <p:nvSpPr>
-          <p:cNvPr id="4" name="Text Placeholder 3"/>
-          <p:cNvSpPr>
-            <a:spLocks noGrp="1"/>
-          </p:cNvSpPr>
-          <p:nvPr>
-            <p:ph type="body" sz="quarter" idx="12"/>
-          </p:nvPr>
-        </p:nvSpPr>
-        <p:spPr/>
-        <p:txBody>
-          <a:bodyPr vert="horz" lIns="121920" tIns="60960" rIns="121920" bIns="60960" rtlCol="0" anchor="t">
-            <a:normAutofit/>
-          </a:bodyPr>
-          <a:lstStyle/>
-          <a:p>
-            <a:pPr marL="0" indent="0" algn="ctr">
-              <a:buNone/>
-            </a:pPr>
-            <a:r>
-              <a:rPr lang="en-US" sz="2267" i="1">
-                <a:solidFill>
-                  <a:srgbClr val="000000"/>
-                </a:solidFill>
-              </a:rPr>
-              <a:t>"Accelerate Science pursues research at the interface of AI and the sciences, generating new scientific insights and developing AI methods that can be deployed to advance scientific knowledge."</a:t>
-            </a:r>
-            <a:endParaRPr lang="en-US" i="1"/>
-          </a:p>
-        </p:txBody>
-      </p:sp>
-    </p:spTree>
-    <p:extLst>
-      <p:ext uri="{BB962C8B-B14F-4D97-AF65-F5344CB8AC3E}">
-        <p14:creationId xmlns:p14="http://schemas.microsoft.com/office/powerpoint/2010/main" val="1582315303"/>
-      </p:ext>
-    </p:extLst>
-  </p:cSld>
-  <p:clrMapOvr>
-    <a:masterClrMapping/>
-  </p:clrMapOvr>
 </p:sld>
 </file>
 
@@ -12461,12 +13424,12 @@
       </p:sp>
       <p:sp>
         <p:nvSpPr>
-          <p:cNvPr id="3" name="Text Placeholder 2"/>
-          <p:cNvSpPr>
-            <a:spLocks noGrp="1"/>
-          </p:cNvSpPr>
-          <p:nvPr>
-            <p:ph type="body" sz="quarter" idx="11"/>
+          <p:cNvPr id="4" name="Text Placeholder 3"/>
+          <p:cNvSpPr>
+            <a:spLocks noGrp="1"/>
+          </p:cNvSpPr>
+          <p:nvPr>
+            <p:ph type="body" sz="quarter" idx="12"/>
           </p:nvPr>
         </p:nvSpPr>
         <p:spPr/>
@@ -12476,100 +13439,25 @@
           </a:bodyPr>
           <a:lstStyle/>
           <a:p>
-            <a:r>
-              <a:rPr lang="en-US" dirty="0"/>
-              <a:t>Workshop Goals</a:t>
-            </a:r>
-          </a:p>
-        </p:txBody>
-      </p:sp>
-      <p:sp>
-        <p:nvSpPr>
-          <p:cNvPr id="4" name="Text Placeholder 3"/>
-          <p:cNvSpPr>
-            <a:spLocks noGrp="1"/>
-          </p:cNvSpPr>
-          <p:nvPr>
-            <p:ph type="body" sz="quarter" idx="12"/>
-          </p:nvPr>
-        </p:nvSpPr>
-        <p:spPr/>
-        <p:txBody>
-          <a:bodyPr vert="horz" lIns="121920" tIns="60960" rIns="121920" bIns="60960" rtlCol="0" anchor="t">
-            <a:normAutofit/>
-          </a:bodyPr>
-          <a:lstStyle/>
-          <a:p>
-            <a:pPr marL="0" indent="0">
+            <a:pPr marL="0" indent="0" algn="ctr">
               <a:buNone/>
             </a:pPr>
             <a:r>
-              <a:rPr lang="en-US" dirty="0"/>
-              <a:t>We want to:</a:t>
-            </a:r>
-          </a:p>
-          <a:p>
-            <a:r>
-              <a:rPr lang="en-US" dirty="0"/>
-              <a:t>Support</a:t>
-            </a:r>
-            <a:r>
-              <a:rPr lang="en-US" dirty="0">
+              <a:rPr lang="en-US" sz="2267" i="1">
                 <a:solidFill>
-                  <a:srgbClr val="404040"/>
+                  <a:srgbClr val="000000"/>
                 </a:solidFill>
               </a:rPr>
-              <a:t> researchers across the university to use software in their work when required.</a:t>
-            </a:r>
-          </a:p>
-          <a:p>
-            <a:r>
-              <a:rPr lang="en-US" dirty="0">
-                <a:solidFill>
-                  <a:srgbClr val="404040"/>
-                </a:solidFill>
-              </a:rPr>
-              <a:t>Make best practices a core part of research</a:t>
-            </a:r>
-            <a:endParaRPr lang="en-US" dirty="0"/>
-          </a:p>
-          <a:p>
-            <a:r>
-              <a:rPr lang="en-US" dirty="0"/>
-              <a:t>Better understand the challenges that researchers face.</a:t>
-            </a:r>
-          </a:p>
-          <a:p>
-            <a:r>
-              <a:rPr lang="en-US" dirty="0"/>
-              <a:t>Identify what training courses or software resources we might want the Accelerate Science Programme to create.</a:t>
-            </a:r>
-          </a:p>
-          <a:p>
-            <a:pPr lvl="1"/>
-            <a:r>
-              <a:rPr lang="en-US" dirty="0">
-                <a:solidFill>
-                  <a:srgbClr val="404040"/>
-                </a:solidFill>
-                <a:latin typeface="Aptos" panose="020B0004020202020204" pitchFamily="34" charset="0"/>
-                <a:cs typeface="Helvetica"/>
-              </a:rPr>
-              <a:t>Including shared code</a:t>
-            </a:r>
-          </a:p>
-          <a:p>
-            <a:r>
-              <a:rPr lang="en-US" dirty="0"/>
-              <a:t>Start to build a community of like-minded researchers across the university.</a:t>
-            </a:r>
+              <a:t>"Accelerate Science pursues research at the interface of AI and the sciences, generating new scientific insights and developing AI methods that can be deployed to advance scientific knowledge."</a:t>
+            </a:r>
+            <a:endParaRPr lang="en-US" i="1"/>
           </a:p>
         </p:txBody>
       </p:sp>
     </p:spTree>
     <p:extLst>
       <p:ext uri="{BB962C8B-B14F-4D97-AF65-F5344CB8AC3E}">
-        <p14:creationId xmlns:p14="http://schemas.microsoft.com/office/powerpoint/2010/main" val="1533927788"/>
+        <p14:creationId xmlns:p14="http://schemas.microsoft.com/office/powerpoint/2010/main" val="1582315303"/>
       </p:ext>
     </p:extLst>
   </p:cSld>

--- a/packaging-publishing/Slides/1_introduction.pptx
+++ b/packaging-publishing/Slides/1_introduction.pptx
@@ -5,7 +5,7 @@
     <p:sldMasterId id="2147483648" r:id="rId1"/>
   </p:sldMasterIdLst>
   <p:notesMasterIdLst>
-    <p:notesMasterId r:id="rId21"/>
+    <p:notesMasterId r:id="rId22"/>
   </p:notesMasterIdLst>
   <p:sldIdLst>
     <p:sldId id="332" r:id="rId2"/>
@@ -20,13 +20,14 @@
     <p:sldId id="286" r:id="rId11"/>
     <p:sldId id="272" r:id="rId12"/>
     <p:sldId id="287" r:id="rId13"/>
-    <p:sldId id="279" r:id="rId14"/>
-    <p:sldId id="311" r:id="rId15"/>
-    <p:sldId id="310" r:id="rId16"/>
-    <p:sldId id="281" r:id="rId17"/>
-    <p:sldId id="283" r:id="rId18"/>
-    <p:sldId id="331" r:id="rId19"/>
-    <p:sldId id="309" r:id="rId20"/>
+    <p:sldId id="334" r:id="rId14"/>
+    <p:sldId id="279" r:id="rId15"/>
+    <p:sldId id="311" r:id="rId16"/>
+    <p:sldId id="310" r:id="rId17"/>
+    <p:sldId id="281" r:id="rId18"/>
+    <p:sldId id="283" r:id="rId19"/>
+    <p:sldId id="331" r:id="rId20"/>
+    <p:sldId id="309" r:id="rId21"/>
   </p:sldIdLst>
   <p:sldSz cx="12192000" cy="6858000"/>
   <p:notesSz cx="6858000" cy="9144000"/>
@@ -136,7 +137,7 @@
 <file path=ppt/revisionInfo.xml><?xml version="1.0" encoding="utf-8"?>
 <p1510:revInfo xmlns:a="http://schemas.openxmlformats.org/drawingml/2006/main" xmlns:r="http://schemas.openxmlformats.org/officeDocument/2006/relationships" xmlns:p1510="http://schemas.microsoft.com/office/powerpoint/2015/10/main">
   <p1510:revLst>
-    <p1510:client id="{2CFFC52A-BBB0-F141-B129-6B7D7C4A34BA}" v="160" dt="2026-03-10T09:43:27.016"/>
+    <p1510:client id="{2CFFC52A-BBB0-F141-B129-6B7D7C4A34BA}" v="166" dt="2026-03-10T20:36:15.259"/>
   </p1510:revLst>
 </p1510:revInfo>
 </file>
@@ -145,8 +146,8 @@
 <pc:chgInfo xmlns:a="http://schemas.openxmlformats.org/drawingml/2006/main" xmlns:r="http://schemas.openxmlformats.org/officeDocument/2006/relationships" xmlns:ac="http://schemas.microsoft.com/office/drawing/2013/main/command" xmlns:pc="http://schemas.microsoft.com/office/powerpoint/2013/main/command">
   <pc:docChgLst>
     <pc:chgData name="Finley Griffin" userId="22b0b6c4-ce40-4dd6-a0c2-f0f65dd91442" providerId="ADAL" clId="{E340F9FE-63CF-5DC1-BB85-0501F5A6B451}"/>
-    <pc:docChg chg="undo custSel addSld modSld">
-      <pc:chgData name="Finley Griffin" userId="22b0b6c4-ce40-4dd6-a0c2-f0f65dd91442" providerId="ADAL" clId="{E340F9FE-63CF-5DC1-BB85-0501F5A6B451}" dt="2026-03-10T09:43:38.256" v="2594" actId="1076"/>
+    <pc:docChg chg="undo custSel addSld delSld modSld">
+      <pc:chgData name="Finley Griffin" userId="22b0b6c4-ce40-4dd6-a0c2-f0f65dd91442" providerId="ADAL" clId="{E340F9FE-63CF-5DC1-BB85-0501F5A6B451}" dt="2026-03-10T20:41:57.367" v="4020" actId="20577"/>
       <pc:docMkLst>
         <pc:docMk/>
       </pc:docMkLst>
@@ -157,12 +158,20 @@
           <pc:sldMk cId="385288236" sldId="272"/>
         </pc:sldMkLst>
       </pc:sldChg>
-      <pc:sldChg chg="modNotesTx">
-        <pc:chgData name="Finley Griffin" userId="22b0b6c4-ce40-4dd6-a0c2-f0f65dd91442" providerId="ADAL" clId="{E340F9FE-63CF-5DC1-BB85-0501F5A6B451}" dt="2026-03-05T13:28:04.271" v="1647" actId="20577"/>
+      <pc:sldChg chg="addSp modSp mod modNotesTx">
+        <pc:chgData name="Finley Griffin" userId="22b0b6c4-ce40-4dd6-a0c2-f0f65dd91442" providerId="ADAL" clId="{E340F9FE-63CF-5DC1-BB85-0501F5A6B451}" dt="2026-03-10T20:27:29.252" v="2609" actId="1076"/>
         <pc:sldMkLst>
           <pc:docMk/>
           <pc:sldMk cId="1582315303" sldId="278"/>
         </pc:sldMkLst>
+        <pc:picChg chg="add mod">
+          <ac:chgData name="Finley Griffin" userId="22b0b6c4-ce40-4dd6-a0c2-f0f65dd91442" providerId="ADAL" clId="{E340F9FE-63CF-5DC1-BB85-0501F5A6B451}" dt="2026-03-10T20:27:29.252" v="2609" actId="1076"/>
+          <ac:picMkLst>
+            <pc:docMk/>
+            <pc:sldMk cId="1582315303" sldId="278"/>
+            <ac:picMk id="3" creationId="{D2011DA7-22A1-64AB-4EDF-B582B3F81D4B}"/>
+          </ac:picMkLst>
+        </pc:picChg>
       </pc:sldChg>
       <pc:sldChg chg="modNotesTx">
         <pc:chgData name="Finley Griffin" userId="22b0b6c4-ce40-4dd6-a0c2-f0f65dd91442" providerId="ADAL" clId="{E340F9FE-63CF-5DC1-BB85-0501F5A6B451}" dt="2026-03-05T13:35:15.009" v="2048" actId="20577"/>
@@ -200,10 +209,17 @@
         </pc:sldMkLst>
       </pc:sldChg>
       <pc:sldChg chg="modNotesTx">
-        <pc:chgData name="Finley Griffin" userId="22b0b6c4-ce40-4dd6-a0c2-f0f65dd91442" providerId="ADAL" clId="{E340F9FE-63CF-5DC1-BB85-0501F5A6B451}" dt="2026-03-05T13:15:21.723" v="1298" actId="20577"/>
+        <pc:chgData name="Finley Griffin" userId="22b0b6c4-ce40-4dd6-a0c2-f0f65dd91442" providerId="ADAL" clId="{E340F9FE-63CF-5DC1-BB85-0501F5A6B451}" dt="2026-03-10T10:38:33.486" v="2597" actId="20577"/>
         <pc:sldMkLst>
           <pc:docMk/>
           <pc:sldMk cId="2117379087" sldId="313"/>
+        </pc:sldMkLst>
+      </pc:sldChg>
+      <pc:sldChg chg="modNotesTx">
+        <pc:chgData name="Finley Griffin" userId="22b0b6c4-ce40-4dd6-a0c2-f0f65dd91442" providerId="ADAL" clId="{E340F9FE-63CF-5DC1-BB85-0501F5A6B451}" dt="2026-03-10T10:38:40.035" v="2601" actId="20577"/>
+        <pc:sldMkLst>
+          <pc:docMk/>
+          <pc:sldMk cId="1822460468" sldId="314"/>
         </pc:sldMkLst>
       </pc:sldChg>
       <pc:sldChg chg="modNotesTx">
@@ -290,12 +306,28 @@
           </ac:picMkLst>
         </pc:picChg>
       </pc:sldChg>
-      <pc:sldChg chg="modNotesTx">
-        <pc:chgData name="Finley Griffin" userId="22b0b6c4-ce40-4dd6-a0c2-f0f65dd91442" providerId="ADAL" clId="{E340F9FE-63CF-5DC1-BB85-0501F5A6B451}" dt="2026-03-05T13:43:01.278" v="2146" actId="20577"/>
+      <pc:sldChg chg="modSp mod modNotesTx">
+        <pc:chgData name="Finley Griffin" userId="22b0b6c4-ce40-4dd6-a0c2-f0f65dd91442" providerId="ADAL" clId="{E340F9FE-63CF-5DC1-BB85-0501F5A6B451}" dt="2026-03-10T20:29:32.335" v="2799" actId="20577"/>
         <pc:sldMkLst>
           <pc:docMk/>
           <pc:sldMk cId="3396929114" sldId="331"/>
         </pc:sldMkLst>
+        <pc:spChg chg="mod">
+          <ac:chgData name="Finley Griffin" userId="22b0b6c4-ce40-4dd6-a0c2-f0f65dd91442" providerId="ADAL" clId="{E340F9FE-63CF-5DC1-BB85-0501F5A6B451}" dt="2026-03-10T20:29:03.308" v="2727" actId="20577"/>
+          <ac:spMkLst>
+            <pc:docMk/>
+            <pc:sldMk cId="3396929114" sldId="331"/>
+            <ac:spMk id="3" creationId="{C211C692-5C86-187E-EF20-61E53B60463F}"/>
+          </ac:spMkLst>
+        </pc:spChg>
+        <pc:spChg chg="mod">
+          <ac:chgData name="Finley Griffin" userId="22b0b6c4-ce40-4dd6-a0c2-f0f65dd91442" providerId="ADAL" clId="{E340F9FE-63CF-5DC1-BB85-0501F5A6B451}" dt="2026-03-10T20:29:32.335" v="2799" actId="20577"/>
+          <ac:spMkLst>
+            <pc:docMk/>
+            <pc:sldMk cId="3396929114" sldId="331"/>
+            <ac:spMk id="4" creationId="{1CFD4A1A-43D4-DA34-F4EE-5A302A3A8BBC}"/>
+          </ac:spMkLst>
+        </pc:spChg>
       </pc:sldChg>
       <pc:sldChg chg="modSp mod modNotesTx">
         <pc:chgData name="Finley Griffin" userId="22b0b6c4-ce40-4dd6-a0c2-f0f65dd91442" providerId="ADAL" clId="{E340F9FE-63CF-5DC1-BB85-0501F5A6B451}" dt="2026-03-10T09:41:31.020" v="2364" actId="20577"/>
@@ -350,6 +382,66 @@
             <ac:picMk id="5" creationId="{87871792-B3FC-815F-FFEE-2E61E7225FE3}"/>
           </ac:picMkLst>
         </pc:picChg>
+      </pc:sldChg>
+      <pc:sldChg chg="new del">
+        <pc:chgData name="Finley Griffin" userId="22b0b6c4-ce40-4dd6-a0c2-f0f65dd91442" providerId="ADAL" clId="{E340F9FE-63CF-5DC1-BB85-0501F5A6B451}" dt="2026-03-10T20:34:02.021" v="2801" actId="2696"/>
+        <pc:sldMkLst>
+          <pc:docMk/>
+          <pc:sldMk cId="1102471387" sldId="334"/>
+        </pc:sldMkLst>
+      </pc:sldChg>
+      <pc:sldChg chg="addSp delSp modSp new mod">
+        <pc:chgData name="Finley Griffin" userId="22b0b6c4-ce40-4dd6-a0c2-f0f65dd91442" providerId="ADAL" clId="{E340F9FE-63CF-5DC1-BB85-0501F5A6B451}" dt="2026-03-10T20:41:57.367" v="4020" actId="20577"/>
+        <pc:sldMkLst>
+          <pc:docMk/>
+          <pc:sldMk cId="3144730863" sldId="334"/>
+        </pc:sldMkLst>
+        <pc:spChg chg="mod">
+          <ac:chgData name="Finley Griffin" userId="22b0b6c4-ce40-4dd6-a0c2-f0f65dd91442" providerId="ADAL" clId="{E340F9FE-63CF-5DC1-BB85-0501F5A6B451}" dt="2026-03-10T20:35:53.187" v="2845" actId="20577"/>
+          <ac:spMkLst>
+            <pc:docMk/>
+            <pc:sldMk cId="3144730863" sldId="334"/>
+            <ac:spMk id="2" creationId="{689D1987-09AD-2DED-83D4-877DB38B91EC}"/>
+          </ac:spMkLst>
+        </pc:spChg>
+        <pc:spChg chg="del">
+          <ac:chgData name="Finley Griffin" userId="22b0b6c4-ce40-4dd6-a0c2-f0f65dd91442" providerId="ADAL" clId="{E340F9FE-63CF-5DC1-BB85-0501F5A6B451}" dt="2026-03-10T20:36:22.082" v="2850" actId="478"/>
+          <ac:spMkLst>
+            <pc:docMk/>
+            <pc:sldMk cId="3144730863" sldId="334"/>
+            <ac:spMk id="3" creationId="{DA2FADC3-D0D2-1769-14FB-3DA771913E51}"/>
+          </ac:spMkLst>
+        </pc:spChg>
+        <pc:spChg chg="add del mod">
+          <ac:chgData name="Finley Griffin" userId="22b0b6c4-ce40-4dd6-a0c2-f0f65dd91442" providerId="ADAL" clId="{E340F9FE-63CF-5DC1-BB85-0501F5A6B451}" dt="2026-03-10T20:41:57.367" v="4020" actId="20577"/>
+          <ac:spMkLst>
+            <pc:docMk/>
+            <pc:sldMk cId="3144730863" sldId="334"/>
+            <ac:spMk id="4" creationId="{7FCF7B5F-2B54-7260-D77D-E80881452997}"/>
+          </ac:spMkLst>
+        </pc:spChg>
+        <pc:spChg chg="add mod">
+          <ac:chgData name="Finley Griffin" userId="22b0b6c4-ce40-4dd6-a0c2-f0f65dd91442" providerId="ADAL" clId="{E340F9FE-63CF-5DC1-BB85-0501F5A6B451}" dt="2026-03-10T20:36:15.259" v="2849"/>
+          <ac:spMkLst>
+            <pc:docMk/>
+            <pc:sldMk cId="3144730863" sldId="334"/>
+            <ac:spMk id="5" creationId="{DF887E61-E8EE-85F1-9488-CF0022F08422}"/>
+          </ac:spMkLst>
+        </pc:spChg>
+      </pc:sldChg>
+      <pc:sldChg chg="add del">
+        <pc:chgData name="Finley Griffin" userId="22b0b6c4-ce40-4dd6-a0c2-f0f65dd91442" providerId="ADAL" clId="{E340F9FE-63CF-5DC1-BB85-0501F5A6B451}" dt="2026-03-10T20:35:55.680" v="2847" actId="2696"/>
+        <pc:sldMkLst>
+          <pc:docMk/>
+          <pc:sldMk cId="1329106886" sldId="335"/>
+        </pc:sldMkLst>
+      </pc:sldChg>
+      <pc:sldChg chg="add del">
+        <pc:chgData name="Finley Griffin" userId="22b0b6c4-ce40-4dd6-a0c2-f0f65dd91442" providerId="ADAL" clId="{E340F9FE-63CF-5DC1-BB85-0501F5A6B451}" dt="2026-03-10T20:34:53.993" v="2804" actId="2696"/>
+        <pc:sldMkLst>
+          <pc:docMk/>
+          <pc:sldMk cId="2512612668" sldId="335"/>
+        </pc:sldMkLst>
       </pc:sldChg>
     </pc:docChg>
   </pc:docChgLst>
@@ -856,18 +948,18 @@
           <a:lstStyle/>
           <a:p>
             <a:r>
-              <a:rPr lang="en-GB" dirty="0"/>
-              <a:t>We provide material that people can work through in their own time, but also in the context of a full day workshop event, with instructors there to help.</a:t>
-            </a:r>
-          </a:p>
-          <a:p>
-            <a:endParaRPr lang="en-GB" dirty="0"/>
+              <a:rPr lang="en-US" dirty="0"/>
+              <a:t>We are ultimately here to facilitate this process of integrating AI into research.</a:t>
+            </a:r>
           </a:p>
           <a:p>
             <a:endParaRPr lang="en-US" dirty="0"/>
           </a:p>
           <a:p>
-            <a:endParaRPr lang="en-US" dirty="0"/>
+            <a:r>
+              <a:rPr lang="en-US" dirty="0"/>
+              <a:t>We run a couple of workshops at the moment: an introduction to large language models, a hands on LLMs, an intro to generative AI with diffusion models, docker, a packaging and publishing workshop, and now a new agents 4 science workshop</a:t>
+            </a:r>
           </a:p>
         </p:txBody>
       </p:sp>
@@ -888,7 +980,7 @@
           <a:p>
             <a:fld id="{6184AF57-4BD4-7D48-A093-6530DDD8C062}" type="slidenum">
               <a:rPr lang="en-US" smtClean="0"/>
-              <a:t>11</a:t>
+              <a:t>10</a:t>
             </a:fld>
             <a:endParaRPr lang="en-US"/>
           </a:p>
@@ -897,7 +989,7 @@
     </p:spTree>
     <p:extLst>
       <p:ext uri="{BB962C8B-B14F-4D97-AF65-F5344CB8AC3E}">
-        <p14:creationId xmlns:p14="http://schemas.microsoft.com/office/powerpoint/2010/main" val="2144170110"/>
+        <p14:creationId xmlns:p14="http://schemas.microsoft.com/office/powerpoint/2010/main" val="2429773271"/>
       </p:ext>
     </p:extLst>
   </p:cSld>
@@ -952,151 +1044,18 @@
           <a:lstStyle/>
           <a:p>
             <a:r>
-              <a:rPr lang="en-US" dirty="0"/>
-              <a:t>So first I just want to measure the temperature of the room:</a:t>
-            </a:r>
+              <a:rPr lang="en-GB" dirty="0"/>
+              <a:t>We provide material that people can work through in their own time, but also in the context of a full day workshop event, with instructors there to help.</a:t>
+            </a:r>
+          </a:p>
+          <a:p>
+            <a:endParaRPr lang="en-GB" dirty="0"/>
           </a:p>
           <a:p>
             <a:endParaRPr lang="en-US" dirty="0"/>
           </a:p>
           <a:p>
-            <a:r>
-              <a:rPr lang="en-US" dirty="0"/>
-              <a:t>How many of you have a beginner or above level of experience with version control? And by above beginner, I mean, you can initialize your own git repos locally, you can commit, you can push, you can start new </a:t>
-            </a:r>
-            <a:r>
-              <a:rPr lang="en-US" dirty="0" err="1"/>
-              <a:t>github</a:t>
-            </a:r>
-            <a:r>
-              <a:rPr lang="en-US" dirty="0"/>
-              <a:t> repos.</a:t>
-            </a:r>
-          </a:p>
-          <a:p>
             <a:endParaRPr lang="en-US" dirty="0"/>
-          </a:p>
-          <a:p>
-            <a:r>
-              <a:rPr lang="en-US" dirty="0"/>
-              <a:t>OK and intermediate and above: you can handle working on multiple branches, submit and merge pull requests, familiar with things like .</a:t>
-            </a:r>
-            <a:r>
-              <a:rPr lang="en-US" dirty="0" err="1"/>
-              <a:t>gitignore</a:t>
-            </a:r>
-            <a:r>
-              <a:rPr lang="en-US" dirty="0"/>
-              <a:t>, licensing.</a:t>
-            </a:r>
-          </a:p>
-          <a:p>
-            <a:endParaRPr lang="en-US" dirty="0"/>
-          </a:p>
-          <a:p>
-            <a:r>
-              <a:rPr lang="en-US" dirty="0"/>
-              <a:t>OK, and advanced: familiar with </a:t>
-            </a:r>
-            <a:r>
-              <a:rPr lang="en-US" dirty="0" err="1"/>
-              <a:t>github</a:t>
-            </a:r>
-            <a:r>
-              <a:rPr lang="en-US" dirty="0"/>
-              <a:t> actions, </a:t>
-            </a:r>
-            <a:r>
-              <a:rPr lang="en-US" dirty="0" err="1"/>
-              <a:t>precommit</a:t>
-            </a:r>
-            <a:r>
-              <a:rPr lang="en-US" dirty="0"/>
-              <a:t> checks, continuous development and integration.</a:t>
-            </a:r>
-          </a:p>
-          <a:p>
-            <a:endParaRPr lang="en-US" dirty="0"/>
-          </a:p>
-          <a:p>
-            <a:r>
-              <a:rPr lang="en-US" dirty="0"/>
-              <a:t>And who has published python code to either </a:t>
-            </a:r>
-            <a:r>
-              <a:rPr lang="en-US" dirty="0" err="1"/>
-              <a:t>github</a:t>
-            </a:r>
-            <a:r>
-              <a:rPr lang="en-US" dirty="0"/>
-              <a:t> releases or to </a:t>
-            </a:r>
-            <a:r>
-              <a:rPr lang="en-US" dirty="0" err="1"/>
-              <a:t>PyPi</a:t>
-            </a:r>
-            <a:r>
-              <a:rPr lang="en-US" dirty="0"/>
-              <a:t>?</a:t>
-            </a:r>
-          </a:p>
-          <a:p>
-            <a:endParaRPr lang="en-US" dirty="0"/>
-          </a:p>
-          <a:p>
-            <a:r>
-              <a:rPr lang="en-US" dirty="0"/>
-              <a:t>Who primarily works with </a:t>
-            </a:r>
-            <a:r>
-              <a:rPr lang="en-US" dirty="0" err="1"/>
-              <a:t>Jupyter</a:t>
-            </a:r>
-            <a:r>
-              <a:rPr lang="en-US" dirty="0"/>
-              <a:t> notebooks? </a:t>
-            </a:r>
-            <a:r>
-              <a:rPr lang="en-US" dirty="0" err="1"/>
-              <a:t>VSCode</a:t>
-            </a:r>
-            <a:r>
-              <a:rPr lang="en-US" dirty="0"/>
-              <a:t>? PyCharm? Cursor? Vim?</a:t>
-            </a:r>
-          </a:p>
-          <a:p>
-            <a:endParaRPr lang="en-US" dirty="0"/>
-          </a:p>
-          <a:p>
-            <a:r>
-              <a:rPr lang="en-US" dirty="0"/>
-              <a:t>We're </a:t>
-            </a:r>
-            <a:r>
-              <a:rPr lang="en-US" dirty="0" err="1"/>
-              <a:t>gonna</a:t>
-            </a:r>
-            <a:r>
-              <a:rPr lang="en-US" dirty="0"/>
-              <a:t> be using </a:t>
-            </a:r>
-            <a:r>
-              <a:rPr lang="en-US" dirty="0" err="1"/>
-              <a:t>VSCode</a:t>
-            </a:r>
-            <a:r>
-              <a:rPr lang="en-US" dirty="0"/>
-              <a:t> / </a:t>
-            </a:r>
-            <a:r>
-              <a:rPr lang="en-US" dirty="0" err="1"/>
-              <a:t>JupyterLab</a:t>
-            </a:r>
-            <a:r>
-              <a:rPr lang="en-US" dirty="0"/>
-              <a:t> today on our teaching platform</a:t>
-            </a:r>
           </a:p>
         </p:txBody>
       </p:sp>
@@ -1115,9 +1074,9 @@
           <a:bodyPr/>
           <a:lstStyle/>
           <a:p>
-            <a:fld id="{405232F6-B76B-E748-9DF9-431B1E2F1F8C}" type="slidenum">
+            <a:fld id="{6184AF57-4BD4-7D48-A093-6530DDD8C062}" type="slidenum">
               <a:rPr lang="en-US" smtClean="0"/>
-              <a:t>12</a:t>
+              <a:t>11</a:t>
             </a:fld>
             <a:endParaRPr lang="en-US"/>
           </a:p>
@@ -1126,7 +1085,7 @@
     </p:spTree>
     <p:extLst>
       <p:ext uri="{BB962C8B-B14F-4D97-AF65-F5344CB8AC3E}">
-        <p14:creationId xmlns:p14="http://schemas.microsoft.com/office/powerpoint/2010/main" val="2896587380"/>
+        <p14:creationId xmlns:p14="http://schemas.microsoft.com/office/powerpoint/2010/main" val="2144170110"/>
       </p:ext>
     </p:extLst>
   </p:cSld>
@@ -1182,7 +1141,7 @@
           <a:p>
             <a:r>
               <a:rPr lang="en-US" dirty="0"/>
-              <a:t>Hopefully, if you’re here, then you aren’t wondering why this is even important! But in case you are wondering….</a:t>
+              <a:t>So first I just want to measure the temperature of the room:</a:t>
             </a:r>
           </a:p>
           <a:p>
@@ -1191,7 +1150,15 @@
           <a:p>
             <a:r>
               <a:rPr lang="en-US" dirty="0"/>
-              <a:t>Here are the UNESCO guidelines on responsible use of AI, but they can just as easily apply to any software.</a:t>
+              <a:t>How many of you have a beginner or above level of experience with version control? And by above beginner, I mean, you can initialize your own git repos locally, you can commit, you can push, you can start new </a:t>
+            </a:r>
+            <a:r>
+              <a:rPr lang="en-US" dirty="0" err="1"/>
+              <a:t>github</a:t>
+            </a:r>
+            <a:r>
+              <a:rPr lang="en-US" dirty="0"/>
+              <a:t> repos.</a:t>
             </a:r>
           </a:p>
           <a:p>
@@ -1200,144 +1167,124 @@
           <a:p>
             <a:r>
               <a:rPr lang="en-US" dirty="0"/>
-              <a:t>Recommend weapons of math destruction by Cathy O'Neil</a:t>
+              <a:t>OK and intermediate and above: you can handle working on multiple branches, submit and merge pull requests, familiar with things like .</a:t>
+            </a:r>
+            <a:r>
+              <a:rPr lang="en-US" dirty="0" err="1"/>
+              <a:t>gitignore</a:t>
+            </a:r>
+            <a:r>
+              <a:rPr lang="en-US" dirty="0"/>
+              <a:t>, licensing.</a:t>
             </a:r>
           </a:p>
           <a:p>
             <a:endParaRPr lang="en-US" dirty="0"/>
           </a:p>
           <a:p>
-            <a:pPr marL="0" indent="0">
-              <a:buFontTx/>
-              <a:buNone/>
-            </a:pPr>
-            <a:r>
-              <a:rPr lang="en-US" dirty="0"/>
-              <a:t>How do we make software systems auditable and traceable?</a:t>
-            </a:r>
-          </a:p>
-          <a:p>
-            <a:pPr marL="0" indent="0">
-              <a:buFontTx/>
-              <a:buNone/>
-            </a:pPr>
+            <a:r>
+              <a:rPr lang="en-US" dirty="0"/>
+              <a:t>OK, and advanced: familiar with </a:t>
+            </a:r>
+            <a:r>
+              <a:rPr lang="en-US" dirty="0" err="1"/>
+              <a:t>github</a:t>
+            </a:r>
+            <a:r>
+              <a:rPr lang="en-US" dirty="0"/>
+              <a:t> actions, </a:t>
+            </a:r>
+            <a:r>
+              <a:rPr lang="en-US" dirty="0" err="1"/>
+              <a:t>precommit</a:t>
+            </a:r>
+            <a:r>
+              <a:rPr lang="en-US" dirty="0"/>
+              <a:t> checks, continuous development and integration.</a:t>
+            </a:r>
+          </a:p>
+          <a:p>
             <a:endParaRPr lang="en-US" dirty="0"/>
           </a:p>
           <a:p>
-            <a:pPr marL="0" indent="0">
-              <a:buFontTx/>
-              <a:buNone/>
-            </a:pPr>
-            <a:r>
-              <a:rPr lang="en-US" dirty="0"/>
-              <a:t>How can we monitor security vulnerabilities? </a:t>
-            </a:r>
-          </a:p>
-          <a:p>
-            <a:pPr marL="0" indent="0">
-              <a:buFontTx/>
-              <a:buNone/>
-            </a:pPr>
+            <a:r>
+              <a:rPr lang="en-US" dirty="0"/>
+              <a:t>And who has published python code to either </a:t>
+            </a:r>
+            <a:r>
+              <a:rPr lang="en-US" dirty="0" err="1"/>
+              <a:t>github</a:t>
+            </a:r>
+            <a:r>
+              <a:rPr lang="en-US" dirty="0"/>
+              <a:t> releases or to </a:t>
+            </a:r>
+            <a:r>
+              <a:rPr lang="en-US" dirty="0" err="1"/>
+              <a:t>PyPi</a:t>
+            </a:r>
+            <a:r>
+              <a:rPr lang="en-US" dirty="0"/>
+              <a:t>?</a:t>
+            </a:r>
+          </a:p>
+          <a:p>
             <a:endParaRPr lang="en-US" dirty="0"/>
           </a:p>
           <a:p>
-            <a:pPr marL="0" indent="0">
-              <a:buFontTx/>
-              <a:buNone/>
-            </a:pPr>
-            <a:r>
-              <a:rPr lang="en-US" dirty="0"/>
-              <a:t>How can we be transparent and make sure our systems are explainable and interpretable? </a:t>
-            </a:r>
-          </a:p>
-          <a:p>
-            <a:pPr marL="0" indent="0">
-              <a:buFontTx/>
-              <a:buNone/>
-            </a:pPr>
+            <a:r>
+              <a:rPr lang="en-US" dirty="0"/>
+              <a:t>Who primarily works with </a:t>
+            </a:r>
+            <a:r>
+              <a:rPr lang="en-US" dirty="0" err="1"/>
+              <a:t>Jupyter</a:t>
+            </a:r>
+            <a:r>
+              <a:rPr lang="en-US" dirty="0"/>
+              <a:t> notebooks? </a:t>
+            </a:r>
+            <a:r>
+              <a:rPr lang="en-US" dirty="0" err="1"/>
+              <a:t>VSCode</a:t>
+            </a:r>
+            <a:r>
+              <a:rPr lang="en-US" dirty="0"/>
+              <a:t>? PyCharm? Cursor? Vim?</a:t>
+            </a:r>
+          </a:p>
+          <a:p>
             <a:endParaRPr lang="en-US" dirty="0"/>
           </a:p>
           <a:p>
-            <a:pPr marL="0" indent="0">
-              <a:buFontTx/>
-              <a:buNone/>
-            </a:pPr>
-            <a:r>
-              <a:rPr lang="en-US" dirty="0"/>
-              <a:t>How can we ensure privacy.</a:t>
-            </a:r>
-          </a:p>
-          <a:p>
-            <a:pPr marL="0" indent="0">
-              <a:buFontTx/>
-              <a:buNone/>
-            </a:pPr>
-            <a:endParaRPr lang="en-US" dirty="0"/>
-          </a:p>
-          <a:p>
-            <a:pPr marL="0" indent="0">
-              <a:buFontTx/>
-              <a:buNone/>
-            </a:pPr>
-            <a:r>
-              <a:rPr lang="en-US" dirty="0"/>
-              <a:t>Actually, the answers to some of these questions lies in proper software engineering practices.</a:t>
-            </a:r>
-          </a:p>
-          <a:p>
-            <a:pPr marL="171450" indent="-171450">
-              <a:buFontTx/>
-              <a:buChar char="-"/>
-            </a:pPr>
-            <a:r>
-              <a:rPr lang="en-US" dirty="0"/>
-              <a:t>We can make our code open source.</a:t>
-            </a:r>
-          </a:p>
-          <a:p>
-            <a:pPr marL="171450" indent="-171450">
-              <a:buFontTx/>
-              <a:buChar char="-"/>
-            </a:pPr>
-            <a:r>
-              <a:rPr lang="en-US" dirty="0"/>
-              <a:t>We can use version control, so all changes made by contributors can be tracked.</a:t>
-            </a:r>
-          </a:p>
-          <a:p>
-            <a:pPr marL="171450" indent="-171450">
-              <a:buFontTx/>
-              <a:buChar char="-"/>
-            </a:pPr>
-            <a:r>
-              <a:rPr lang="en-US" dirty="0"/>
-              <a:t>We can keep up to date with vulnerabilities via </a:t>
+            <a:r>
+              <a:rPr lang="en-US" dirty="0"/>
+              <a:t>We're </a:t>
             </a:r>
             <a:r>
               <a:rPr lang="en-US" dirty="0" err="1"/>
-              <a:t>Github</a:t>
-            </a:r>
-            <a:r>
-              <a:rPr lang="en-US" dirty="0"/>
-              <a:t>.</a:t>
-            </a:r>
-          </a:p>
-          <a:p>
-            <a:pPr marL="171450" indent="-171450">
-              <a:buFontTx/>
-              <a:buChar char="-"/>
-            </a:pPr>
-            <a:r>
-              <a:rPr lang="en-US" dirty="0"/>
-              <a:t>We can be aware of any third-party software, and what they are doing..</a:t>
-            </a:r>
-          </a:p>
-          <a:p>
-            <a:pPr marL="171450" indent="-171450">
-              <a:buFontTx/>
-              <a:buChar char="-"/>
-            </a:pPr>
-            <a:endParaRPr lang="en-US" dirty="0"/>
+              <a:t>gonna</a:t>
+            </a:r>
+            <a:r>
+              <a:rPr lang="en-US" dirty="0"/>
+              <a:t> be using </a:t>
+            </a:r>
+            <a:r>
+              <a:rPr lang="en-US" dirty="0" err="1"/>
+              <a:t>VSCode</a:t>
+            </a:r>
+            <a:r>
+              <a:rPr lang="en-US" dirty="0"/>
+              <a:t> / </a:t>
+            </a:r>
+            <a:r>
+              <a:rPr lang="en-US" dirty="0" err="1"/>
+              <a:t>JupyterLab</a:t>
+            </a:r>
+            <a:r>
+              <a:rPr lang="en-US" dirty="0"/>
+              <a:t> today on our teaching platform</a:t>
+            </a:r>
           </a:p>
         </p:txBody>
       </p:sp>
@@ -1356,9 +1303,9 @@
           <a:bodyPr/>
           <a:lstStyle/>
           <a:p>
-            <a:fld id="{6184AF57-4BD4-7D48-A093-6530DDD8C062}" type="slidenum">
+            <a:fld id="{405232F6-B76B-E748-9DF9-431B1E2F1F8C}" type="slidenum">
               <a:rPr lang="en-US" smtClean="0"/>
-              <a:t>13</a:t>
+              <a:t>12</a:t>
             </a:fld>
             <a:endParaRPr lang="en-US"/>
           </a:p>
@@ -1367,7 +1314,7 @@
     </p:spTree>
     <p:extLst>
       <p:ext uri="{BB962C8B-B14F-4D97-AF65-F5344CB8AC3E}">
-        <p14:creationId xmlns:p14="http://schemas.microsoft.com/office/powerpoint/2010/main" val="3619438021"/>
+        <p14:creationId xmlns:p14="http://schemas.microsoft.com/office/powerpoint/2010/main" val="2896587380"/>
       </p:ext>
     </p:extLst>
   </p:cSld>
@@ -1423,8 +1370,162 @@
           <a:p>
             <a:r>
               <a:rPr lang="en-US" dirty="0"/>
-              <a:t>We also have the fair principles for RS.</a:t>
-            </a:r>
+              <a:t>Hopefully, if you’re here, then you aren’t wondering why this is even important! But in case you are wondering….</a:t>
+            </a:r>
+          </a:p>
+          <a:p>
+            <a:endParaRPr lang="en-US" dirty="0"/>
+          </a:p>
+          <a:p>
+            <a:r>
+              <a:rPr lang="en-US" dirty="0"/>
+              <a:t>Here are the UNESCO guidelines on responsible use of AI, but they can just as easily apply to any software.</a:t>
+            </a:r>
+          </a:p>
+          <a:p>
+            <a:endParaRPr lang="en-US" dirty="0"/>
+          </a:p>
+          <a:p>
+            <a:r>
+              <a:rPr lang="en-US" dirty="0"/>
+              <a:t>Recommend weapons of math destruction by Cathy O'Neil</a:t>
+            </a:r>
+          </a:p>
+          <a:p>
+            <a:endParaRPr lang="en-US" dirty="0"/>
+          </a:p>
+          <a:p>
+            <a:pPr marL="0" indent="0">
+              <a:buFontTx/>
+              <a:buNone/>
+            </a:pPr>
+            <a:r>
+              <a:rPr lang="en-US" dirty="0"/>
+              <a:t>How do we make software systems auditable and traceable?</a:t>
+            </a:r>
+          </a:p>
+          <a:p>
+            <a:pPr marL="0" indent="0">
+              <a:buFontTx/>
+              <a:buNone/>
+            </a:pPr>
+            <a:endParaRPr lang="en-US" dirty="0"/>
+          </a:p>
+          <a:p>
+            <a:pPr marL="0" indent="0">
+              <a:buFontTx/>
+              <a:buNone/>
+            </a:pPr>
+            <a:r>
+              <a:rPr lang="en-US" dirty="0"/>
+              <a:t>How can we monitor security vulnerabilities? </a:t>
+            </a:r>
+          </a:p>
+          <a:p>
+            <a:pPr marL="0" indent="0">
+              <a:buFontTx/>
+              <a:buNone/>
+            </a:pPr>
+            <a:endParaRPr lang="en-US" dirty="0"/>
+          </a:p>
+          <a:p>
+            <a:pPr marL="0" indent="0">
+              <a:buFontTx/>
+              <a:buNone/>
+            </a:pPr>
+            <a:r>
+              <a:rPr lang="en-US" dirty="0"/>
+              <a:t>How can we be transparent and make sure our systems are explainable and interpretable? </a:t>
+            </a:r>
+          </a:p>
+          <a:p>
+            <a:pPr marL="0" indent="0">
+              <a:buFontTx/>
+              <a:buNone/>
+            </a:pPr>
+            <a:endParaRPr lang="en-US" dirty="0"/>
+          </a:p>
+          <a:p>
+            <a:pPr marL="0" indent="0">
+              <a:buFontTx/>
+              <a:buNone/>
+            </a:pPr>
+            <a:r>
+              <a:rPr lang="en-US" dirty="0"/>
+              <a:t>How can we ensure privacy.</a:t>
+            </a:r>
+          </a:p>
+          <a:p>
+            <a:pPr marL="0" indent="0">
+              <a:buFontTx/>
+              <a:buNone/>
+            </a:pPr>
+            <a:endParaRPr lang="en-US" dirty="0"/>
+          </a:p>
+          <a:p>
+            <a:pPr marL="0" indent="0">
+              <a:buFontTx/>
+              <a:buNone/>
+            </a:pPr>
+            <a:r>
+              <a:rPr lang="en-US" dirty="0"/>
+              <a:t>Actually, the answers to some of these questions lies in proper software engineering practices.</a:t>
+            </a:r>
+          </a:p>
+          <a:p>
+            <a:pPr marL="171450" indent="-171450">
+              <a:buFontTx/>
+              <a:buChar char="-"/>
+            </a:pPr>
+            <a:r>
+              <a:rPr lang="en-US" dirty="0"/>
+              <a:t>We can make our code open source.</a:t>
+            </a:r>
+          </a:p>
+          <a:p>
+            <a:pPr marL="171450" indent="-171450">
+              <a:buFontTx/>
+              <a:buChar char="-"/>
+            </a:pPr>
+            <a:r>
+              <a:rPr lang="en-US" dirty="0"/>
+              <a:t>We can use version control, so all changes made by contributors can be tracked.</a:t>
+            </a:r>
+          </a:p>
+          <a:p>
+            <a:pPr marL="171450" indent="-171450">
+              <a:buFontTx/>
+              <a:buChar char="-"/>
+            </a:pPr>
+            <a:r>
+              <a:rPr lang="en-US" dirty="0"/>
+              <a:t>We can keep up to date with vulnerabilities via </a:t>
+            </a:r>
+            <a:r>
+              <a:rPr lang="en-US" dirty="0" err="1"/>
+              <a:t>Github</a:t>
+            </a:r>
+            <a:r>
+              <a:rPr lang="en-US" dirty="0"/>
+              <a:t>.</a:t>
+            </a:r>
+          </a:p>
+          <a:p>
+            <a:pPr marL="171450" indent="-171450">
+              <a:buFontTx/>
+              <a:buChar char="-"/>
+            </a:pPr>
+            <a:r>
+              <a:rPr lang="en-US" dirty="0"/>
+              <a:t>We can be aware of any third-party software, and what they are doing..</a:t>
+            </a:r>
+          </a:p>
+          <a:p>
+            <a:pPr marL="171450" indent="-171450">
+              <a:buFontTx/>
+              <a:buChar char="-"/>
+            </a:pPr>
+            <a:endParaRPr lang="en-US" dirty="0"/>
           </a:p>
         </p:txBody>
       </p:sp>
@@ -1454,7 +1555,7 @@
     </p:spTree>
     <p:extLst>
       <p:ext uri="{BB962C8B-B14F-4D97-AF65-F5344CB8AC3E}">
-        <p14:creationId xmlns:p14="http://schemas.microsoft.com/office/powerpoint/2010/main" val="2397109655"/>
+        <p14:creationId xmlns:p14="http://schemas.microsoft.com/office/powerpoint/2010/main" val="3619438021"/>
       </p:ext>
     </p:extLst>
   </p:cSld>
@@ -1510,191 +1611,7 @@
           <a:p>
             <a:r>
               <a:rPr lang="en-US" dirty="0"/>
-              <a:t>What about more short-term lower scale effects of good SWE</a:t>
-            </a:r>
-            <a:br>
-              <a:rPr lang="en-US" dirty="0"/>
-            </a:br>
-            <a:endParaRPr lang="en-US" dirty="0"/>
-          </a:p>
-          <a:p>
-            <a:pPr marL="171450" indent="-171450">
-              <a:buFontTx/>
-              <a:buChar char="-"/>
-            </a:pPr>
-            <a:r>
-              <a:rPr lang="en-US" dirty="0"/>
-              <a:t>I wonder how many people in this room, have written a piece of code, and there is a part of it that they’re not quite sure how it’s working, but it does seem to be working. But how can you be sure that it’s working in the way you intend it to work?</a:t>
-            </a:r>
-          </a:p>
-          <a:p>
-            <a:pPr marL="171450" indent="-171450">
-              <a:buFontTx/>
-              <a:buChar char="-"/>
-            </a:pPr>
-            <a:endParaRPr lang="en-US" dirty="0"/>
-          </a:p>
-          <a:p>
-            <a:pPr marL="171450" indent="-171450">
-              <a:buFontTx/>
-              <a:buChar char="-"/>
-            </a:pPr>
-            <a:r>
-              <a:rPr lang="en-US" dirty="0"/>
-              <a:t>Lessens the chance of retractions.</a:t>
-            </a:r>
-          </a:p>
-          <a:p>
-            <a:pPr marL="171450" indent="-171450">
-              <a:buFontTx/>
-              <a:buChar char="-"/>
-            </a:pPr>
-            <a:endParaRPr lang="en-US" dirty="0"/>
-          </a:p>
-          <a:p>
-            <a:pPr marL="171450" indent="-171450">
-              <a:buFontTx/>
-              <a:buChar char="-"/>
-            </a:pPr>
-            <a:r>
-              <a:rPr lang="en-US" dirty="0"/>
-              <a:t>It gives us integrity. Your life is so much easier if you trust your own work, if you know that you’ve tugged at every thread.</a:t>
-            </a:r>
-          </a:p>
-          <a:p>
-            <a:pPr marL="171450" indent="-171450">
-              <a:buFontTx/>
-              <a:buChar char="-"/>
-            </a:pPr>
-            <a:endParaRPr lang="en-US" dirty="0"/>
-          </a:p>
-          <a:p>
-            <a:pPr marL="171450" marR="0" lvl="0" indent="-171450" algn="l" defTabSz="914400" rtl="0" eaLnBrk="1" fontAlgn="auto" latinLnBrk="0" hangingPunct="1">
-              <a:lnSpc>
-                <a:spcPct val="100000"/>
-              </a:lnSpc>
-              <a:spcBef>
-                <a:spcPts val="0"/>
-              </a:spcBef>
-              <a:spcAft>
-                <a:spcPts val="0"/>
-              </a:spcAft>
-              <a:buClrTx/>
-              <a:buSzTx/>
-              <a:buFontTx/>
-              <a:buChar char="-"/>
-              <a:tabLst/>
-              <a:defRPr/>
-            </a:pPr>
-            <a:r>
-              <a:rPr lang="en-US" dirty="0"/>
-              <a:t>It allows others to reproduce and build on our work. This is another big deal. We should, given the same starting conditions, be able to reproduce the work of other scientists to within an acceptable degree of error. And in many case in computational work, that error should be essentially machine precision.</a:t>
-            </a:r>
-          </a:p>
-          <a:p>
-            <a:pPr marL="171450" marR="0" lvl="0" indent="-171450" algn="l" defTabSz="914400" rtl="0" eaLnBrk="1" fontAlgn="auto" latinLnBrk="0" hangingPunct="1">
-              <a:lnSpc>
-                <a:spcPct val="100000"/>
-              </a:lnSpc>
-              <a:spcBef>
-                <a:spcPts val="0"/>
-              </a:spcBef>
-              <a:spcAft>
-                <a:spcPts val="0"/>
-              </a:spcAft>
-              <a:buClrTx/>
-              <a:buSzTx/>
-              <a:buFontTx/>
-              <a:buChar char="-"/>
-              <a:tabLst/>
-              <a:defRPr/>
-            </a:pPr>
-            <a:endParaRPr lang="en-US" dirty="0"/>
-          </a:p>
-          <a:p>
-            <a:pPr marL="171450" marR="0" lvl="0" indent="-171450" algn="l" defTabSz="914400" rtl="0" eaLnBrk="1" fontAlgn="auto" latinLnBrk="0" hangingPunct="1">
-              <a:lnSpc>
-                <a:spcPct val="100000"/>
-              </a:lnSpc>
-              <a:spcBef>
-                <a:spcPts val="0"/>
-              </a:spcBef>
-              <a:spcAft>
-                <a:spcPts val="0"/>
-              </a:spcAft>
-              <a:buClrTx/>
-              <a:buSzTx/>
-              <a:buFontTx/>
-              <a:buChar char="-"/>
-              <a:tabLst/>
-              <a:defRPr/>
-            </a:pPr>
-            <a:r>
-              <a:rPr lang="en-US" dirty="0"/>
-              <a:t>It helps onboarding with new students. Again huge deal. How much of the initial PhD is spent deciphering the code written on stone tablets.</a:t>
-            </a:r>
-          </a:p>
-          <a:p>
-            <a:pPr marL="171450" marR="0" lvl="0" indent="-171450" algn="l" defTabSz="914400" rtl="0" eaLnBrk="1" fontAlgn="auto" latinLnBrk="0" hangingPunct="1">
-              <a:lnSpc>
-                <a:spcPct val="100000"/>
-              </a:lnSpc>
-              <a:spcBef>
-                <a:spcPts val="0"/>
-              </a:spcBef>
-              <a:spcAft>
-                <a:spcPts val="0"/>
-              </a:spcAft>
-              <a:buClrTx/>
-              <a:buSzTx/>
-              <a:buFontTx/>
-              <a:buChar char="-"/>
-              <a:tabLst/>
-              <a:defRPr/>
-            </a:pPr>
-            <a:endParaRPr lang="en-US" dirty="0"/>
-          </a:p>
-          <a:p>
-            <a:pPr marL="171450" marR="0" lvl="0" indent="-171450" algn="l" defTabSz="914400" rtl="0" eaLnBrk="1" fontAlgn="auto" latinLnBrk="0" hangingPunct="1">
-              <a:lnSpc>
-                <a:spcPct val="100000"/>
-              </a:lnSpc>
-              <a:spcBef>
-                <a:spcPts val="0"/>
-              </a:spcBef>
-              <a:spcAft>
-                <a:spcPts val="0"/>
-              </a:spcAft>
-              <a:buClrTx/>
-              <a:buSzTx/>
-              <a:buFontTx/>
-              <a:buChar char="-"/>
-              <a:tabLst/>
-              <a:defRPr/>
-            </a:pPr>
-            <a:endParaRPr lang="en-US" dirty="0"/>
-          </a:p>
-          <a:p>
-            <a:pPr marL="171450" marR="0" lvl="0" indent="-171450" algn="l" defTabSz="914400" rtl="0" eaLnBrk="1" fontAlgn="auto" latinLnBrk="0" hangingPunct="1">
-              <a:lnSpc>
-                <a:spcPct val="100000"/>
-              </a:lnSpc>
-              <a:spcBef>
-                <a:spcPts val="0"/>
-              </a:spcBef>
-              <a:spcAft>
-                <a:spcPts val="0"/>
-              </a:spcAft>
-              <a:buClrTx/>
-              <a:buSzTx/>
-              <a:buFontTx/>
-              <a:buChar char="-"/>
-              <a:tabLst/>
-              <a:defRPr/>
-            </a:pPr>
-            <a:r>
-              <a:rPr lang="en-US" dirty="0"/>
-              <a:t>All comes from the end goal : publishing</a:t>
+              <a:t>We also have the fair principles for RS.</a:t>
             </a:r>
           </a:p>
         </p:txBody>
@@ -1725,7 +1642,7 @@
     </p:spTree>
     <p:extLst>
       <p:ext uri="{BB962C8B-B14F-4D97-AF65-F5344CB8AC3E}">
-        <p14:creationId xmlns:p14="http://schemas.microsoft.com/office/powerpoint/2010/main" val="2324131731"/>
+        <p14:creationId xmlns:p14="http://schemas.microsoft.com/office/powerpoint/2010/main" val="2397109655"/>
       </p:ext>
     </p:extLst>
   </p:cSld>
@@ -1781,16 +1698,191 @@
           <a:p>
             <a:r>
               <a:rPr lang="en-US" dirty="0"/>
-              <a:t>So what does it really mean to “publish” software?</a:t>
-            </a:r>
-          </a:p>
-          <a:p>
+              <a:t>What about more short-term lower scale effects of good SWE</a:t>
+            </a:r>
+            <a:br>
+              <a:rPr lang="en-US" dirty="0"/>
+            </a:br>
             <a:endParaRPr lang="en-US" dirty="0"/>
           </a:p>
           <a:p>
-            <a:r>
-              <a:rPr lang="en-US" dirty="0"/>
-              <a:t>When most people think of “publishing” code, it means to in some way make your source code available on a public platform, usually for free. For a lot of people that means uploading to GitHub. It’s akin to writing a blog on the internet. And if done correctly, which it isn’t always, it allows you to cover off a lot of the benefits of publishing we stated earlier, and also address some of the ethical issues.</a:t>
+            <a:pPr marL="171450" indent="-171450">
+              <a:buFontTx/>
+              <a:buChar char="-"/>
+            </a:pPr>
+            <a:r>
+              <a:rPr lang="en-US" dirty="0"/>
+              <a:t>I wonder how many people in this room, have written a piece of code, and there is a part of it that they’re not quite sure how it’s working, but it does seem to be working. But how can you be sure that it’s working in the way you intend it to work?</a:t>
+            </a:r>
+          </a:p>
+          <a:p>
+            <a:pPr marL="171450" indent="-171450">
+              <a:buFontTx/>
+              <a:buChar char="-"/>
+            </a:pPr>
+            <a:endParaRPr lang="en-US" dirty="0"/>
+          </a:p>
+          <a:p>
+            <a:pPr marL="171450" indent="-171450">
+              <a:buFontTx/>
+              <a:buChar char="-"/>
+            </a:pPr>
+            <a:r>
+              <a:rPr lang="en-US" dirty="0"/>
+              <a:t>Lessens the chance of retractions.</a:t>
+            </a:r>
+          </a:p>
+          <a:p>
+            <a:pPr marL="171450" indent="-171450">
+              <a:buFontTx/>
+              <a:buChar char="-"/>
+            </a:pPr>
+            <a:endParaRPr lang="en-US" dirty="0"/>
+          </a:p>
+          <a:p>
+            <a:pPr marL="171450" indent="-171450">
+              <a:buFontTx/>
+              <a:buChar char="-"/>
+            </a:pPr>
+            <a:r>
+              <a:rPr lang="en-US" dirty="0"/>
+              <a:t>It gives us integrity. Your life is so much easier if you trust your own work, if you know that you’ve tugged at every thread.</a:t>
+            </a:r>
+          </a:p>
+          <a:p>
+            <a:pPr marL="171450" indent="-171450">
+              <a:buFontTx/>
+              <a:buChar char="-"/>
+            </a:pPr>
+            <a:endParaRPr lang="en-US" dirty="0"/>
+          </a:p>
+          <a:p>
+            <a:pPr marL="171450" marR="0" lvl="0" indent="-171450" algn="l" defTabSz="914400" rtl="0" eaLnBrk="1" fontAlgn="auto" latinLnBrk="0" hangingPunct="1">
+              <a:lnSpc>
+                <a:spcPct val="100000"/>
+              </a:lnSpc>
+              <a:spcBef>
+                <a:spcPts val="0"/>
+              </a:spcBef>
+              <a:spcAft>
+                <a:spcPts val="0"/>
+              </a:spcAft>
+              <a:buClrTx/>
+              <a:buSzTx/>
+              <a:buFontTx/>
+              <a:buChar char="-"/>
+              <a:tabLst/>
+              <a:defRPr/>
+            </a:pPr>
+            <a:r>
+              <a:rPr lang="en-US" dirty="0"/>
+              <a:t>It allows others to reproduce and build on our work. This is another big deal. We should, given the same starting conditions, be able to reproduce the work of other scientists to within an acceptable degree of error. And in many case in computational work, that error should be essentially machine precision.</a:t>
+            </a:r>
+          </a:p>
+          <a:p>
+            <a:pPr marL="171450" marR="0" lvl="0" indent="-171450" algn="l" defTabSz="914400" rtl="0" eaLnBrk="1" fontAlgn="auto" latinLnBrk="0" hangingPunct="1">
+              <a:lnSpc>
+                <a:spcPct val="100000"/>
+              </a:lnSpc>
+              <a:spcBef>
+                <a:spcPts val="0"/>
+              </a:spcBef>
+              <a:spcAft>
+                <a:spcPts val="0"/>
+              </a:spcAft>
+              <a:buClrTx/>
+              <a:buSzTx/>
+              <a:buFontTx/>
+              <a:buChar char="-"/>
+              <a:tabLst/>
+              <a:defRPr/>
+            </a:pPr>
+            <a:endParaRPr lang="en-US" dirty="0"/>
+          </a:p>
+          <a:p>
+            <a:pPr marL="171450" marR="0" lvl="0" indent="-171450" algn="l" defTabSz="914400" rtl="0" eaLnBrk="1" fontAlgn="auto" latinLnBrk="0" hangingPunct="1">
+              <a:lnSpc>
+                <a:spcPct val="100000"/>
+              </a:lnSpc>
+              <a:spcBef>
+                <a:spcPts val="0"/>
+              </a:spcBef>
+              <a:spcAft>
+                <a:spcPts val="0"/>
+              </a:spcAft>
+              <a:buClrTx/>
+              <a:buSzTx/>
+              <a:buFontTx/>
+              <a:buChar char="-"/>
+              <a:tabLst/>
+              <a:defRPr/>
+            </a:pPr>
+            <a:r>
+              <a:rPr lang="en-US" dirty="0"/>
+              <a:t>It helps onboarding with new students. Again huge deal. How much of the initial PhD is spent deciphering the code written on stone tablets.</a:t>
+            </a:r>
+          </a:p>
+          <a:p>
+            <a:pPr marL="171450" marR="0" lvl="0" indent="-171450" algn="l" defTabSz="914400" rtl="0" eaLnBrk="1" fontAlgn="auto" latinLnBrk="0" hangingPunct="1">
+              <a:lnSpc>
+                <a:spcPct val="100000"/>
+              </a:lnSpc>
+              <a:spcBef>
+                <a:spcPts val="0"/>
+              </a:spcBef>
+              <a:spcAft>
+                <a:spcPts val="0"/>
+              </a:spcAft>
+              <a:buClrTx/>
+              <a:buSzTx/>
+              <a:buFontTx/>
+              <a:buChar char="-"/>
+              <a:tabLst/>
+              <a:defRPr/>
+            </a:pPr>
+            <a:endParaRPr lang="en-US" dirty="0"/>
+          </a:p>
+          <a:p>
+            <a:pPr marL="171450" marR="0" lvl="0" indent="-171450" algn="l" defTabSz="914400" rtl="0" eaLnBrk="1" fontAlgn="auto" latinLnBrk="0" hangingPunct="1">
+              <a:lnSpc>
+                <a:spcPct val="100000"/>
+              </a:lnSpc>
+              <a:spcBef>
+                <a:spcPts val="0"/>
+              </a:spcBef>
+              <a:spcAft>
+                <a:spcPts val="0"/>
+              </a:spcAft>
+              <a:buClrTx/>
+              <a:buSzTx/>
+              <a:buFontTx/>
+              <a:buChar char="-"/>
+              <a:tabLst/>
+              <a:defRPr/>
+            </a:pPr>
+            <a:endParaRPr lang="en-US" dirty="0"/>
+          </a:p>
+          <a:p>
+            <a:pPr marL="171450" marR="0" lvl="0" indent="-171450" algn="l" defTabSz="914400" rtl="0" eaLnBrk="1" fontAlgn="auto" latinLnBrk="0" hangingPunct="1">
+              <a:lnSpc>
+                <a:spcPct val="100000"/>
+              </a:lnSpc>
+              <a:spcBef>
+                <a:spcPts val="0"/>
+              </a:spcBef>
+              <a:spcAft>
+                <a:spcPts val="0"/>
+              </a:spcAft>
+              <a:buClrTx/>
+              <a:buSzTx/>
+              <a:buFontTx/>
+              <a:buChar char="-"/>
+              <a:tabLst/>
+              <a:defRPr/>
+            </a:pPr>
+            <a:r>
+              <a:rPr lang="en-US" dirty="0"/>
+              <a:t>All comes from the end goal : publishing</a:t>
             </a:r>
           </a:p>
         </p:txBody>
@@ -1810,7 +1902,7 @@
           <a:bodyPr/>
           <a:lstStyle/>
           <a:p>
-            <a:fld id="{201484FD-10DA-4547-A01E-D86EDBCF772B}" type="slidenum">
+            <a:fld id="{6184AF57-4BD4-7D48-A093-6530DDD8C062}" type="slidenum">
               <a:rPr lang="en-US" smtClean="0"/>
               <a:t>16</a:t>
             </a:fld>
@@ -1821,7 +1913,7 @@
     </p:spTree>
     <p:extLst>
       <p:ext uri="{BB962C8B-B14F-4D97-AF65-F5344CB8AC3E}">
-        <p14:creationId xmlns:p14="http://schemas.microsoft.com/office/powerpoint/2010/main" val="432620978"/>
+        <p14:creationId xmlns:p14="http://schemas.microsoft.com/office/powerpoint/2010/main" val="2324131731"/>
       </p:ext>
     </p:extLst>
   </p:cSld>
@@ -1875,7 +1967,19 @@
           <a:bodyPr/>
           <a:lstStyle/>
           <a:p>
+            <a:r>
+              <a:rPr lang="en-US" dirty="0"/>
+              <a:t>So what does it really mean to “publish” software?</a:t>
+            </a:r>
+          </a:p>
+          <a:p>
             <a:endParaRPr lang="en-US" dirty="0"/>
+          </a:p>
+          <a:p>
+            <a:r>
+              <a:rPr lang="en-US" dirty="0"/>
+              <a:t>When most people think of “publishing” code, it means to in some way make your source code available on a public platform, usually for free. For a lot of people that means uploading to GitHub. It’s akin to writing a blog on the internet. And if done correctly, which it isn’t always, it allows you to cover off a lot of the benefits of publishing we stated earlier, and also address some of the ethical issues.</a:t>
+            </a:r>
           </a:p>
         </p:txBody>
       </p:sp>
@@ -1905,7 +2009,7 @@
     </p:spTree>
     <p:extLst>
       <p:ext uri="{BB962C8B-B14F-4D97-AF65-F5344CB8AC3E}">
-        <p14:creationId xmlns:p14="http://schemas.microsoft.com/office/powerpoint/2010/main" val="543613503"/>
+        <p14:creationId xmlns:p14="http://schemas.microsoft.com/office/powerpoint/2010/main" val="432620978"/>
       </p:ext>
     </p:extLst>
   </p:cSld>
@@ -1959,37 +2063,7 @@
           <a:bodyPr/>
           <a:lstStyle/>
           <a:p>
-            <a:r>
-              <a:rPr lang="en-US" dirty="0"/>
-              <a:t>Firstly, building a basic user interface.</a:t>
-            </a:r>
-          </a:p>
-          <a:p>
             <a:endParaRPr lang="en-US" dirty="0"/>
-          </a:p>
-          <a:p>
-            <a:r>
-              <a:rPr lang="en-US" dirty="0"/>
-              <a:t>Secondly, building a CLI.</a:t>
-            </a:r>
-          </a:p>
-          <a:p>
-            <a:endParaRPr lang="en-US" dirty="0"/>
-          </a:p>
-          <a:p>
-            <a:r>
-              <a:rPr lang="en-US" dirty="0"/>
-              <a:t>Third, making the package pip installable.</a:t>
-            </a:r>
-          </a:p>
-          <a:p>
-            <a:endParaRPr lang="en-US" dirty="0"/>
-          </a:p>
-          <a:p>
-            <a:r>
-              <a:rPr lang="en-US" dirty="0"/>
-              <a:t>And finally, automate the testing and publishing process.</a:t>
-            </a:r>
           </a:p>
         </p:txBody>
       </p:sp>
@@ -2008,7 +2082,7 @@
           <a:bodyPr/>
           <a:lstStyle/>
           <a:p>
-            <a:fld id="{405232F6-B76B-E748-9DF9-431B1E2F1F8C}" type="slidenum">
+            <a:fld id="{201484FD-10DA-4547-A01E-D86EDBCF772B}" type="slidenum">
               <a:rPr lang="en-US" smtClean="0"/>
               <a:t>18</a:t>
             </a:fld>
@@ -2019,7 +2093,7 @@
     </p:spTree>
     <p:extLst>
       <p:ext uri="{BB962C8B-B14F-4D97-AF65-F5344CB8AC3E}">
-        <p14:creationId xmlns:p14="http://schemas.microsoft.com/office/powerpoint/2010/main" val="1519514025"/>
+        <p14:creationId xmlns:p14="http://schemas.microsoft.com/office/powerpoint/2010/main" val="543613503"/>
       </p:ext>
     </p:extLst>
   </p:cSld>
@@ -2075,6 +2149,120 @@
           <a:p>
             <a:r>
               <a:rPr lang="en-US" dirty="0"/>
+              <a:t>Firstly, building a basic user interface.</a:t>
+            </a:r>
+          </a:p>
+          <a:p>
+            <a:endParaRPr lang="en-US" dirty="0"/>
+          </a:p>
+          <a:p>
+            <a:r>
+              <a:rPr lang="en-US" dirty="0"/>
+              <a:t>Secondly, building a CLI.</a:t>
+            </a:r>
+          </a:p>
+          <a:p>
+            <a:endParaRPr lang="en-US" dirty="0"/>
+          </a:p>
+          <a:p>
+            <a:r>
+              <a:rPr lang="en-US" dirty="0"/>
+              <a:t>Third, making the package pip installable.</a:t>
+            </a:r>
+          </a:p>
+          <a:p>
+            <a:endParaRPr lang="en-US" dirty="0"/>
+          </a:p>
+          <a:p>
+            <a:r>
+              <a:rPr lang="en-US" dirty="0"/>
+              <a:t>And finally, automate the testing and publishing process.</a:t>
+            </a:r>
+          </a:p>
+        </p:txBody>
+      </p:sp>
+      <p:sp>
+        <p:nvSpPr>
+          <p:cNvPr id="4" name="Slide Number Placeholder 3"/>
+          <p:cNvSpPr>
+            <a:spLocks noGrp="1"/>
+          </p:cNvSpPr>
+          <p:nvPr>
+            <p:ph type="sldNum" sz="quarter" idx="5"/>
+          </p:nvPr>
+        </p:nvSpPr>
+        <p:spPr/>
+        <p:txBody>
+          <a:bodyPr/>
+          <a:lstStyle/>
+          <a:p>
+            <a:fld id="{405232F6-B76B-E748-9DF9-431B1E2F1F8C}" type="slidenum">
+              <a:rPr lang="en-US" smtClean="0"/>
+              <a:t>19</a:t>
+            </a:fld>
+            <a:endParaRPr lang="en-US"/>
+          </a:p>
+        </p:txBody>
+      </p:sp>
+    </p:spTree>
+    <p:extLst>
+      <p:ext uri="{BB962C8B-B14F-4D97-AF65-F5344CB8AC3E}">
+        <p14:creationId xmlns:p14="http://schemas.microsoft.com/office/powerpoint/2010/main" val="1519514025"/>
+      </p:ext>
+    </p:extLst>
+  </p:cSld>
+  <p:clrMapOvr>
+    <a:masterClrMapping/>
+  </p:clrMapOvr>
+</p:notes>
+</file>
+
+<file path=ppt/notesSlides/notesSlide19.xml><?xml version="1.0" encoding="utf-8"?>
+<p:notes xmlns:a="http://schemas.openxmlformats.org/drawingml/2006/main" xmlns:r="http://schemas.openxmlformats.org/officeDocument/2006/relationships" xmlns:p="http://schemas.openxmlformats.org/presentationml/2006/main">
+  <p:cSld>
+    <p:spTree>
+      <p:nvGrpSpPr>
+        <p:cNvPr id="1" name=""/>
+        <p:cNvGrpSpPr/>
+        <p:nvPr/>
+      </p:nvGrpSpPr>
+      <p:grpSpPr>
+        <a:xfrm>
+          <a:off x="0" y="0"/>
+          <a:ext cx="0" cy="0"/>
+          <a:chOff x="0" y="0"/>
+          <a:chExt cx="0" cy="0"/>
+        </a:xfrm>
+      </p:grpSpPr>
+      <p:sp>
+        <p:nvSpPr>
+          <p:cNvPr id="2" name="Slide Image Placeholder 1"/>
+          <p:cNvSpPr>
+            <a:spLocks noGrp="1" noRot="1" noChangeAspect="1"/>
+          </p:cNvSpPr>
+          <p:nvPr>
+            <p:ph type="sldImg"/>
+          </p:nvPr>
+        </p:nvSpPr>
+        <p:spPr/>
+      </p:sp>
+      <p:sp>
+        <p:nvSpPr>
+          <p:cNvPr id="3" name="Notes Placeholder 2"/>
+          <p:cNvSpPr>
+            <a:spLocks noGrp="1"/>
+          </p:cNvSpPr>
+          <p:nvPr>
+            <p:ph type="body" idx="1"/>
+          </p:nvPr>
+        </p:nvSpPr>
+        <p:spPr/>
+        <p:txBody>
+          <a:bodyPr/>
+          <a:lstStyle/>
+          <a:p>
+            <a:r>
+              <a:rPr lang="en-US" dirty="0"/>
               <a:t>I will now introduce you to the project itself</a:t>
             </a:r>
           </a:p>
@@ -2211,7 +2399,7 @@
           <a:p>
             <a:fld id="{FE27E4C1-A6EC-8946-BBCD-755D8945F25F}" type="slidenum">
               <a:rPr lang="en-US" smtClean="0"/>
-              <a:t>19</a:t>
+              <a:t>20</a:t>
             </a:fld>
             <a:endParaRPr lang="en-US"/>
           </a:p>
@@ -2274,80 +2462,7 @@
           <a:bodyPr/>
           <a:lstStyle/>
           <a:p>
-            <a:r>
-              <a:rPr lang="en-US" dirty="0"/>
-              <a:t>We're going to be talking about packaging and publishing python code! </a:t>
-            </a:r>
-          </a:p>
-          <a:p>
             <a:endParaRPr lang="en-US" dirty="0"/>
-          </a:p>
-          <a:p>
-            <a:endParaRPr lang="en-US" dirty="0"/>
-          </a:p>
-          <a:p>
-            <a:r>
-              <a:rPr lang="en-US" dirty="0"/>
-              <a:t>In doing so we will be covering things along the way that make this process as streamlined as possible - software best practices.</a:t>
-            </a:r>
-          </a:p>
-          <a:p>
-            <a:endParaRPr lang="en-US" dirty="0"/>
-          </a:p>
-          <a:p>
-            <a:r>
-              <a:rPr lang="en-US" dirty="0"/>
-              <a:t>Hopefully, over the course of this workshop I can convince you that some of these things are worth paying attention to.</a:t>
-            </a:r>
-          </a:p>
-          <a:p>
-            <a:endParaRPr lang="en-US" dirty="0"/>
-          </a:p>
-          <a:p>
-            <a:r>
-              <a:rPr lang="en-US" dirty="0"/>
-              <a:t>Something that we see regularly is Python. </a:t>
-            </a:r>
-          </a:p>
-          <a:p>
-            <a:endParaRPr lang="en-US" dirty="0"/>
-          </a:p>
-          <a:p>
-            <a:r>
-              <a:rPr lang="en-US" dirty="0"/>
-              <a:t>It is ubiquitous in research. </a:t>
-            </a:r>
-          </a:p>
-          <a:p>
-            <a:endParaRPr lang="en-US" dirty="0"/>
-          </a:p>
-          <a:p>
-            <a:r>
-              <a:rPr lang="en-US" dirty="0"/>
-              <a:t>Reasons: adoption in ML and simplicity, but also statistical / scientific computing packages like </a:t>
-            </a:r>
-            <a:r>
-              <a:rPr lang="en-US" dirty="0" err="1"/>
-              <a:t>numpy</a:t>
-            </a:r>
-            <a:r>
-              <a:rPr lang="en-US" dirty="0"/>
-              <a:t> or </a:t>
-            </a:r>
-            <a:r>
-              <a:rPr lang="en-US" dirty="0" err="1"/>
-              <a:t>simpy</a:t>
-            </a:r>
-            <a:endParaRPr lang="en-US" dirty="0"/>
-          </a:p>
-          <a:p>
-            <a:endParaRPr lang="en-US" dirty="0"/>
-          </a:p>
-          <a:p>
-            <a:r>
-              <a:rPr lang="en-US" dirty="0"/>
-              <a:t>Python Software Foundation ran a survey on packaging – so this is the process of turning your code into a distributable package that other people can use easily with the same tools. And the results really speak for themselves:</a:t>
-            </a:r>
           </a:p>
         </p:txBody>
       </p:sp>
@@ -2366,9 +2481,9 @@
           <a:bodyPr/>
           <a:lstStyle/>
           <a:p>
-            <a:fld id="{405232F6-B76B-E748-9DF9-431B1E2F1F8C}" type="slidenum">
+            <a:fld id="{5BF9C5A9-A64B-154A-BE70-E2C3B81DAB18}" type="slidenum">
               <a:rPr lang="en-US" smtClean="0"/>
-              <a:t>3</a:t>
+              <a:t>2</a:t>
             </a:fld>
             <a:endParaRPr lang="en-US"/>
           </a:p>
@@ -2377,7 +2492,7 @@
     </p:spTree>
     <p:extLst>
       <p:ext uri="{BB962C8B-B14F-4D97-AF65-F5344CB8AC3E}">
-        <p14:creationId xmlns:p14="http://schemas.microsoft.com/office/powerpoint/2010/main" val="1065049839"/>
+        <p14:creationId xmlns:p14="http://schemas.microsoft.com/office/powerpoint/2010/main" val="314257429"/>
       </p:ext>
     </p:extLst>
   </p:cSld>
@@ -2433,8 +2548,69 @@
           <a:p>
             <a:r>
               <a:rPr lang="en-US" dirty="0"/>
-              <a:t>Over 8,000 people responded, and this is the general distribution of users, so just under 30% using the tools between 4-6 years. Now usually, you might have a year or more of experience using python before you really start to play around with some of the packaging tools that are available out there.</a:t>
-            </a:r>
+              <a:t>We're going to be talking about packaging and publishing python code! </a:t>
+            </a:r>
+          </a:p>
+          <a:p>
+            <a:endParaRPr lang="en-US" dirty="0"/>
+          </a:p>
+          <a:p>
+            <a:endParaRPr lang="en-US" dirty="0"/>
+          </a:p>
+          <a:p>
+            <a:r>
+              <a:rPr lang="en-US" dirty="0"/>
+              <a:t>In doing so we will be covering things along the way that make this process as streamlined as possible - software best practices.</a:t>
+            </a:r>
+          </a:p>
+          <a:p>
+            <a:endParaRPr lang="en-US" dirty="0"/>
+          </a:p>
+          <a:p>
+            <a:r>
+              <a:rPr lang="en-US" dirty="0"/>
+              <a:t>Hopefully, over the course of this workshop I can convince you that some of these things are worth paying attention to.</a:t>
+            </a:r>
+          </a:p>
+          <a:p>
+            <a:endParaRPr lang="en-US" dirty="0"/>
+          </a:p>
+          <a:p>
+            <a:r>
+              <a:rPr lang="en-US" dirty="0"/>
+              <a:t>Something that we see regularly is Python. </a:t>
+            </a:r>
+          </a:p>
+          <a:p>
+            <a:endParaRPr lang="en-US" dirty="0"/>
+          </a:p>
+          <a:p>
+            <a:r>
+              <a:rPr lang="en-US" dirty="0"/>
+              <a:t>It is ubiquitous in research. </a:t>
+            </a:r>
+          </a:p>
+          <a:p>
+            <a:endParaRPr lang="en-US" dirty="0"/>
+          </a:p>
+          <a:p>
+            <a:r>
+              <a:rPr lang="en-US" dirty="0"/>
+              <a:t>Reasons: adoption in ML and simplicity, but also statistical / scientific computing packages like </a:t>
+            </a:r>
+            <a:r>
+              <a:rPr lang="en-US" dirty="0" err="1"/>
+              <a:t>numpy</a:t>
+            </a:r>
+            <a:r>
+              <a:rPr lang="en-US" dirty="0"/>
+              <a:t> or </a:t>
+            </a:r>
+            <a:r>
+              <a:rPr lang="en-US" dirty="0" err="1"/>
+              <a:t>simpy</a:t>
+            </a:r>
+            <a:endParaRPr lang="en-US" dirty="0"/>
           </a:p>
         </p:txBody>
       </p:sp>
@@ -2455,7 +2631,7 @@
           <a:p>
             <a:fld id="{405232F6-B76B-E748-9DF9-431B1E2F1F8C}" type="slidenum">
               <a:rPr lang="en-US" smtClean="0"/>
-              <a:t>4</a:t>
+              <a:t>3</a:t>
             </a:fld>
             <a:endParaRPr lang="en-US"/>
           </a:p>
@@ -2464,7 +2640,7 @@
     </p:spTree>
     <p:extLst>
       <p:ext uri="{BB962C8B-B14F-4D97-AF65-F5344CB8AC3E}">
-        <p14:creationId xmlns:p14="http://schemas.microsoft.com/office/powerpoint/2010/main" val="1060682032"/>
+        <p14:creationId xmlns:p14="http://schemas.microsoft.com/office/powerpoint/2010/main" val="1065049839"/>
       </p:ext>
     </p:extLst>
   </p:cSld>
@@ -2520,133 +2696,22 @@
           <a:p>
             <a:r>
               <a:rPr lang="en-US" dirty="0"/>
-              <a:t>So what packaging tools are actually available? Many of these you might recognize:</a:t>
+              <a:t>Python Software Foundation ran a survey on packaging – so this is the process of turning your code into a distributable package that other people can use easily with the same tools. And the results really speak for themselves:</a:t>
             </a:r>
           </a:p>
           <a:p>
             <a:endParaRPr lang="en-US" dirty="0"/>
           </a:p>
           <a:p>
-            <a:pPr marL="171450" indent="-171450">
-              <a:buFontTx/>
-              <a:buChar char="-"/>
-            </a:pPr>
-            <a:r>
-              <a:rPr lang="en-US" dirty="0"/>
-              <a:t>Pip and </a:t>
-            </a:r>
-            <a:r>
-              <a:rPr lang="en-US" dirty="0" err="1"/>
-              <a:t>Conda</a:t>
-            </a:r>
-            <a:r>
-              <a:rPr lang="en-US" dirty="0"/>
-              <a:t> are probably two of the most recognizable up there. Everyone is introduced to pip when they first start learning Python, and then most people are using python in the context of scientific programming, so the natural step is into </a:t>
-            </a:r>
-            <a:r>
-              <a:rPr lang="en-US" dirty="0" err="1"/>
-              <a:t>conda</a:t>
-            </a:r>
-            <a:r>
-              <a:rPr lang="en-US" dirty="0"/>
-              <a:t>.</a:t>
-            </a:r>
-          </a:p>
-          <a:p>
-            <a:pPr marL="171450" indent="-171450">
-              <a:buFontTx/>
-              <a:buChar char="-"/>
-            </a:pPr>
             <a:endParaRPr lang="en-US" dirty="0"/>
           </a:p>
           <a:p>
-            <a:pPr marL="171450" indent="-171450">
-              <a:buFontTx/>
-              <a:buChar char="-"/>
-            </a:pPr>
-            <a:r>
-              <a:rPr lang="en-US" dirty="0"/>
-              <a:t>Then further down the list of recognizability, we have wheels and </a:t>
-            </a:r>
-            <a:r>
-              <a:rPr lang="en-US" dirty="0" err="1"/>
-              <a:t>PyPI</a:t>
-            </a:r>
-            <a:r>
-              <a:rPr lang="en-US" dirty="0"/>
-              <a:t>. You always see that notification in the terminal of building wheels, and then </a:t>
-            </a:r>
-            <a:r>
-              <a:rPr lang="en-US" dirty="0" err="1"/>
-              <a:t>PyPI</a:t>
-            </a:r>
-            <a:r>
-              <a:rPr lang="en-US" dirty="0"/>
-              <a:t> is the main repository where these wheels are housed for pip.</a:t>
-            </a:r>
-          </a:p>
-          <a:p>
-            <a:pPr marL="171450" indent="-171450">
-              <a:buFontTx/>
-              <a:buChar char="-"/>
-            </a:pPr>
             <a:endParaRPr lang="en-US" dirty="0"/>
           </a:p>
           <a:p>
-            <a:pPr marL="171450" indent="-171450">
-              <a:buFontTx/>
-              <a:buChar char="-"/>
-            </a:pPr>
-            <a:endParaRPr lang="en-US" dirty="0"/>
-          </a:p>
-          <a:p>
-            <a:pPr marL="171450" indent="-171450">
-              <a:buFontTx/>
-              <a:buChar char="-"/>
-            </a:pPr>
-            <a:r>
-              <a:rPr lang="en-US" dirty="0"/>
-              <a:t>If you don’t use </a:t>
-            </a:r>
-            <a:r>
-              <a:rPr lang="en-US" dirty="0" err="1"/>
-              <a:t>conda</a:t>
-            </a:r>
-            <a:r>
-              <a:rPr lang="en-US" dirty="0"/>
-              <a:t>, then you probably use </a:t>
-            </a:r>
-            <a:r>
-              <a:rPr lang="en-US" dirty="0" err="1"/>
-              <a:t>venv</a:t>
-            </a:r>
-            <a:r>
-              <a:rPr lang="en-US" dirty="0"/>
-              <a:t> – this comes standard with python, very capable virtual environment tool.</a:t>
-            </a:r>
-          </a:p>
-          <a:p>
-            <a:pPr marL="171450" indent="-171450">
-              <a:buFontTx/>
-              <a:buChar char="-"/>
-            </a:pPr>
-            <a:endParaRPr lang="en-US" dirty="0"/>
-          </a:p>
-          <a:p>
-            <a:pPr marL="171450" indent="-171450">
-              <a:buFontTx/>
-              <a:buChar char="-"/>
-            </a:pPr>
-            <a:endParaRPr lang="en-US" dirty="0"/>
-          </a:p>
-          <a:p>
-            <a:pPr marL="171450" indent="-171450">
-              <a:buFontTx/>
-              <a:buChar char="-"/>
-            </a:pPr>
-            <a:r>
-              <a:rPr lang="en-US" dirty="0"/>
-              <a:t>There are also some lesser known ones</a:t>
+            <a:r>
+              <a:rPr lang="en-US" dirty="0"/>
+              <a:t>Over 8,000 people responded, and this is the general distribution of users, so just under 30% using the tools between 4-6 years. Now usually, you might have a year or more of experience using python before you really start to play around with some of the packaging tools that are available out there.</a:t>
             </a:r>
           </a:p>
         </p:txBody>
@@ -2668,7 +2733,7 @@
           <a:p>
             <a:fld id="{405232F6-B76B-E748-9DF9-431B1E2F1F8C}" type="slidenum">
               <a:rPr lang="en-US" smtClean="0"/>
-              <a:t>5</a:t>
+              <a:t>4</a:t>
             </a:fld>
             <a:endParaRPr lang="en-US"/>
           </a:p>
@@ -2677,7 +2742,7 @@
     </p:spTree>
     <p:extLst>
       <p:ext uri="{BB962C8B-B14F-4D97-AF65-F5344CB8AC3E}">
-        <p14:creationId xmlns:p14="http://schemas.microsoft.com/office/powerpoint/2010/main" val="2149997769"/>
+        <p14:creationId xmlns:p14="http://schemas.microsoft.com/office/powerpoint/2010/main" val="1060682032"/>
       </p:ext>
     </p:extLst>
   </p:cSld>
@@ -2733,28 +2798,133 @@
           <a:p>
             <a:r>
               <a:rPr lang="en-US" dirty="0"/>
-              <a:t>Python packaging “Just works”. I am actually quite surprised that 43% of people agreed or strongly agreed with this. But still, 38% don’t.</a:t>
+              <a:t>So what packaging tools are actually available? Many of these you might recognize:</a:t>
             </a:r>
           </a:p>
           <a:p>
             <a:endParaRPr lang="en-US" dirty="0"/>
           </a:p>
           <a:p>
-            <a:r>
-              <a:rPr lang="en-US" dirty="0"/>
-              <a:t>Python packaging is too complex – 50% agree, and 26% do not agree</a:t>
-            </a:r>
-          </a:p>
-          <a:p>
+            <a:pPr marL="171450" indent="-171450">
+              <a:buFontTx/>
+              <a:buChar char="-"/>
+            </a:pPr>
+            <a:r>
+              <a:rPr lang="en-US" dirty="0"/>
+              <a:t>Pip and </a:t>
+            </a:r>
+            <a:r>
+              <a:rPr lang="en-US" dirty="0" err="1"/>
+              <a:t>Conda</a:t>
+            </a:r>
+            <a:r>
+              <a:rPr lang="en-US" dirty="0"/>
+              <a:t> are probably two of the most recognizable up there. Everyone is introduced to pip when they first start learning Python, and then most people are using python in the context of scientific programming, so the natural step is into </a:t>
+            </a:r>
+            <a:r>
+              <a:rPr lang="en-US" dirty="0" err="1"/>
+              <a:t>conda</a:t>
+            </a:r>
+            <a:r>
+              <a:rPr lang="en-US" dirty="0"/>
+              <a:t>.</a:t>
+            </a:r>
+          </a:p>
+          <a:p>
+            <a:pPr marL="171450" indent="-171450">
+              <a:buFontTx/>
+              <a:buChar char="-"/>
+            </a:pPr>
             <a:endParaRPr lang="en-US" dirty="0"/>
           </a:p>
           <a:p>
+            <a:pPr marL="171450" indent="-171450">
+              <a:buFontTx/>
+              <a:buChar char="-"/>
+            </a:pPr>
+            <a:r>
+              <a:rPr lang="en-US" dirty="0"/>
+              <a:t>Then further down the list of recognizability, we have wheels and </a:t>
+            </a:r>
+            <a:r>
+              <a:rPr lang="en-US" dirty="0" err="1"/>
+              <a:t>PyPI</a:t>
+            </a:r>
+            <a:r>
+              <a:rPr lang="en-US" dirty="0"/>
+              <a:t>. You always see that notification in the terminal of building wheels, and then </a:t>
+            </a:r>
+            <a:r>
+              <a:rPr lang="en-US" dirty="0" err="1"/>
+              <a:t>PyPI</a:t>
+            </a:r>
+            <a:r>
+              <a:rPr lang="en-US" dirty="0"/>
+              <a:t> is the main repository where these wheels are housed for pip.</a:t>
+            </a:r>
+          </a:p>
+          <a:p>
+            <a:pPr marL="171450" indent="-171450">
+              <a:buFontTx/>
+              <a:buChar char="-"/>
+            </a:pPr>
             <a:endParaRPr lang="en-US" dirty="0"/>
           </a:p>
           <a:p>
-            <a:r>
-              <a:rPr lang="en-US" dirty="0"/>
-              <a:t>Perhaps most importantly, most people think that having all of these tools is NOT beneficial for the Python ecosystem, and most people would prefer to just have the one tool.</a:t>
+            <a:pPr marL="171450" indent="-171450">
+              <a:buFontTx/>
+              <a:buChar char="-"/>
+            </a:pPr>
+            <a:endParaRPr lang="en-US" dirty="0"/>
+          </a:p>
+          <a:p>
+            <a:pPr marL="171450" indent="-171450">
+              <a:buFontTx/>
+              <a:buChar char="-"/>
+            </a:pPr>
+            <a:r>
+              <a:rPr lang="en-US" dirty="0"/>
+              <a:t>If you don’t use </a:t>
+            </a:r>
+            <a:r>
+              <a:rPr lang="en-US" dirty="0" err="1"/>
+              <a:t>conda</a:t>
+            </a:r>
+            <a:r>
+              <a:rPr lang="en-US" dirty="0"/>
+              <a:t>, then you probably use </a:t>
+            </a:r>
+            <a:r>
+              <a:rPr lang="en-US" dirty="0" err="1"/>
+              <a:t>venv</a:t>
+            </a:r>
+            <a:r>
+              <a:rPr lang="en-US" dirty="0"/>
+              <a:t> – this comes standard with python, very capable virtual environment tool.</a:t>
+            </a:r>
+          </a:p>
+          <a:p>
+            <a:pPr marL="171450" indent="-171450">
+              <a:buFontTx/>
+              <a:buChar char="-"/>
+            </a:pPr>
+            <a:endParaRPr lang="en-US" dirty="0"/>
+          </a:p>
+          <a:p>
+            <a:pPr marL="171450" indent="-171450">
+              <a:buFontTx/>
+              <a:buChar char="-"/>
+            </a:pPr>
+            <a:endParaRPr lang="en-US" dirty="0"/>
+          </a:p>
+          <a:p>
+            <a:pPr marL="171450" indent="-171450">
+              <a:buFontTx/>
+              <a:buChar char="-"/>
+            </a:pPr>
+            <a:r>
+              <a:rPr lang="en-US" dirty="0"/>
+              <a:t>There are also some lesser known ones</a:t>
             </a:r>
           </a:p>
         </p:txBody>
@@ -2776,7 +2946,7 @@
           <a:p>
             <a:fld id="{405232F6-B76B-E748-9DF9-431B1E2F1F8C}" type="slidenum">
               <a:rPr lang="en-US" smtClean="0"/>
-              <a:t>6</a:t>
+              <a:t>5</a:t>
             </a:fld>
             <a:endParaRPr lang="en-US"/>
           </a:p>
@@ -2785,7 +2955,7 @@
     </p:spTree>
     <p:extLst>
       <p:ext uri="{BB962C8B-B14F-4D97-AF65-F5344CB8AC3E}">
-        <p14:creationId xmlns:p14="http://schemas.microsoft.com/office/powerpoint/2010/main" val="2731434827"/>
+        <p14:creationId xmlns:p14="http://schemas.microsoft.com/office/powerpoint/2010/main" val="2149997769"/>
       </p:ext>
     </p:extLst>
   </p:cSld>
@@ -2839,112 +3009,30 @@
           <a:bodyPr/>
           <a:lstStyle/>
           <a:p>
-            <a:pPr marL="0" marR="0" lvl="0" indent="0" algn="l" defTabSz="914400" rtl="0" eaLnBrk="1" fontAlgn="auto" latinLnBrk="0" hangingPunct="1">
-              <a:lnSpc>
-                <a:spcPct val="100000"/>
-              </a:lnSpc>
-              <a:spcBef>
-                <a:spcPts val="0"/>
-              </a:spcBef>
-              <a:spcAft>
-                <a:spcPts val="0"/>
-              </a:spcAft>
-              <a:buClrTx/>
-              <a:buSzTx/>
-              <a:buFontTx/>
-              <a:buNone/>
-              <a:tabLst/>
-              <a:defRPr/>
-            </a:pPr>
-            <a:r>
-              <a:rPr lang="en-US" dirty="0"/>
-              <a:t>An overwhelming amount of people would like to have an “official” workflow. Of course. All of those different tools we had.</a:t>
-            </a:r>
-          </a:p>
-          <a:p>
-            <a:pPr marL="0" marR="0" lvl="0" indent="0" algn="l" defTabSz="914400" rtl="0" eaLnBrk="1" fontAlgn="auto" latinLnBrk="0" hangingPunct="1">
-              <a:lnSpc>
-                <a:spcPct val="100000"/>
-              </a:lnSpc>
-              <a:spcBef>
-                <a:spcPts val="0"/>
-              </a:spcBef>
-              <a:spcAft>
-                <a:spcPts val="0"/>
-              </a:spcAft>
-              <a:buClrTx/>
-              <a:buSzTx/>
-              <a:buFontTx/>
-              <a:buNone/>
-              <a:tabLst/>
-              <a:defRPr/>
-            </a:pPr>
+            <a:r>
+              <a:rPr lang="en-US" dirty="0"/>
+              <a:t>Python packaging “Just works”. I am actually quite surprised that 43% of people agreed or strongly agreed with this. But still, 38% don’t.</a:t>
+            </a:r>
+          </a:p>
+          <a:p>
             <a:endParaRPr lang="en-US" dirty="0"/>
           </a:p>
           <a:p>
-            <a:pPr marL="0" marR="0" lvl="0" indent="0" algn="l" defTabSz="914400" rtl="0" eaLnBrk="1" fontAlgn="auto" latinLnBrk="0" hangingPunct="1">
-              <a:lnSpc>
-                <a:spcPct val="100000"/>
-              </a:lnSpc>
-              <a:spcBef>
-                <a:spcPts val="0"/>
-              </a:spcBef>
-              <a:spcAft>
-                <a:spcPts val="0"/>
-              </a:spcAft>
-              <a:buClrTx/>
-              <a:buSzTx/>
-              <a:buFontTx/>
-              <a:buNone/>
-              <a:tabLst/>
-              <a:defRPr/>
-            </a:pPr>
-            <a:r>
-              <a:rPr lang="en-US" dirty="0"/>
-              <a:t>For modern languages like Go and Rust, you have all of this tooling integrated into the rest of the toolchain. You don’t need a bunch of 3rd party tools.</a:t>
-            </a:r>
-          </a:p>
-          <a:p>
-            <a:pPr marL="0" marR="0" lvl="0" indent="0" algn="l" defTabSz="914400" rtl="0" eaLnBrk="1" fontAlgn="auto" latinLnBrk="0" hangingPunct="1">
-              <a:lnSpc>
-                <a:spcPct val="100000"/>
-              </a:lnSpc>
-              <a:spcBef>
-                <a:spcPts val="0"/>
-              </a:spcBef>
-              <a:spcAft>
-                <a:spcPts val="0"/>
-              </a:spcAft>
-              <a:buClrTx/>
-              <a:buSzTx/>
-              <a:buFontTx/>
-              <a:buNone/>
-              <a:tabLst/>
-              <a:defRPr/>
-            </a:pPr>
+            <a:r>
+              <a:rPr lang="en-US" dirty="0"/>
+              <a:t>Python packaging is too complex – 50% agree, and 26% do not agree</a:t>
+            </a:r>
+          </a:p>
+          <a:p>
             <a:endParaRPr lang="en-US" dirty="0"/>
           </a:p>
           <a:p>
-            <a:pPr marL="0" marR="0" lvl="0" indent="0" algn="l" defTabSz="914400" rtl="0" eaLnBrk="1" fontAlgn="auto" latinLnBrk="0" hangingPunct="1">
-              <a:lnSpc>
-                <a:spcPct val="100000"/>
-              </a:lnSpc>
-              <a:spcBef>
-                <a:spcPts val="0"/>
-              </a:spcBef>
-              <a:spcAft>
-                <a:spcPts val="0"/>
-              </a:spcAft>
-              <a:buClrTx/>
-              <a:buSzTx/>
-              <a:buFontTx/>
-              <a:buNone/>
-              <a:tabLst/>
-              <a:defRPr/>
-            </a:pPr>
-            <a:r>
-              <a:rPr lang="en-US" dirty="0"/>
-              <a:t>But also importantly, packaging is improving with time. And in this session, we’re actually going to talk about some of the current methods and techniques to help you with packaging software.</a:t>
+            <a:endParaRPr lang="en-US" dirty="0"/>
+          </a:p>
+          <a:p>
+            <a:r>
+              <a:rPr lang="en-US" dirty="0"/>
+              <a:t>Perhaps most importantly, most people think that having all of these tools is NOT beneficial for the Python ecosystem, and most people would prefer to just have the one tool.</a:t>
             </a:r>
           </a:p>
         </p:txBody>
@@ -2966,7 +3054,7 @@
           <a:p>
             <a:fld id="{405232F6-B76B-E748-9DF9-431B1E2F1F8C}" type="slidenum">
               <a:rPr lang="en-US" smtClean="0"/>
-              <a:t>7</a:t>
+              <a:t>6</a:t>
             </a:fld>
             <a:endParaRPr lang="en-US"/>
           </a:p>
@@ -2975,7 +3063,7 @@
     </p:spTree>
     <p:extLst>
       <p:ext uri="{BB962C8B-B14F-4D97-AF65-F5344CB8AC3E}">
-        <p14:creationId xmlns:p14="http://schemas.microsoft.com/office/powerpoint/2010/main" val="106198864"/>
+        <p14:creationId xmlns:p14="http://schemas.microsoft.com/office/powerpoint/2010/main" val="2731434827"/>
       </p:ext>
     </p:extLst>
   </p:cSld>
@@ -3029,18 +3117,112 @@
           <a:bodyPr/>
           <a:lstStyle/>
           <a:p>
-            <a:r>
-              <a:rPr lang="en-US" dirty="0"/>
-              <a:t>The process of taking your untitled_notebook_17.ipynb, and navigating this hellscape to produce something decent can stressful, and the first few times, you usually make some mistakes and you just leave them, oh it’s OK, whatever. So here we stand, with our intrepid cat, ready to brave this vast landscape together. </a:t>
-            </a:r>
-          </a:p>
-          <a:p>
+            <a:pPr marL="0" marR="0" lvl="0" indent="0" algn="l" defTabSz="914400" rtl="0" eaLnBrk="1" fontAlgn="auto" latinLnBrk="0" hangingPunct="1">
+              <a:lnSpc>
+                <a:spcPct val="100000"/>
+              </a:lnSpc>
+              <a:spcBef>
+                <a:spcPts val="0"/>
+              </a:spcBef>
+              <a:spcAft>
+                <a:spcPts val="0"/>
+              </a:spcAft>
+              <a:buClrTx/>
+              <a:buSzTx/>
+              <a:buFontTx/>
+              <a:buNone/>
+              <a:tabLst/>
+              <a:defRPr/>
+            </a:pPr>
+            <a:r>
+              <a:rPr lang="en-US" dirty="0"/>
+              <a:t>An overwhelming amount of people would like to have an “official” workflow. Of course. All of those different tools we had.</a:t>
+            </a:r>
+          </a:p>
+          <a:p>
+            <a:pPr marL="0" marR="0" lvl="0" indent="0" algn="l" defTabSz="914400" rtl="0" eaLnBrk="1" fontAlgn="auto" latinLnBrk="0" hangingPunct="1">
+              <a:lnSpc>
+                <a:spcPct val="100000"/>
+              </a:lnSpc>
+              <a:spcBef>
+                <a:spcPts val="0"/>
+              </a:spcBef>
+              <a:spcAft>
+                <a:spcPts val="0"/>
+              </a:spcAft>
+              <a:buClrTx/>
+              <a:buSzTx/>
+              <a:buFontTx/>
+              <a:buNone/>
+              <a:tabLst/>
+              <a:defRPr/>
+            </a:pPr>
             <a:endParaRPr lang="en-US" dirty="0"/>
           </a:p>
           <a:p>
-            <a:r>
-              <a:rPr lang="en-US" dirty="0"/>
-              <a:t>And many of the techniques that we talk about also apply to deploying production-level software. There this idea, that now you’ve developed the model you need to deploy it to production. What the hell does that even mean? Develop the model, deploy the model.</a:t>
+            <a:pPr marL="0" marR="0" lvl="0" indent="0" algn="l" defTabSz="914400" rtl="0" eaLnBrk="1" fontAlgn="auto" latinLnBrk="0" hangingPunct="1">
+              <a:lnSpc>
+                <a:spcPct val="100000"/>
+              </a:lnSpc>
+              <a:spcBef>
+                <a:spcPts val="0"/>
+              </a:spcBef>
+              <a:spcAft>
+                <a:spcPts val="0"/>
+              </a:spcAft>
+              <a:buClrTx/>
+              <a:buSzTx/>
+              <a:buFontTx/>
+              <a:buNone/>
+              <a:tabLst/>
+              <a:defRPr/>
+            </a:pPr>
+            <a:r>
+              <a:rPr lang="en-US" dirty="0"/>
+              <a:t>For modern languages like Go and Rust, you have all of this tooling integrated into the rest of the toolchain. You don’t need a bunch of 3rd party tools.</a:t>
+            </a:r>
+          </a:p>
+          <a:p>
+            <a:pPr marL="0" marR="0" lvl="0" indent="0" algn="l" defTabSz="914400" rtl="0" eaLnBrk="1" fontAlgn="auto" latinLnBrk="0" hangingPunct="1">
+              <a:lnSpc>
+                <a:spcPct val="100000"/>
+              </a:lnSpc>
+              <a:spcBef>
+                <a:spcPts val="0"/>
+              </a:spcBef>
+              <a:spcAft>
+                <a:spcPts val="0"/>
+              </a:spcAft>
+              <a:buClrTx/>
+              <a:buSzTx/>
+              <a:buFontTx/>
+              <a:buNone/>
+              <a:tabLst/>
+              <a:defRPr/>
+            </a:pPr>
+            <a:endParaRPr lang="en-US" dirty="0"/>
+          </a:p>
+          <a:p>
+            <a:pPr marL="0" marR="0" lvl="0" indent="0" algn="l" defTabSz="914400" rtl="0" eaLnBrk="1" fontAlgn="auto" latinLnBrk="0" hangingPunct="1">
+              <a:lnSpc>
+                <a:spcPct val="100000"/>
+              </a:lnSpc>
+              <a:spcBef>
+                <a:spcPts val="0"/>
+              </a:spcBef>
+              <a:spcAft>
+                <a:spcPts val="0"/>
+              </a:spcAft>
+              <a:buClrTx/>
+              <a:buSzTx/>
+              <a:buFontTx/>
+              <a:buNone/>
+              <a:tabLst/>
+              <a:defRPr/>
+            </a:pPr>
+            <a:r>
+              <a:rPr lang="en-US" dirty="0"/>
+              <a:t>But also importantly, packaging is improving with time. And in this session, we’re actually going to talk about some of the current methods and techniques to help you with packaging software.</a:t>
             </a:r>
           </a:p>
         </p:txBody>
@@ -3062,7 +3244,7 @@
           <a:p>
             <a:fld id="{405232F6-B76B-E748-9DF9-431B1E2F1F8C}" type="slidenum">
               <a:rPr lang="en-US" smtClean="0"/>
-              <a:t>8</a:t>
+              <a:t>7</a:t>
             </a:fld>
             <a:endParaRPr lang="en-US"/>
           </a:p>
@@ -3071,7 +3253,7 @@
     </p:spTree>
     <p:extLst>
       <p:ext uri="{BB962C8B-B14F-4D97-AF65-F5344CB8AC3E}">
-        <p14:creationId xmlns:p14="http://schemas.microsoft.com/office/powerpoint/2010/main" val="665958710"/>
+        <p14:creationId xmlns:p14="http://schemas.microsoft.com/office/powerpoint/2010/main" val="106198864"/>
       </p:ext>
     </p:extLst>
   </p:cSld>
@@ -3125,83 +3307,18 @@
           <a:bodyPr/>
           <a:lstStyle/>
           <a:p>
+            <a:r>
+              <a:rPr lang="en-US" dirty="0"/>
+              <a:t>The process of taking your untitled_notebook_17.ipynb, and navigating this hellscape to produce something decent can stressful, and the first few times, you usually make some mistakes and you just leave them, oh it’s OK, whatever. So here we stand, with our intrepid cat, ready to brave this vast landscape together. </a:t>
+            </a:r>
+          </a:p>
+          <a:p>
             <a:endParaRPr lang="en-US" dirty="0"/>
           </a:p>
           <a:p>
             <a:r>
               <a:rPr lang="en-US" dirty="0"/>
-              <a:t>Just before we get started, I would just like to give a brief overview of the Accelerate program.</a:t>
-            </a:r>
-          </a:p>
-          <a:p>
-            <a:endParaRPr lang="en-US" dirty="0"/>
-          </a:p>
-          <a:p>
-            <a:r>
-              <a:rPr lang="en-US" dirty="0"/>
-              <a:t>We are a group composed of researchers, machine learning engineers and </a:t>
-            </a:r>
-            <a:r>
-              <a:rPr lang="en-US" dirty="0" err="1"/>
-              <a:t>programme</a:t>
-            </a:r>
-            <a:r>
-              <a:rPr lang="en-US" dirty="0"/>
-              <a:t> / event staff.</a:t>
-            </a:r>
-          </a:p>
-          <a:p>
-            <a:endParaRPr lang="en-US" dirty="0"/>
-          </a:p>
-          <a:p>
-            <a:r>
-              <a:rPr lang="en-US" dirty="0"/>
-              <a:t>Our overarching goal is to support the adoption of AI in research at the university. </a:t>
-            </a:r>
-          </a:p>
-          <a:p>
-            <a:endParaRPr lang="en-US" dirty="0"/>
-          </a:p>
-          <a:p>
-            <a:r>
-              <a:rPr lang="en-US" dirty="0"/>
-              <a:t>We do this through activities such as</a:t>
-            </a:r>
-          </a:p>
-          <a:p>
-            <a:endParaRPr lang="en-US" dirty="0"/>
-          </a:p>
-          <a:p>
-            <a:r>
-              <a:rPr lang="en-US" dirty="0"/>
-              <a:t>Workshops (see in a second), AI Clinic, sections of university-wide workshops / events that are supported by us</a:t>
-            </a:r>
-          </a:p>
-          <a:p>
-            <a:endParaRPr lang="en-US" dirty="0"/>
-          </a:p>
-          <a:p>
-            <a:r>
-              <a:rPr lang="en-US" dirty="0"/>
-              <a:t>But also longer-term involvement on research projects in a research engineering capacity.</a:t>
-            </a:r>
-          </a:p>
-          <a:p>
-            <a:endParaRPr lang="en-US" dirty="0"/>
-          </a:p>
-          <a:p>
-            <a:r>
-              <a:rPr lang="en-US" dirty="0"/>
-              <a:t>Not just intersection of AI and Science!</a:t>
-            </a:r>
-          </a:p>
-          <a:p>
-            <a:endParaRPr lang="en-US" dirty="0"/>
-          </a:p>
-          <a:p>
-            <a:r>
-              <a:rPr lang="en-US" dirty="0"/>
-              <a:t>We’re finding more and more that researchers from the Humanities want to utilize machine learning methods, and we’re having to reassess what we think of as traditional science.</a:t>
+              <a:t>And many of the techniques that we talk about also apply to deploying production-level software. There this idea, that now you’ve developed the model you need to deploy it to production. What the hell does that even mean? Develop the model, deploy the model.</a:t>
             </a:r>
           </a:p>
         </p:txBody>
@@ -3221,9 +3338,9 @@
           <a:bodyPr/>
           <a:lstStyle/>
           <a:p>
-            <a:fld id="{6184AF57-4BD4-7D48-A093-6530DDD8C062}" type="slidenum">
+            <a:fld id="{405232F6-B76B-E748-9DF9-431B1E2F1F8C}" type="slidenum">
               <a:rPr lang="en-US" smtClean="0"/>
-              <a:t>9</a:t>
+              <a:t>8</a:t>
             </a:fld>
             <a:endParaRPr lang="en-US"/>
           </a:p>
@@ -3232,7 +3349,7 @@
     </p:spTree>
     <p:extLst>
       <p:ext uri="{BB962C8B-B14F-4D97-AF65-F5344CB8AC3E}">
-        <p14:creationId xmlns:p14="http://schemas.microsoft.com/office/powerpoint/2010/main" val="322132248"/>
+        <p14:creationId xmlns:p14="http://schemas.microsoft.com/office/powerpoint/2010/main" val="665958710"/>
       </p:ext>
     </p:extLst>
   </p:cSld>
@@ -3286,18 +3403,87 @@
           <a:bodyPr/>
           <a:lstStyle/>
           <a:p>
-            <a:r>
-              <a:rPr lang="en-US" dirty="0"/>
-              <a:t>We are ultimately here to facilitate this process of integrating AI into research.</a:t>
-            </a:r>
-          </a:p>
-          <a:p>
             <a:endParaRPr lang="en-US" dirty="0"/>
           </a:p>
           <a:p>
             <a:r>
               <a:rPr lang="en-US" dirty="0"/>
-              <a:t>We run a couple of workshops at the moment: an introduction to large language models, a hands on LLMs, an intro to generative AI with diffusion models, docker, a packaging and publishing workshop, and now a new agents 4 science workshop</a:t>
+              <a:t>Just before we get started, I would just like to give a brief overview of the Accelerate program.</a:t>
+            </a:r>
+          </a:p>
+          <a:p>
+            <a:endParaRPr lang="en-US" dirty="0"/>
+          </a:p>
+          <a:p>
+            <a:r>
+              <a:rPr lang="en-US" dirty="0"/>
+              <a:t>We are a group composed of researchers, machine learning engineers and </a:t>
+            </a:r>
+            <a:r>
+              <a:rPr lang="en-US" dirty="0" err="1"/>
+              <a:t>programme</a:t>
+            </a:r>
+            <a:r>
+              <a:rPr lang="en-US"/>
+              <a:t> staff</a:t>
+            </a:r>
+            <a:r>
+              <a:rPr lang="en-US" dirty="0"/>
+              <a:t>.</a:t>
+            </a:r>
+          </a:p>
+          <a:p>
+            <a:endParaRPr lang="en-US" dirty="0"/>
+          </a:p>
+          <a:p>
+            <a:r>
+              <a:rPr lang="en-US" dirty="0"/>
+              <a:t>Our overarching goal is to support the adoption of AI in research at the university. </a:t>
+            </a:r>
+          </a:p>
+          <a:p>
+            <a:endParaRPr lang="en-US" dirty="0"/>
+          </a:p>
+          <a:p>
+            <a:r>
+              <a:rPr lang="en-US" dirty="0"/>
+              <a:t>We do this through activities such as</a:t>
+            </a:r>
+          </a:p>
+          <a:p>
+            <a:endParaRPr lang="en-US" dirty="0"/>
+          </a:p>
+          <a:p>
+            <a:r>
+              <a:rPr lang="en-US" dirty="0"/>
+              <a:t>Workshops (see in a second), AI Clinic, sections of university-wide workshops / events that are supported by us</a:t>
+            </a:r>
+          </a:p>
+          <a:p>
+            <a:endParaRPr lang="en-US" dirty="0"/>
+          </a:p>
+          <a:p>
+            <a:r>
+              <a:rPr lang="en-US" dirty="0"/>
+              <a:t>But also longer-term involvement on research projects in a research engineering capacity.</a:t>
+            </a:r>
+          </a:p>
+          <a:p>
+            <a:endParaRPr lang="en-US" dirty="0"/>
+          </a:p>
+          <a:p>
+            <a:r>
+              <a:rPr lang="en-US" dirty="0"/>
+              <a:t>Not just intersection of AI and Science!</a:t>
+            </a:r>
+          </a:p>
+          <a:p>
+            <a:endParaRPr lang="en-US" dirty="0"/>
+          </a:p>
+          <a:p>
+            <a:r>
+              <a:rPr lang="en-US" dirty="0"/>
+              <a:t>We’re finding more and more that researchers from the Humanities want to utilize machine learning methods, and we’re having to reassess what we think of as traditional science.</a:t>
             </a:r>
           </a:p>
         </p:txBody>
@@ -3319,7 +3505,7 @@
           <a:p>
             <a:fld id="{6184AF57-4BD4-7D48-A093-6530DDD8C062}" type="slidenum">
               <a:rPr lang="en-US" smtClean="0"/>
-              <a:t>10</a:t>
+              <a:t>9</a:t>
             </a:fld>
             <a:endParaRPr lang="en-US"/>
           </a:p>
@@ -3328,7 +3514,7 @@
     </p:spTree>
     <p:extLst>
       <p:ext uri="{BB962C8B-B14F-4D97-AF65-F5344CB8AC3E}">
-        <p14:creationId xmlns:p14="http://schemas.microsoft.com/office/powerpoint/2010/main" val="2429773271"/>
+        <p14:creationId xmlns:p14="http://schemas.microsoft.com/office/powerpoint/2010/main" val="322132248"/>
       </p:ext>
     </p:extLst>
   </p:cSld>
@@ -7843,6 +8029,242 @@
 </file>
 
 <file path=ppt/slides/slide13.xml><?xml version="1.0" encoding="utf-8"?>
+<p:sld xmlns:a="http://schemas.openxmlformats.org/drawingml/2006/main" xmlns:r="http://schemas.openxmlformats.org/officeDocument/2006/relationships" xmlns:p="http://schemas.openxmlformats.org/presentationml/2006/main">
+  <p:cSld>
+    <p:spTree>
+      <p:nvGrpSpPr>
+        <p:cNvPr id="1" name=""/>
+        <p:cNvGrpSpPr/>
+        <p:nvPr/>
+      </p:nvGrpSpPr>
+      <p:grpSpPr>
+        <a:xfrm>
+          <a:off x="0" y="0"/>
+          <a:ext cx="0" cy="0"/>
+          <a:chOff x="0" y="0"/>
+          <a:chExt cx="0" cy="0"/>
+        </a:xfrm>
+      </p:grpSpPr>
+      <p:sp>
+        <p:nvSpPr>
+          <p:cNvPr id="2" name="Text Placeholder 1">
+            <a:extLst>
+              <a:ext uri="{FF2B5EF4-FFF2-40B4-BE49-F238E27FC236}">
+                <a16:creationId xmlns:a16="http://schemas.microsoft.com/office/drawing/2014/main" id="{689D1987-09AD-2DED-83D4-877DB38B91EC}"/>
+              </a:ext>
+            </a:extLst>
+          </p:cNvPr>
+          <p:cNvSpPr>
+            <a:spLocks noGrp="1"/>
+          </p:cNvSpPr>
+          <p:nvPr>
+            <p:ph type="body" sz="quarter" idx="10"/>
+          </p:nvPr>
+        </p:nvSpPr>
+        <p:spPr/>
+        <p:txBody>
+          <a:bodyPr/>
+          <a:lstStyle/>
+          <a:p>
+            <a:r>
+              <a:rPr lang="en-US" dirty="0"/>
+              <a:t>Discussion!</a:t>
+            </a:r>
+          </a:p>
+        </p:txBody>
+      </p:sp>
+      <p:sp>
+        <p:nvSpPr>
+          <p:cNvPr id="4" name="Text Placeholder 3">
+            <a:extLst>
+              <a:ext uri="{FF2B5EF4-FFF2-40B4-BE49-F238E27FC236}">
+                <a16:creationId xmlns:a16="http://schemas.microsoft.com/office/drawing/2014/main" id="{7FCF7B5F-2B54-7260-D77D-E80881452997}"/>
+              </a:ext>
+            </a:extLst>
+          </p:cNvPr>
+          <p:cNvSpPr>
+            <a:spLocks noGrp="1"/>
+          </p:cNvSpPr>
+          <p:nvPr>
+            <p:ph type="body" sz="quarter" idx="12"/>
+          </p:nvPr>
+        </p:nvSpPr>
+        <p:spPr>
+          <a:xfrm>
+            <a:off x="503659" y="1195754"/>
+            <a:ext cx="11176000" cy="4665785"/>
+          </a:xfrm>
+        </p:spPr>
+        <p:txBody>
+          <a:bodyPr>
+            <a:normAutofit lnSpcReduction="10000"/>
+          </a:bodyPr>
+          <a:lstStyle/>
+          <a:p>
+            <a:r>
+              <a:rPr lang="en-US" dirty="0"/>
+              <a:t>What made you sign up for this workshop?</a:t>
+            </a:r>
+          </a:p>
+          <a:p>
+            <a:pPr lvl="1"/>
+            <a:r>
+              <a:rPr lang="en-US" dirty="0"/>
+              <a:t>Why might packaging and publishing code be useful in your work?	</a:t>
+            </a:r>
+          </a:p>
+          <a:p>
+            <a:pPr lvl="1"/>
+            <a:r>
+              <a:rPr lang="en-US" dirty="0"/>
+              <a:t>Do you already have a project in mind you’d like to package</a:t>
+            </a:r>
+            <a:r>
+              <a:rPr lang="en-US"/>
+              <a:t>/publish?</a:t>
+            </a:r>
+            <a:endParaRPr lang="en-US" dirty="0"/>
+          </a:p>
+          <a:p>
+            <a:r>
+              <a:rPr lang="en-US" dirty="0"/>
+              <a:t>What do you primarily work/code in?</a:t>
+            </a:r>
+          </a:p>
+          <a:p>
+            <a:pPr lvl="1"/>
+            <a:r>
+              <a:rPr lang="en-US" dirty="0" err="1"/>
+              <a:t>Jupyter</a:t>
+            </a:r>
+            <a:r>
+              <a:rPr lang="en-US" dirty="0"/>
+              <a:t> notebooks? </a:t>
+            </a:r>
+            <a:r>
+              <a:rPr lang="en-US" dirty="0" err="1"/>
+              <a:t>VSCode</a:t>
+            </a:r>
+            <a:r>
+              <a:rPr lang="en-US" dirty="0"/>
+              <a:t>? PyCharm? Cursor? Something else?</a:t>
+            </a:r>
+          </a:p>
+          <a:p>
+            <a:r>
+              <a:rPr lang="en-US" dirty="0"/>
+              <a:t>Package management</a:t>
+            </a:r>
+          </a:p>
+          <a:p>
+            <a:pPr lvl="1"/>
+            <a:r>
+              <a:rPr lang="en-US" dirty="0"/>
+              <a:t>What do you use to manage dependencies in your Python projects? </a:t>
+            </a:r>
+          </a:p>
+          <a:p>
+            <a:pPr lvl="1"/>
+            <a:r>
+              <a:rPr lang="en-US" dirty="0"/>
+              <a:t>Pip, </a:t>
+            </a:r>
+            <a:r>
+              <a:rPr lang="en-US" dirty="0" err="1"/>
+              <a:t>conda</a:t>
+            </a:r>
+            <a:r>
+              <a:rPr lang="en-US" dirty="0"/>
+              <a:t>, poetry, </a:t>
+            </a:r>
+            <a:r>
+              <a:rPr lang="en-US" dirty="0" err="1"/>
+              <a:t>venv</a:t>
+            </a:r>
+            <a:r>
+              <a:rPr lang="en-US" dirty="0"/>
+              <a:t> .</a:t>
+            </a:r>
+            <a:r>
+              <a:rPr lang="en-US" dirty="0" err="1"/>
+              <a:t>etc</a:t>
+            </a:r>
+            <a:r>
+              <a:rPr lang="en-US" dirty="0"/>
+              <a:t>?</a:t>
+            </a:r>
+          </a:p>
+          <a:p>
+            <a:r>
+              <a:rPr lang="en-US" dirty="0"/>
+              <a:t>Version control</a:t>
+            </a:r>
+          </a:p>
+          <a:p>
+            <a:pPr lvl="1"/>
+            <a:r>
+              <a:rPr lang="en-US" dirty="0"/>
+              <a:t>What do you know about version control?</a:t>
+            </a:r>
+          </a:p>
+          <a:p>
+            <a:pPr lvl="1"/>
+            <a:r>
+              <a:rPr lang="en-US" dirty="0"/>
+              <a:t>Can you initialize a repo, commit and push to GitHub?</a:t>
+            </a:r>
+          </a:p>
+          <a:p>
+            <a:pPr lvl="1"/>
+            <a:r>
+              <a:rPr lang="en-US" dirty="0"/>
+              <a:t>Have you worked with more advanced features like GitHub actions, pre-commit .</a:t>
+            </a:r>
+            <a:r>
+              <a:rPr lang="en-US" dirty="0" err="1"/>
+              <a:t>etc</a:t>
+            </a:r>
+            <a:r>
+              <a:rPr lang="en-US" dirty="0"/>
+              <a:t>?</a:t>
+            </a:r>
+          </a:p>
+          <a:p>
+            <a:r>
+              <a:rPr lang="en-US" dirty="0"/>
+              <a:t>Code sharing / publication</a:t>
+            </a:r>
+          </a:p>
+          <a:p>
+            <a:pPr lvl="1"/>
+            <a:r>
+              <a:rPr lang="en-US" dirty="0"/>
+              <a:t>Have you ever released Python code? For example, have you included a GitHub link in a research paper?</a:t>
+            </a:r>
+          </a:p>
+          <a:p>
+            <a:pPr lvl="1"/>
+            <a:r>
+              <a:rPr lang="en-US" dirty="0"/>
+              <a:t>How do you usually share Python code with collaborators?</a:t>
+            </a:r>
+          </a:p>
+        </p:txBody>
+      </p:sp>
+    </p:spTree>
+    <p:extLst>
+      <p:ext uri="{BB962C8B-B14F-4D97-AF65-F5344CB8AC3E}">
+        <p14:creationId xmlns:p14="http://schemas.microsoft.com/office/powerpoint/2010/main" val="3144730863"/>
+      </p:ext>
+    </p:extLst>
+  </p:cSld>
+  <p:clrMapOvr>
+    <a:masterClrMapping/>
+  </p:clrMapOvr>
+</p:sld>
+</file>
+
+<file path=ppt/slides/slide14.xml><?xml version="1.0" encoding="utf-8"?>
 <p:sld xmlns:a="http://schemas.openxmlformats.org/drawingml/2006/main" xmlns:r="http://schemas.openxmlformats.org/officeDocument/2006/relationships" xmlns:p="http://schemas.openxmlformats.org/presentationml/2006/main">
   <p:cSld>
     <p:spTree>
@@ -9058,7 +9480,7 @@
 </p:sld>
 </file>
 
-<file path=ppt/slides/slide14.xml><?xml version="1.0" encoding="utf-8"?>
+<file path=ppt/slides/slide15.xml><?xml version="1.0" encoding="utf-8"?>
 <p:sld xmlns:a="http://schemas.openxmlformats.org/drawingml/2006/main" xmlns:r="http://schemas.openxmlformats.org/officeDocument/2006/relationships" xmlns:p="http://schemas.openxmlformats.org/presentationml/2006/main">
   <p:cSld>
     <p:spTree>
@@ -10075,7 +10497,7 @@
 </p:sld>
 </file>
 
-<file path=ppt/slides/slide15.xml><?xml version="1.0" encoding="utf-8"?>
+<file path=ppt/slides/slide16.xml><?xml version="1.0" encoding="utf-8"?>
 <p:sld xmlns:a="http://schemas.openxmlformats.org/drawingml/2006/main" xmlns:r="http://schemas.openxmlformats.org/officeDocument/2006/relationships" xmlns:p="http://schemas.openxmlformats.org/presentationml/2006/main">
   <p:cSld>
     <p:spTree>
@@ -10724,180 +11146,6 @@
 </p:sld>
 </file>
 
-<file path=ppt/slides/slide16.xml><?xml version="1.0" encoding="utf-8"?>
-<p:sld xmlns:a="http://schemas.openxmlformats.org/drawingml/2006/main" xmlns:r="http://schemas.openxmlformats.org/officeDocument/2006/relationships" xmlns:p="http://schemas.openxmlformats.org/presentationml/2006/main">
-  <p:cSld>
-    <p:spTree>
-      <p:nvGrpSpPr>
-        <p:cNvPr id="1" name=""/>
-        <p:cNvGrpSpPr/>
-        <p:nvPr/>
-      </p:nvGrpSpPr>
-      <p:grpSpPr>
-        <a:xfrm>
-          <a:off x="0" y="0"/>
-          <a:ext cx="0" cy="0"/>
-          <a:chOff x="0" y="0"/>
-          <a:chExt cx="0" cy="0"/>
-        </a:xfrm>
-      </p:grpSpPr>
-      <p:sp>
-        <p:nvSpPr>
-          <p:cNvPr id="2" name="Text Placeholder 1"/>
-          <p:cNvSpPr>
-            <a:spLocks noGrp="1"/>
-          </p:cNvSpPr>
-          <p:nvPr>
-            <p:ph type="body" sz="quarter" idx="10"/>
-          </p:nvPr>
-        </p:nvSpPr>
-        <p:spPr/>
-        <p:txBody>
-          <a:bodyPr>
-            <a:normAutofit/>
-          </a:bodyPr>
-          <a:lstStyle/>
-          <a:p>
-            <a:r>
-              <a:rPr lang="en-US" dirty="0"/>
-              <a:t>What does it mean to “publish” software</a:t>
-            </a:r>
-          </a:p>
-          <a:p>
-            <a:endParaRPr lang="en-US" dirty="0"/>
-          </a:p>
-          <a:p>
-            <a:endParaRPr lang="en-US" dirty="0"/>
-          </a:p>
-        </p:txBody>
-      </p:sp>
-      <p:sp>
-        <p:nvSpPr>
-          <p:cNvPr id="3" name="TextBox 2">
-            <a:extLst>
-              <a:ext uri="{FF2B5EF4-FFF2-40B4-BE49-F238E27FC236}">
-                <a16:creationId xmlns:a16="http://schemas.microsoft.com/office/drawing/2014/main" id="{647DFCC2-FF60-925D-7D59-79058319894C}"/>
-              </a:ext>
-            </a:extLst>
-          </p:cNvPr>
-          <p:cNvSpPr txBox="1"/>
-          <p:nvPr/>
-        </p:nvSpPr>
-        <p:spPr>
-          <a:xfrm>
-            <a:off x="503659" y="1378381"/>
-            <a:ext cx="11176000" cy="3477875"/>
-          </a:xfrm>
-          <a:prstGeom prst="rect">
-            <a:avLst/>
-          </a:prstGeom>
-          <a:noFill/>
-        </p:spPr>
-        <p:txBody>
-          <a:bodyPr wrap="square" rtlCol="0">
-            <a:spAutoFit/>
-          </a:bodyPr>
-          <a:lstStyle/>
-          <a:p>
-            <a:pPr marL="342900" indent="-342900">
-              <a:buFont typeface="Arial" panose="020B0604020202020204" pitchFamily="34" charset="0"/>
-              <a:buChar char="•"/>
-            </a:pPr>
-            <a:r>
-              <a:rPr lang="en-GB" sz="2000" dirty="0">
-                <a:effectLst/>
-              </a:rPr>
-              <a:t>Most researchers assume publishing means making your code repository public on platforms like </a:t>
-            </a:r>
-            <a:r>
-              <a:rPr lang="en-GB" sz="2000" dirty="0"/>
-              <a:t>G</a:t>
-            </a:r>
-            <a:r>
-              <a:rPr lang="en-GB" sz="2000" dirty="0">
-                <a:effectLst/>
-              </a:rPr>
-              <a:t>itHub</a:t>
-            </a:r>
-            <a:r>
-              <a:rPr lang="en-GB" sz="2000" dirty="0"/>
-              <a:t>.</a:t>
-            </a:r>
-          </a:p>
-          <a:p>
-            <a:pPr marL="342900" indent="-342900">
-              <a:buFont typeface="Arial" panose="020B0604020202020204" pitchFamily="34" charset="0"/>
-              <a:buChar char="•"/>
-            </a:pPr>
-            <a:endParaRPr lang="en-GB" sz="2000" dirty="0">
-              <a:effectLst/>
-            </a:endParaRPr>
-          </a:p>
-          <a:p>
-            <a:pPr marL="342900" indent="-342900">
-              <a:buFont typeface="Arial" panose="020B0604020202020204" pitchFamily="34" charset="0"/>
-              <a:buChar char="•"/>
-            </a:pPr>
-            <a:r>
-              <a:rPr lang="en-GB" sz="2000" dirty="0">
-                <a:effectLst/>
-              </a:rPr>
-              <a:t>This is certainly one of the most common forms of publishing software, and allows you to cover most of the benefits of publishing that we stated.</a:t>
-            </a:r>
-          </a:p>
-          <a:p>
-            <a:pPr marL="342900" indent="-342900">
-              <a:buFont typeface="Arial" panose="020B0604020202020204" pitchFamily="34" charset="0"/>
-              <a:buChar char="•"/>
-            </a:pPr>
-            <a:endParaRPr lang="en-GB" sz="2000" dirty="0"/>
-          </a:p>
-          <a:p>
-            <a:pPr marL="342900" indent="-342900">
-              <a:buFont typeface="Arial" panose="020B0604020202020204" pitchFamily="34" charset="0"/>
-              <a:buChar char="•"/>
-            </a:pPr>
-            <a:r>
-              <a:rPr lang="en-GB" sz="2000" dirty="0">
-                <a:effectLst/>
-              </a:rPr>
-              <a:t>However, there are more sophisticated forms of publishing that can provide you with a much better chance of obtaining those advantages.</a:t>
-            </a:r>
-          </a:p>
-          <a:p>
-            <a:pPr marL="342900" indent="-342900">
-              <a:buFont typeface="Arial" panose="020B0604020202020204" pitchFamily="34" charset="0"/>
-              <a:buChar char="•"/>
-            </a:pPr>
-            <a:endParaRPr lang="en-GB" sz="2000" dirty="0"/>
-          </a:p>
-          <a:p>
-            <a:pPr marL="342900" indent="-342900">
-              <a:buFont typeface="Arial" panose="020B0604020202020204" pitchFamily="34" charset="0"/>
-              <a:buChar char="•"/>
-            </a:pPr>
-            <a:r>
-              <a:rPr lang="en-GB" sz="2000" dirty="0">
-                <a:effectLst/>
-              </a:rPr>
-              <a:t>To clarify this point, I like to think of publishing as a hierarchy of publishing levels, each extra level provides you with a better chance of increasing the exposure and impact of your software. </a:t>
-            </a:r>
-          </a:p>
-        </p:txBody>
-      </p:sp>
-    </p:spTree>
-    <p:extLst>
-      <p:ext uri="{BB962C8B-B14F-4D97-AF65-F5344CB8AC3E}">
-        <p14:creationId xmlns:p14="http://schemas.microsoft.com/office/powerpoint/2010/main" val="3588409178"/>
-      </p:ext>
-    </p:extLst>
-  </p:cSld>
-  <p:clrMapOvr>
-    <a:masterClrMapping/>
-  </p:clrMapOvr>
-</p:sld>
-</file>
-
 <file path=ppt/slides/slide17.xml><?xml version="1.0" encoding="utf-8"?>
 <p:sld xmlns:a="http://schemas.openxmlformats.org/drawingml/2006/main" xmlns:r="http://schemas.openxmlformats.org/officeDocument/2006/relationships" xmlns:p="http://schemas.openxmlformats.org/presentationml/2006/main">
   <p:cSld>
@@ -10934,7 +11182,7 @@
           <a:p>
             <a:r>
               <a:rPr lang="en-US" dirty="0"/>
-              <a:t>Publishing hierarchy</a:t>
+              <a:t>What does it mean to “publish” software</a:t>
             </a:r>
           </a:p>
           <a:p>
@@ -10959,8 +11207,8 @@
         </p:nvSpPr>
         <p:spPr>
           <a:xfrm>
-            <a:off x="503659" y="1109440"/>
-            <a:ext cx="11176000" cy="5016758"/>
+            <a:off x="503659" y="1378381"/>
+            <a:ext cx="11176000" cy="3477875"/>
           </a:xfrm>
           <a:prstGeom prst="rect">
             <a:avLst/>
@@ -10978,19 +11226,45 @@
               <a:buChar char="•"/>
             </a:pPr>
             <a:r>
-              <a:rPr lang="en-GB" sz="2000" b="1" dirty="0">
-                <a:solidFill>
-                  <a:srgbClr val="0070C0"/>
-                </a:solidFill>
-                <a:effectLst/>
-              </a:rPr>
-              <a:t>Level 0</a:t>
-            </a:r>
-            <a:r>
               <a:rPr lang="en-GB" sz="2000" dirty="0">
                 <a:effectLst/>
               </a:rPr>
-              <a:t>: Barely doing anything. Email your source code to your colleagues/collaborators with explanations of how to run it.</a:t>
+              <a:t>Most researchers assume publishing means making your code repository public on platforms like </a:t>
+            </a:r>
+            <a:r>
+              <a:rPr lang="en-GB" sz="2000" dirty="0"/>
+              <a:t>G</a:t>
+            </a:r>
+            <a:r>
+              <a:rPr lang="en-GB" sz="2000" dirty="0">
+                <a:effectLst/>
+              </a:rPr>
+              <a:t>itHub</a:t>
+            </a:r>
+            <a:r>
+              <a:rPr lang="en-GB" sz="2000" dirty="0"/>
+              <a:t>.</a:t>
+            </a:r>
+          </a:p>
+          <a:p>
+            <a:pPr marL="342900" indent="-342900">
+              <a:buFont typeface="Arial" panose="020B0604020202020204" pitchFamily="34" charset="0"/>
+              <a:buChar char="•"/>
+            </a:pPr>
+            <a:endParaRPr lang="en-GB" sz="2000" dirty="0">
+              <a:effectLst/>
+            </a:endParaRPr>
+          </a:p>
+          <a:p>
+            <a:pPr marL="342900" indent="-342900">
+              <a:buFont typeface="Arial" panose="020B0604020202020204" pitchFamily="34" charset="0"/>
+              <a:buChar char="•"/>
+            </a:pPr>
+            <a:r>
+              <a:rPr lang="en-GB" sz="2000" dirty="0">
+                <a:effectLst/>
+              </a:rPr>
+              <a:t>This is certainly one of the most common forms of publishing software, and allows you to cover most of the benefits of publishing that we stated.</a:t>
             </a:r>
           </a:p>
           <a:p>
@@ -11006,39 +11280,10 @@
               <a:buChar char="•"/>
             </a:pPr>
             <a:r>
-              <a:rPr lang="en-GB" sz="2000" b="1" dirty="0">
-                <a:solidFill>
-                  <a:srgbClr val="0070C0"/>
-                </a:solidFill>
-                <a:effectLst/>
-              </a:rPr>
-              <a:t>Level 1</a:t>
-            </a:r>
-            <a:r>
               <a:rPr lang="en-GB" sz="2000" dirty="0">
                 <a:effectLst/>
               </a:rPr>
-              <a:t>: Maintain your source code publicly on GitHub under </a:t>
-            </a:r>
-            <a:r>
-              <a:rPr lang="en-GB" sz="2000" dirty="0"/>
-              <a:t>some </a:t>
-            </a:r>
-            <a:r>
-              <a:rPr lang="en-GB" sz="2000" dirty="0">
-                <a:effectLst/>
-              </a:rPr>
-              <a:t>licence. This is an important level as it now means others can fork, modify, and extend your work. However, one limitation is that most potential users of your pipeline might not be interested in your code, they just want to use your </a:t>
-            </a:r>
-            <a:r>
-              <a:rPr lang="en-GB" sz="2000" dirty="0"/>
-              <a:t>software</a:t>
-            </a:r>
-            <a:r>
-              <a:rPr lang="en-GB" sz="2000" dirty="0">
-                <a:effectLst/>
-              </a:rPr>
-              <a:t> rather than extend it.</a:t>
+              <a:t>However, there are more sophisticated forms of publishing that can provide you with a much better chance of obtaining those advantages.</a:t>
             </a:r>
           </a:p>
           <a:p>
@@ -11054,126 +11299,18 @@
               <a:buChar char="•"/>
             </a:pPr>
             <a:r>
-              <a:rPr lang="en-GB" sz="2000" b="1" dirty="0">
-                <a:solidFill>
-                  <a:srgbClr val="0070C0"/>
-                </a:solidFill>
+              <a:rPr lang="en-GB" sz="2000" dirty="0">
+                <a:effectLst/>
               </a:rPr>
-              <a:t>Level 2</a:t>
-            </a:r>
-            <a:r>
-              <a:rPr lang="en-GB" sz="2000" dirty="0"/>
-              <a:t>: Publish to build repository like </a:t>
-            </a:r>
-            <a:r>
-              <a:rPr lang="en-GB" sz="2000" dirty="0" err="1"/>
-              <a:t>PyPI</a:t>
-            </a:r>
-            <a:r>
-              <a:rPr lang="en-GB" sz="2000" dirty="0"/>
-              <a:t> or </a:t>
-            </a:r>
-            <a:r>
-              <a:rPr lang="en-GB" sz="2000" dirty="0" err="1"/>
-              <a:t>Conda</a:t>
-            </a:r>
-            <a:r>
-              <a:rPr lang="en-GB" sz="2000" dirty="0"/>
-              <a:t> Forge.</a:t>
-            </a:r>
-          </a:p>
-          <a:p>
-            <a:pPr marL="342900" indent="-342900">
-              <a:buFont typeface="Arial" panose="020B0604020202020204" pitchFamily="34" charset="0"/>
-              <a:buChar char="•"/>
-            </a:pPr>
-            <a:endParaRPr lang="en-GB" sz="2000" dirty="0"/>
-          </a:p>
-          <a:p>
-            <a:pPr marL="342900" indent="-342900">
-              <a:buFont typeface="Arial" panose="020B0604020202020204" pitchFamily="34" charset="0"/>
-              <a:buChar char="•"/>
-            </a:pPr>
-            <a:r>
-              <a:rPr lang="en-GB" sz="2000" b="1" dirty="0">
-                <a:solidFill>
-                  <a:srgbClr val="0070C0"/>
-                </a:solidFill>
-              </a:rPr>
-              <a:t>Level 3</a:t>
-            </a:r>
-            <a:r>
-              <a:rPr lang="en-GB" sz="2000" dirty="0"/>
-              <a:t>: Publish documentation with something like Read the Docs or </a:t>
-            </a:r>
-            <a:r>
-              <a:rPr lang="en-GB" sz="2000" dirty="0" err="1"/>
-              <a:t>MkDocs</a:t>
-            </a:r>
-            <a:r>
-              <a:rPr lang="en-GB" sz="2000" dirty="0"/>
-              <a:t>.</a:t>
-            </a:r>
-          </a:p>
-          <a:p>
-            <a:pPr marL="342900" indent="-342900">
-              <a:buFont typeface="Arial" panose="020B0604020202020204" pitchFamily="34" charset="0"/>
-              <a:buChar char="•"/>
-            </a:pPr>
-            <a:endParaRPr lang="en-GB" sz="2000" dirty="0"/>
-          </a:p>
-          <a:p>
-            <a:pPr marL="342900" indent="-342900">
-              <a:buFont typeface="Arial" panose="020B0604020202020204" pitchFamily="34" charset="0"/>
-              <a:buChar char="•"/>
-            </a:pPr>
-            <a:r>
-              <a:rPr lang="en-GB" sz="2000" b="1" dirty="0">
-                <a:solidFill>
-                  <a:srgbClr val="0070C0"/>
-                </a:solidFill>
-              </a:rPr>
-              <a:t>Level 4</a:t>
-            </a:r>
-            <a:r>
-              <a:rPr lang="en-GB" sz="2000" dirty="0"/>
-              <a:t>: Automate all of the above!</a:t>
-            </a:r>
-          </a:p>
-          <a:p>
-            <a:pPr marL="342900" indent="-342900">
-              <a:buFont typeface="Arial" panose="020B0604020202020204" pitchFamily="34" charset="0"/>
-              <a:buChar char="•"/>
-            </a:pPr>
-            <a:endParaRPr lang="en-GB" sz="2000" dirty="0"/>
-          </a:p>
-          <a:p>
-            <a:pPr marL="342900" indent="-342900">
-              <a:buFont typeface="Arial" panose="020B0604020202020204" pitchFamily="34" charset="0"/>
-              <a:buChar char="•"/>
-            </a:pPr>
-            <a:r>
-              <a:rPr lang="en-GB" sz="2000" b="1" dirty="0">
-                <a:solidFill>
-                  <a:srgbClr val="0070C0"/>
-                </a:solidFill>
-              </a:rPr>
-              <a:t>Level 5</a:t>
-            </a:r>
-            <a:r>
-              <a:rPr lang="en-GB" sz="2000" dirty="0"/>
-              <a:t>: All of the above, and publish your pipeline or software in a software-specific journal like the Journal for Open Source Software (JOSS).</a:t>
-            </a:r>
-            <a:endParaRPr lang="en-GB" sz="2000" dirty="0">
-              <a:effectLst/>
-            </a:endParaRPr>
+              <a:t>To clarify this point, I like to think of publishing as a hierarchy of publishing levels, each extra level provides you with a better chance of increasing the exposure and impact of your software. </a:t>
+            </a:r>
           </a:p>
         </p:txBody>
       </p:sp>
     </p:spTree>
     <p:extLst>
       <p:ext uri="{BB962C8B-B14F-4D97-AF65-F5344CB8AC3E}">
-        <p14:creationId xmlns:p14="http://schemas.microsoft.com/office/powerpoint/2010/main" val="263237196"/>
+        <p14:creationId xmlns:p14="http://schemas.microsoft.com/office/powerpoint/2010/main" val="3588409178"/>
       </p:ext>
     </p:extLst>
   </p:cSld>
@@ -11202,6 +11339,291 @@
       </p:grpSpPr>
       <p:sp>
         <p:nvSpPr>
+          <p:cNvPr id="2" name="Text Placeholder 1"/>
+          <p:cNvSpPr>
+            <a:spLocks noGrp="1"/>
+          </p:cNvSpPr>
+          <p:nvPr>
+            <p:ph type="body" sz="quarter" idx="10"/>
+          </p:nvPr>
+        </p:nvSpPr>
+        <p:spPr/>
+        <p:txBody>
+          <a:bodyPr>
+            <a:normAutofit/>
+          </a:bodyPr>
+          <a:lstStyle/>
+          <a:p>
+            <a:r>
+              <a:rPr lang="en-US" dirty="0"/>
+              <a:t>Publishing hierarchy</a:t>
+            </a:r>
+          </a:p>
+          <a:p>
+            <a:endParaRPr lang="en-US" dirty="0"/>
+          </a:p>
+          <a:p>
+            <a:endParaRPr lang="en-US" dirty="0"/>
+          </a:p>
+        </p:txBody>
+      </p:sp>
+      <p:sp>
+        <p:nvSpPr>
+          <p:cNvPr id="3" name="TextBox 2">
+            <a:extLst>
+              <a:ext uri="{FF2B5EF4-FFF2-40B4-BE49-F238E27FC236}">
+                <a16:creationId xmlns:a16="http://schemas.microsoft.com/office/drawing/2014/main" id="{647DFCC2-FF60-925D-7D59-79058319894C}"/>
+              </a:ext>
+            </a:extLst>
+          </p:cNvPr>
+          <p:cNvSpPr txBox="1"/>
+          <p:nvPr/>
+        </p:nvSpPr>
+        <p:spPr>
+          <a:xfrm>
+            <a:off x="503659" y="1109440"/>
+            <a:ext cx="11176000" cy="5016758"/>
+          </a:xfrm>
+          <a:prstGeom prst="rect">
+            <a:avLst/>
+          </a:prstGeom>
+          <a:noFill/>
+        </p:spPr>
+        <p:txBody>
+          <a:bodyPr wrap="square" rtlCol="0">
+            <a:spAutoFit/>
+          </a:bodyPr>
+          <a:lstStyle/>
+          <a:p>
+            <a:pPr marL="342900" indent="-342900">
+              <a:buFont typeface="Arial" panose="020B0604020202020204" pitchFamily="34" charset="0"/>
+              <a:buChar char="•"/>
+            </a:pPr>
+            <a:r>
+              <a:rPr lang="en-GB" sz="2000" b="1" dirty="0">
+                <a:solidFill>
+                  <a:srgbClr val="0070C0"/>
+                </a:solidFill>
+                <a:effectLst/>
+              </a:rPr>
+              <a:t>Level 0</a:t>
+            </a:r>
+            <a:r>
+              <a:rPr lang="en-GB" sz="2000" dirty="0">
+                <a:effectLst/>
+              </a:rPr>
+              <a:t>: Barely doing anything. Email your source code to your colleagues/collaborators with explanations of how to run it.</a:t>
+            </a:r>
+          </a:p>
+          <a:p>
+            <a:pPr marL="342900" indent="-342900">
+              <a:buFont typeface="Arial" panose="020B0604020202020204" pitchFamily="34" charset="0"/>
+              <a:buChar char="•"/>
+            </a:pPr>
+            <a:endParaRPr lang="en-GB" sz="2000" dirty="0"/>
+          </a:p>
+          <a:p>
+            <a:pPr marL="342900" indent="-342900">
+              <a:buFont typeface="Arial" panose="020B0604020202020204" pitchFamily="34" charset="0"/>
+              <a:buChar char="•"/>
+            </a:pPr>
+            <a:r>
+              <a:rPr lang="en-GB" sz="2000" b="1" dirty="0">
+                <a:solidFill>
+                  <a:srgbClr val="0070C0"/>
+                </a:solidFill>
+                <a:effectLst/>
+              </a:rPr>
+              <a:t>Level 1</a:t>
+            </a:r>
+            <a:r>
+              <a:rPr lang="en-GB" sz="2000" dirty="0">
+                <a:effectLst/>
+              </a:rPr>
+              <a:t>: Maintain your source code publicly on GitHub under </a:t>
+            </a:r>
+            <a:r>
+              <a:rPr lang="en-GB" sz="2000" dirty="0"/>
+              <a:t>some </a:t>
+            </a:r>
+            <a:r>
+              <a:rPr lang="en-GB" sz="2000" dirty="0">
+                <a:effectLst/>
+              </a:rPr>
+              <a:t>licence. This is an important level as it now means others can fork, modify, and extend your work. However, one limitation is that most potential users of your pipeline might not be interested in your code, they just want to use your </a:t>
+            </a:r>
+            <a:r>
+              <a:rPr lang="en-GB" sz="2000" dirty="0"/>
+              <a:t>software</a:t>
+            </a:r>
+            <a:r>
+              <a:rPr lang="en-GB" sz="2000" dirty="0">
+                <a:effectLst/>
+              </a:rPr>
+              <a:t> rather than extend it.</a:t>
+            </a:r>
+          </a:p>
+          <a:p>
+            <a:pPr marL="342900" indent="-342900">
+              <a:buFont typeface="Arial" panose="020B0604020202020204" pitchFamily="34" charset="0"/>
+              <a:buChar char="•"/>
+            </a:pPr>
+            <a:endParaRPr lang="en-GB" sz="2000" dirty="0"/>
+          </a:p>
+          <a:p>
+            <a:pPr marL="342900" indent="-342900">
+              <a:buFont typeface="Arial" panose="020B0604020202020204" pitchFamily="34" charset="0"/>
+              <a:buChar char="•"/>
+            </a:pPr>
+            <a:r>
+              <a:rPr lang="en-GB" sz="2000" b="1" dirty="0">
+                <a:solidFill>
+                  <a:srgbClr val="0070C0"/>
+                </a:solidFill>
+              </a:rPr>
+              <a:t>Level 2</a:t>
+            </a:r>
+            <a:r>
+              <a:rPr lang="en-GB" sz="2000" dirty="0"/>
+              <a:t>: Publish to build repository like </a:t>
+            </a:r>
+            <a:r>
+              <a:rPr lang="en-GB" sz="2000" dirty="0" err="1"/>
+              <a:t>PyPI</a:t>
+            </a:r>
+            <a:r>
+              <a:rPr lang="en-GB" sz="2000" dirty="0"/>
+              <a:t> or </a:t>
+            </a:r>
+            <a:r>
+              <a:rPr lang="en-GB" sz="2000" dirty="0" err="1"/>
+              <a:t>Conda</a:t>
+            </a:r>
+            <a:r>
+              <a:rPr lang="en-GB" sz="2000" dirty="0"/>
+              <a:t> Forge.</a:t>
+            </a:r>
+          </a:p>
+          <a:p>
+            <a:pPr marL="342900" indent="-342900">
+              <a:buFont typeface="Arial" panose="020B0604020202020204" pitchFamily="34" charset="0"/>
+              <a:buChar char="•"/>
+            </a:pPr>
+            <a:endParaRPr lang="en-GB" sz="2000" dirty="0"/>
+          </a:p>
+          <a:p>
+            <a:pPr marL="342900" indent="-342900">
+              <a:buFont typeface="Arial" panose="020B0604020202020204" pitchFamily="34" charset="0"/>
+              <a:buChar char="•"/>
+            </a:pPr>
+            <a:r>
+              <a:rPr lang="en-GB" sz="2000" b="1" dirty="0">
+                <a:solidFill>
+                  <a:srgbClr val="0070C0"/>
+                </a:solidFill>
+              </a:rPr>
+              <a:t>Level 3</a:t>
+            </a:r>
+            <a:r>
+              <a:rPr lang="en-GB" sz="2000" dirty="0"/>
+              <a:t>: Publish documentation with something like Read the Docs or </a:t>
+            </a:r>
+            <a:r>
+              <a:rPr lang="en-GB" sz="2000" dirty="0" err="1"/>
+              <a:t>MkDocs</a:t>
+            </a:r>
+            <a:r>
+              <a:rPr lang="en-GB" sz="2000" dirty="0"/>
+              <a:t>.</a:t>
+            </a:r>
+          </a:p>
+          <a:p>
+            <a:pPr marL="342900" indent="-342900">
+              <a:buFont typeface="Arial" panose="020B0604020202020204" pitchFamily="34" charset="0"/>
+              <a:buChar char="•"/>
+            </a:pPr>
+            <a:endParaRPr lang="en-GB" sz="2000" dirty="0"/>
+          </a:p>
+          <a:p>
+            <a:pPr marL="342900" indent="-342900">
+              <a:buFont typeface="Arial" panose="020B0604020202020204" pitchFamily="34" charset="0"/>
+              <a:buChar char="•"/>
+            </a:pPr>
+            <a:r>
+              <a:rPr lang="en-GB" sz="2000" b="1" dirty="0">
+                <a:solidFill>
+                  <a:srgbClr val="0070C0"/>
+                </a:solidFill>
+              </a:rPr>
+              <a:t>Level 4</a:t>
+            </a:r>
+            <a:r>
+              <a:rPr lang="en-GB" sz="2000" dirty="0"/>
+              <a:t>: Automate all of the above!</a:t>
+            </a:r>
+          </a:p>
+          <a:p>
+            <a:pPr marL="342900" indent="-342900">
+              <a:buFont typeface="Arial" panose="020B0604020202020204" pitchFamily="34" charset="0"/>
+              <a:buChar char="•"/>
+            </a:pPr>
+            <a:endParaRPr lang="en-GB" sz="2000" dirty="0"/>
+          </a:p>
+          <a:p>
+            <a:pPr marL="342900" indent="-342900">
+              <a:buFont typeface="Arial" panose="020B0604020202020204" pitchFamily="34" charset="0"/>
+              <a:buChar char="•"/>
+            </a:pPr>
+            <a:r>
+              <a:rPr lang="en-GB" sz="2000" b="1" dirty="0">
+                <a:solidFill>
+                  <a:srgbClr val="0070C0"/>
+                </a:solidFill>
+              </a:rPr>
+              <a:t>Level 5</a:t>
+            </a:r>
+            <a:r>
+              <a:rPr lang="en-GB" sz="2000" dirty="0"/>
+              <a:t>: All of the above, and publish your pipeline or software in a software-specific journal like the Journal for Open Source Software (JOSS).</a:t>
+            </a:r>
+            <a:endParaRPr lang="en-GB" sz="2000" dirty="0">
+              <a:effectLst/>
+            </a:endParaRPr>
+          </a:p>
+        </p:txBody>
+      </p:sp>
+    </p:spTree>
+    <p:extLst>
+      <p:ext uri="{BB962C8B-B14F-4D97-AF65-F5344CB8AC3E}">
+        <p14:creationId xmlns:p14="http://schemas.microsoft.com/office/powerpoint/2010/main" val="263237196"/>
+      </p:ext>
+    </p:extLst>
+  </p:cSld>
+  <p:clrMapOvr>
+    <a:masterClrMapping/>
+  </p:clrMapOvr>
+</p:sld>
+</file>
+
+<file path=ppt/slides/slide19.xml><?xml version="1.0" encoding="utf-8"?>
+<p:sld xmlns:a="http://schemas.openxmlformats.org/drawingml/2006/main" xmlns:r="http://schemas.openxmlformats.org/officeDocument/2006/relationships" xmlns:p="http://schemas.openxmlformats.org/presentationml/2006/main">
+  <p:cSld>
+    <p:spTree>
+      <p:nvGrpSpPr>
+        <p:cNvPr id="1" name=""/>
+        <p:cNvGrpSpPr/>
+        <p:nvPr/>
+      </p:nvGrpSpPr>
+      <p:grpSpPr>
+        <a:xfrm>
+          <a:off x="0" y="0"/>
+          <a:ext cx="0" cy="0"/>
+          <a:chOff x="0" y="0"/>
+          <a:chExt cx="0" cy="0"/>
+        </a:xfrm>
+      </p:grpSpPr>
+      <p:sp>
+        <p:nvSpPr>
           <p:cNvPr id="2" name="Text Placeholder 1">
             <a:extLst>
               <a:ext uri="{FF2B5EF4-FFF2-40B4-BE49-F238E27FC236}">
@@ -11251,7 +11673,7 @@
           <a:p>
             <a:r>
               <a:rPr lang="en-US" dirty="0"/>
-              <a:t>The workshop aims to take a notebook and achieve four things:</a:t>
+              <a:t>The workshop aims to take a notebook and:</a:t>
             </a:r>
           </a:p>
         </p:txBody>
@@ -11279,25 +11701,8 @@
           <a:p>
             <a:r>
               <a:rPr lang="en-US" dirty="0"/>
-              <a:t>Build a user interface</a:t>
-            </a:r>
-          </a:p>
-          <a:p>
-            <a:pPr lvl="1"/>
-            <a:r>
-              <a:rPr lang="en-US" dirty="0"/>
-              <a:t>We might want certain people to be able to interact with our code in a way that doesn’t involve actual coding!</a:t>
-            </a:r>
-          </a:p>
-          <a:p>
-            <a:pPr lvl="1"/>
-            <a:r>
-              <a:rPr lang="en-US" dirty="0"/>
-              <a:t>Useful if working on clinical projects or with people who do not need to develop on or build on the software.</a:t>
-            </a:r>
-          </a:p>
-          <a:p>
-            <a:endParaRPr lang="en-US" dirty="0"/>
+              <a:t>Refactor to a canonical python package structure and manage with UV</a:t>
+            </a:r>
           </a:p>
           <a:p>
             <a:r>
@@ -11328,17 +11733,16 @@
             </a:r>
           </a:p>
           <a:p>
-            <a:pPr lvl="1"/>
-            <a:endParaRPr lang="en-US" dirty="0"/>
+            <a:r>
+              <a:rPr lang="en-US" dirty="0"/>
+              <a:t>Add a basic test suite</a:t>
+            </a:r>
           </a:p>
           <a:p>
             <a:r>
               <a:rPr lang="en-US" dirty="0"/>
               <a:t>Make our package pip installable with documentation</a:t>
             </a:r>
-          </a:p>
-          <a:p>
-            <a:endParaRPr lang="en-US" dirty="0"/>
           </a:p>
           <a:p>
             <a:r>
@@ -11361,7 +11765,154 @@
 </p:sld>
 </file>
 
-<file path=ppt/slides/slide19.xml><?xml version="1.0" encoding="utf-8"?>
+<file path=ppt/slides/slide2.xml><?xml version="1.0" encoding="utf-8"?>
+<p:sld xmlns:a="http://schemas.openxmlformats.org/drawingml/2006/main" xmlns:r="http://schemas.openxmlformats.org/officeDocument/2006/relationships" xmlns:p="http://schemas.openxmlformats.org/presentationml/2006/main">
+  <p:cSld>
+    <p:spTree>
+      <p:nvGrpSpPr>
+        <p:cNvPr id="1" name=""/>
+        <p:cNvGrpSpPr/>
+        <p:nvPr/>
+      </p:nvGrpSpPr>
+      <p:grpSpPr>
+        <a:xfrm>
+          <a:off x="0" y="0"/>
+          <a:ext cx="0" cy="0"/>
+          <a:chOff x="0" y="0"/>
+          <a:chExt cx="0" cy="0"/>
+        </a:xfrm>
+      </p:grpSpPr>
+      <p:sp>
+        <p:nvSpPr>
+          <p:cNvPr id="2" name="Text Placeholder 1">
+            <a:extLst>
+              <a:ext uri="{FF2B5EF4-FFF2-40B4-BE49-F238E27FC236}">
+                <a16:creationId xmlns:a16="http://schemas.microsoft.com/office/drawing/2014/main" id="{E0420195-C79B-3B0F-D479-86340A2C12BB}"/>
+              </a:ext>
+            </a:extLst>
+          </p:cNvPr>
+          <p:cNvSpPr>
+            <a:spLocks noGrp="1"/>
+          </p:cNvSpPr>
+          <p:nvPr>
+            <p:ph type="body" sz="quarter" idx="10"/>
+          </p:nvPr>
+        </p:nvSpPr>
+        <p:spPr/>
+        <p:txBody>
+          <a:bodyPr/>
+          <a:lstStyle/>
+          <a:p>
+            <a:r>
+              <a:rPr lang="en-US" dirty="0"/>
+              <a:t>Documentation</a:t>
+            </a:r>
+          </a:p>
+        </p:txBody>
+      </p:sp>
+      <p:sp>
+        <p:nvSpPr>
+          <p:cNvPr id="3" name="Text Placeholder 2">
+            <a:extLst>
+              <a:ext uri="{FF2B5EF4-FFF2-40B4-BE49-F238E27FC236}">
+                <a16:creationId xmlns:a16="http://schemas.microsoft.com/office/drawing/2014/main" id="{3299C1E5-C214-D48B-72FD-890B98593842}"/>
+              </a:ext>
+            </a:extLst>
+          </p:cNvPr>
+          <p:cNvSpPr>
+            <a:spLocks noGrp="1"/>
+          </p:cNvSpPr>
+          <p:nvPr>
+            <p:ph type="body" sz="quarter" idx="11"/>
+          </p:nvPr>
+        </p:nvSpPr>
+        <p:spPr>
+          <a:xfrm>
+            <a:off x="503659" y="1146008"/>
+            <a:ext cx="11176000" cy="5618859"/>
+          </a:xfrm>
+        </p:spPr>
+        <p:txBody>
+          <a:bodyPr>
+            <a:normAutofit/>
+          </a:bodyPr>
+          <a:lstStyle/>
+          <a:p>
+            <a:r>
+              <a:rPr lang="en-US" dirty="0"/>
+              <a:t>Documentation for hands-on exercises available at:</a:t>
+            </a:r>
+          </a:p>
+          <a:p>
+            <a:endParaRPr lang="en-US" dirty="0"/>
+          </a:p>
+          <a:p>
+            <a:r>
+              <a:rPr lang="en-US" b="1" u="sng" dirty="0" err="1">
+                <a:solidFill>
+                  <a:srgbClr val="235DE3"/>
+                </a:solidFill>
+              </a:rPr>
+              <a:t>docs.science.ai.cam.ac.uk</a:t>
+            </a:r>
+            <a:r>
+              <a:rPr lang="en-US" b="1" u="sng" dirty="0">
+                <a:solidFill>
+                  <a:srgbClr val="235DE3"/>
+                </a:solidFill>
+              </a:rPr>
+              <a:t>/packaging-publishing</a:t>
+            </a:r>
+          </a:p>
+          <a:p>
+            <a:endParaRPr lang="en-US" dirty="0"/>
+          </a:p>
+        </p:txBody>
+      </p:sp>
+      <p:pic>
+        <p:nvPicPr>
+          <p:cNvPr id="5" name="Picture 4">
+            <a:extLst>
+              <a:ext uri="{FF2B5EF4-FFF2-40B4-BE49-F238E27FC236}">
+                <a16:creationId xmlns:a16="http://schemas.microsoft.com/office/drawing/2014/main" id="{87871792-B3FC-815F-FFEE-2E61E7225FE3}"/>
+              </a:ext>
+            </a:extLst>
+          </p:cNvPr>
+          <p:cNvPicPr>
+            <a:picLocks noChangeAspect="1"/>
+          </p:cNvPicPr>
+          <p:nvPr/>
+        </p:nvPicPr>
+        <p:blipFill>
+          <a:blip r:embed="rId3"/>
+          <a:stretch>
+            <a:fillRect/>
+          </a:stretch>
+        </p:blipFill>
+        <p:spPr>
+          <a:xfrm>
+            <a:off x="3310466" y="2725864"/>
+            <a:ext cx="5096934" cy="3430628"/>
+          </a:xfrm>
+          <a:prstGeom prst="rect">
+            <a:avLst/>
+          </a:prstGeom>
+        </p:spPr>
+      </p:pic>
+    </p:spTree>
+    <p:extLst>
+      <p:ext uri="{BB962C8B-B14F-4D97-AF65-F5344CB8AC3E}">
+        <p14:creationId xmlns:p14="http://schemas.microsoft.com/office/powerpoint/2010/main" val="4191210072"/>
+      </p:ext>
+    </p:extLst>
+  </p:cSld>
+  <p:clrMapOvr>
+    <a:masterClrMapping/>
+  </p:clrMapOvr>
+</p:sld>
+</file>
+
+<file path=ppt/slides/slide20.xml><?xml version="1.0" encoding="utf-8"?>
 <p:sld xmlns:a="http://schemas.openxmlformats.org/drawingml/2006/main" xmlns:r="http://schemas.openxmlformats.org/officeDocument/2006/relationships" xmlns:p="http://schemas.openxmlformats.org/presentationml/2006/main">
   <p:cSld>
     <p:spTree>
@@ -11650,153 +12201,6 @@
     <p:extLst>
       <p:ext uri="{BB962C8B-B14F-4D97-AF65-F5344CB8AC3E}">
         <p14:creationId xmlns:p14="http://schemas.microsoft.com/office/powerpoint/2010/main" val="1363420478"/>
-      </p:ext>
-    </p:extLst>
-  </p:cSld>
-  <p:clrMapOvr>
-    <a:masterClrMapping/>
-  </p:clrMapOvr>
-</p:sld>
-</file>
-
-<file path=ppt/slides/slide2.xml><?xml version="1.0" encoding="utf-8"?>
-<p:sld xmlns:a="http://schemas.openxmlformats.org/drawingml/2006/main" xmlns:r="http://schemas.openxmlformats.org/officeDocument/2006/relationships" xmlns:p="http://schemas.openxmlformats.org/presentationml/2006/main">
-  <p:cSld>
-    <p:spTree>
-      <p:nvGrpSpPr>
-        <p:cNvPr id="1" name=""/>
-        <p:cNvGrpSpPr/>
-        <p:nvPr/>
-      </p:nvGrpSpPr>
-      <p:grpSpPr>
-        <a:xfrm>
-          <a:off x="0" y="0"/>
-          <a:ext cx="0" cy="0"/>
-          <a:chOff x="0" y="0"/>
-          <a:chExt cx="0" cy="0"/>
-        </a:xfrm>
-      </p:grpSpPr>
-      <p:sp>
-        <p:nvSpPr>
-          <p:cNvPr id="2" name="Text Placeholder 1">
-            <a:extLst>
-              <a:ext uri="{FF2B5EF4-FFF2-40B4-BE49-F238E27FC236}">
-                <a16:creationId xmlns:a16="http://schemas.microsoft.com/office/drawing/2014/main" id="{E0420195-C79B-3B0F-D479-86340A2C12BB}"/>
-              </a:ext>
-            </a:extLst>
-          </p:cNvPr>
-          <p:cNvSpPr>
-            <a:spLocks noGrp="1"/>
-          </p:cNvSpPr>
-          <p:nvPr>
-            <p:ph type="body" sz="quarter" idx="10"/>
-          </p:nvPr>
-        </p:nvSpPr>
-        <p:spPr/>
-        <p:txBody>
-          <a:bodyPr/>
-          <a:lstStyle/>
-          <a:p>
-            <a:r>
-              <a:rPr lang="en-US" dirty="0"/>
-              <a:t>Documentation</a:t>
-            </a:r>
-          </a:p>
-        </p:txBody>
-      </p:sp>
-      <p:sp>
-        <p:nvSpPr>
-          <p:cNvPr id="3" name="Text Placeholder 2">
-            <a:extLst>
-              <a:ext uri="{FF2B5EF4-FFF2-40B4-BE49-F238E27FC236}">
-                <a16:creationId xmlns:a16="http://schemas.microsoft.com/office/drawing/2014/main" id="{3299C1E5-C214-D48B-72FD-890B98593842}"/>
-              </a:ext>
-            </a:extLst>
-          </p:cNvPr>
-          <p:cNvSpPr>
-            <a:spLocks noGrp="1"/>
-          </p:cNvSpPr>
-          <p:nvPr>
-            <p:ph type="body" sz="quarter" idx="11"/>
-          </p:nvPr>
-        </p:nvSpPr>
-        <p:spPr>
-          <a:xfrm>
-            <a:off x="503659" y="1146008"/>
-            <a:ext cx="11176000" cy="5618859"/>
-          </a:xfrm>
-        </p:spPr>
-        <p:txBody>
-          <a:bodyPr>
-            <a:normAutofit/>
-          </a:bodyPr>
-          <a:lstStyle/>
-          <a:p>
-            <a:r>
-              <a:rPr lang="en-US" dirty="0"/>
-              <a:t>Documentation for hands-on exercises available at:</a:t>
-            </a:r>
-          </a:p>
-          <a:p>
-            <a:endParaRPr lang="en-US" dirty="0"/>
-          </a:p>
-          <a:p>
-            <a:r>
-              <a:rPr lang="en-US" b="1" u="sng" dirty="0" err="1">
-                <a:solidFill>
-                  <a:srgbClr val="235DE3"/>
-                </a:solidFill>
-              </a:rPr>
-              <a:t>docs.science.ai.cam.ac.uk</a:t>
-            </a:r>
-            <a:r>
-              <a:rPr lang="en-US" b="1" u="sng" dirty="0">
-                <a:solidFill>
-                  <a:srgbClr val="235DE3"/>
-                </a:solidFill>
-              </a:rPr>
-              <a:t>/packaging-publishing</a:t>
-            </a:r>
-          </a:p>
-          <a:p>
-            <a:endParaRPr lang="en-US" dirty="0"/>
-          </a:p>
-        </p:txBody>
-      </p:sp>
-      <p:pic>
-        <p:nvPicPr>
-          <p:cNvPr id="5" name="Picture 4">
-            <a:extLst>
-              <a:ext uri="{FF2B5EF4-FFF2-40B4-BE49-F238E27FC236}">
-                <a16:creationId xmlns:a16="http://schemas.microsoft.com/office/drawing/2014/main" id="{87871792-B3FC-815F-FFEE-2E61E7225FE3}"/>
-              </a:ext>
-            </a:extLst>
-          </p:cNvPr>
-          <p:cNvPicPr>
-            <a:picLocks noChangeAspect="1"/>
-          </p:cNvPicPr>
-          <p:nvPr/>
-        </p:nvPicPr>
-        <p:blipFill>
-          <a:blip r:embed="rId2"/>
-          <a:stretch>
-            <a:fillRect/>
-          </a:stretch>
-        </p:blipFill>
-        <p:spPr>
-          <a:xfrm>
-            <a:off x="3310466" y="2725864"/>
-            <a:ext cx="5096934" cy="3430628"/>
-          </a:xfrm>
-          <a:prstGeom prst="rect">
-            <a:avLst/>
-          </a:prstGeom>
-        </p:spPr>
-      </p:pic>
-    </p:spTree>
-    <p:extLst>
-      <p:ext uri="{BB962C8B-B14F-4D97-AF65-F5344CB8AC3E}">
-        <p14:creationId xmlns:p14="http://schemas.microsoft.com/office/powerpoint/2010/main" val="4191210072"/>
       </p:ext>
     </p:extLst>
   </p:cSld>
@@ -13454,6 +13858,36 @@
           </a:p>
         </p:txBody>
       </p:sp>
+      <p:pic>
+        <p:nvPicPr>
+          <p:cNvPr id="3" name="Picture 2">
+            <a:extLst>
+              <a:ext uri="{FF2B5EF4-FFF2-40B4-BE49-F238E27FC236}">
+                <a16:creationId xmlns:a16="http://schemas.microsoft.com/office/drawing/2014/main" id="{D2011DA7-22A1-64AB-4EDF-B582B3F81D4B}"/>
+              </a:ext>
+            </a:extLst>
+          </p:cNvPr>
+          <p:cNvPicPr>
+            <a:picLocks noChangeAspect="1"/>
+          </p:cNvPicPr>
+          <p:nvPr/>
+        </p:nvPicPr>
+        <p:blipFill>
+          <a:blip r:embed="rId3"/>
+          <a:stretch>
+            <a:fillRect/>
+          </a:stretch>
+        </p:blipFill>
+        <p:spPr>
+          <a:xfrm>
+            <a:off x="4793854" y="3252068"/>
+            <a:ext cx="2595609" cy="2609471"/>
+          </a:xfrm>
+          <a:prstGeom prst="rect">
+            <a:avLst/>
+          </a:prstGeom>
+        </p:spPr>
+      </p:pic>
     </p:spTree>
     <p:extLst>
       <p:ext uri="{BB962C8B-B14F-4D97-AF65-F5344CB8AC3E}">
